--- a/python-for-researchers/session1/Session 1.pptx
+++ b/python-for-researchers/session1/Session 1.pptx
@@ -11,22 +11,17 @@
     <p:sldId id="259" r:id="rId9"/>
     <p:sldId id="260" r:id="rId10"/>
     <p:sldId id="261" r:id="rId11"/>
-    <p:sldId id="262" r:id="rId12"/>
   </p:sldIdLst>
   <p:sldSz cx="18288000" cy="10287000"/>
   <p:notesSz cx="6858000" cy="9144000"/>
   <p:embeddedFontLst>
     <p:embeddedFont>
       <p:font typeface="Lato Bold" charset="1" panose="020F0502020204030203"/>
-      <p:regular r:id="rId13"/>
-    </p:embeddedFont>
-    <p:embeddedFont>
-      <p:font typeface="Poppins Light" charset="1" panose="02000000000000000000"/>
-      <p:regular r:id="rId14"/>
+      <p:regular r:id="rId12"/>
     </p:embeddedFont>
     <p:embeddedFont>
       <p:font typeface="Lato" charset="1" panose="020F0502020204030203"/>
-      <p:regular r:id="rId15"/>
+      <p:regular r:id="rId13"/>
     </p:embeddedFont>
   </p:embeddedFontLst>
   <p:defaultTextStyle>
@@ -3079,28 +3074,64 @@
           <a:chExt cx="0" cy="0"/>
         </a:xfrm>
       </p:grpSpPr>
-      <p:sp>
-        <p:nvSpPr>
-          <p:cNvPr name="AutoShape 2" id="2"/>
-          <p:cNvSpPr/>
+      <p:grpSp>
+        <p:nvGrpSpPr>
+          <p:cNvPr name="Group 2" id="2"/>
+          <p:cNvGrpSpPr/>
           <p:nvPr/>
-        </p:nvSpPr>
-        <p:spPr>
+        </p:nvGrpSpPr>
+        <p:grpSpPr>
           <a:xfrm rot="0">
             <a:off x="0" y="0"/>
             <a:ext cx="10922725" cy="10287000"/>
+            <a:chOff x="0" y="0"/>
+            <a:chExt cx="14563633" cy="13716000"/>
           </a:xfrm>
-          <a:prstGeom prst="rect">
-            <a:avLst/>
-          </a:prstGeom>
-          <a:solidFill>
-            <a:srgbClr val="FFFFFF"/>
-          </a:solidFill>
-        </p:spPr>
-      </p:sp>
+        </p:grpSpPr>
+        <p:sp>
+          <p:nvSpPr>
+            <p:cNvPr name="Freeform 3" id="3"/>
+            <p:cNvSpPr/>
+            <p:nvPr/>
+          </p:nvSpPr>
+          <p:spPr>
+            <a:xfrm flipH="false" flipV="false" rot="0">
+              <a:off x="0" y="0"/>
+              <a:ext cx="14563598" cy="13716000"/>
+            </a:xfrm>
+            <a:custGeom>
+              <a:avLst/>
+              <a:gdLst/>
+              <a:ahLst/>
+              <a:cxnLst/>
+              <a:rect r="r" b="b" t="t" l="l"/>
+              <a:pathLst>
+                <a:path h="13716000" w="14563598">
+                  <a:moveTo>
+                    <a:pt x="0" y="0"/>
+                  </a:moveTo>
+                  <a:lnTo>
+                    <a:pt x="14563598" y="0"/>
+                  </a:lnTo>
+                  <a:lnTo>
+                    <a:pt x="14563598" y="13716000"/>
+                  </a:lnTo>
+                  <a:lnTo>
+                    <a:pt x="0" y="13716000"/>
+                  </a:lnTo>
+                  <a:close/>
+                </a:path>
+              </a:pathLst>
+            </a:custGeom>
+            <a:solidFill>
+              <a:srgbClr val="FFFFFF"/>
+            </a:solidFill>
+          </p:spPr>
+        </p:sp>
+      </p:grpSp>
       <p:sp>
         <p:nvSpPr>
-          <p:cNvPr name="Freeform 3" id="3"/>
+          <p:cNvPr name="Freeform 4" id="4"/>
           <p:cNvSpPr/>
           <p:nvPr/>
         </p:nvSpPr>
@@ -3121,10 +3152,10 @@
                   <a:pt x="0" y="0"/>
                 </a:moveTo>
                 <a:lnTo>
-                  <a:pt x="13313736" y="0"/>
+                  <a:pt x="13313735" y="0"/>
                 </a:lnTo>
                 <a:lnTo>
-                  <a:pt x="13313736" y="5325494"/>
+                  <a:pt x="13313735" y="5325494"/>
                 </a:lnTo>
                 <a:lnTo>
                   <a:pt x="0" y="5325494"/>
@@ -3146,53 +3177,93 @@
               </a:extLst>
             </a:blip>
             <a:stretch>
-              <a:fillRect l="0" t="0" r="0" b="0"/>
+              <a:fillRect l="0" t="-71" r="0" b="-71"/>
             </a:stretch>
           </a:blipFill>
         </p:spPr>
       </p:sp>
       <p:grpSp>
         <p:nvGrpSpPr>
-          <p:cNvPr name="Group 4" id="4"/>
+          <p:cNvPr name="Group 5" id="5"/>
           <p:cNvGrpSpPr/>
           <p:nvPr/>
         </p:nvGrpSpPr>
         <p:grpSpPr>
           <a:xfrm rot="0">
-            <a:off x="1992901" y="2925351"/>
-            <a:ext cx="14302199" cy="4436298"/>
+            <a:off x="1992901" y="3103945"/>
+            <a:ext cx="14302199" cy="4358936"/>
             <a:chOff x="0" y="0"/>
-            <a:chExt cx="19069598" cy="5915064"/>
+            <a:chExt cx="19069599" cy="5811915"/>
           </a:xfrm>
         </p:grpSpPr>
         <p:sp>
           <p:nvSpPr>
-            <p:cNvPr name="TextBox 5" id="5"/>
+            <p:cNvPr name="Freeform 6" id="6"/>
+            <p:cNvSpPr/>
+            <p:nvPr/>
+          </p:nvSpPr>
+          <p:spPr>
+            <a:xfrm flipH="false" flipV="false" rot="0">
+              <a:off x="0" y="0"/>
+              <a:ext cx="19069599" cy="5811915"/>
+            </a:xfrm>
+            <a:custGeom>
+              <a:avLst/>
+              <a:gdLst/>
+              <a:ahLst/>
+              <a:cxnLst/>
+              <a:rect r="r" b="b" t="t" l="l"/>
+              <a:pathLst>
+                <a:path h="5811915" w="19069599">
+                  <a:moveTo>
+                    <a:pt x="0" y="0"/>
+                  </a:moveTo>
+                  <a:lnTo>
+                    <a:pt x="19069599" y="0"/>
+                  </a:lnTo>
+                  <a:lnTo>
+                    <a:pt x="19069599" y="5811915"/>
+                  </a:lnTo>
+                  <a:lnTo>
+                    <a:pt x="0" y="5811915"/>
+                  </a:lnTo>
+                  <a:close/>
+                </a:path>
+              </a:pathLst>
+            </a:custGeom>
+            <a:solidFill>
+              <a:srgbClr val="000000">
+                <a:alpha val="0"/>
+              </a:srgbClr>
+            </a:solidFill>
+          </p:spPr>
+        </p:sp>
+        <p:sp>
+          <p:nvSpPr>
+            <p:cNvPr name="TextBox 7" id="7"/>
             <p:cNvSpPr txBox="true"/>
             <p:nvPr/>
           </p:nvSpPr>
           <p:spPr>
-            <a:xfrm rot="0">
+            <a:xfrm>
               <a:off x="0" y="238125"/>
-              <a:ext cx="19069598" cy="4584824"/>
+              <a:ext cx="19069599" cy="5573790"/>
             </a:xfrm>
             <a:prstGeom prst="rect">
               <a:avLst/>
             </a:prstGeom>
           </p:spPr>
           <p:txBody>
-            <a:bodyPr anchor="t" rtlCol="false" tIns="0" lIns="0" bIns="0" rIns="0">
-              <a:spAutoFit/>
-            </a:bodyPr>
+            <a:bodyPr anchor="t" rtlCol="false" tIns="0" lIns="0" bIns="0" rIns="0"/>
             <a:lstStyle/>
             <a:p>
-              <a:pPr algn="ctr" marL="0" indent="0" lvl="0">
+              <a:pPr algn="ctr">
                 <a:lnSpc>
                   <a:spcPts val="13034"/>
                 </a:lnSpc>
               </a:pPr>
               <a:r>
-                <a:rPr lang="en-US" b="true" sz="13034">
+                <a:rPr lang="en-US" sz="13034" b="true">
                   <a:solidFill>
                     <a:srgbClr val="000000"/>
                   </a:solidFill>
@@ -3206,97 +3277,68 @@
             </a:p>
           </p:txBody>
         </p:sp>
-        <p:sp>
-          <p:nvSpPr>
-            <p:cNvPr name="TextBox 6" id="6"/>
-            <p:cNvSpPr txBox="true"/>
-            <p:nvPr/>
-          </p:nvSpPr>
-          <p:spPr>
-            <a:xfrm rot="0">
-              <a:off x="0" y="5056543"/>
-              <a:ext cx="19069598" cy="858520"/>
-            </a:xfrm>
-            <a:prstGeom prst="rect">
-              <a:avLst/>
-            </a:prstGeom>
-          </p:spPr>
-          <p:txBody>
-            <a:bodyPr anchor="t" rtlCol="false" tIns="0" lIns="0" bIns="0" rIns="0">
-              <a:spAutoFit/>
-            </a:bodyPr>
-            <a:lstStyle/>
-            <a:p>
-              <a:pPr algn="ctr" marL="0" indent="0" lvl="0">
-                <a:lnSpc>
-                  <a:spcPts val="5459"/>
-                </a:lnSpc>
-                <a:spcBef>
-                  <a:spcPct val="0"/>
-                </a:spcBef>
-              </a:pPr>
-              <a:r>
-                <a:rPr lang="en-US" sz="3899" u="none">
-                  <a:solidFill>
-                    <a:srgbClr val="000000"/>
-                  </a:solidFill>
-                  <a:latin typeface="Poppins Light"/>
-                  <a:ea typeface="Poppins Light"/>
-                  <a:cs typeface="Poppins Light"/>
-                  <a:sym typeface="Poppins Light"/>
-                </a:rPr>
-                <a:t>Instructor: Kaleab Olani</a:t>
-              </a:r>
-            </a:p>
-          </p:txBody>
-        </p:sp>
       </p:grpSp>
-      <p:sp>
-        <p:nvSpPr>
-          <p:cNvPr name="Freeform 7" id="7"/>
-          <p:cNvSpPr/>
+      <p:grpSp>
+        <p:nvGrpSpPr>
+          <p:cNvPr name="Group 8" id="8"/>
+          <p:cNvGrpSpPr/>
           <p:nvPr/>
-        </p:nvSpPr>
-        <p:spPr>
-          <a:xfrm flipH="false" flipV="false" rot="0">
+        </p:nvGrpSpPr>
+        <p:grpSpPr>
+          <a:xfrm rot="0">
             <a:off x="7989468" y="343754"/>
             <a:ext cx="2309064" cy="888101"/>
+            <a:chOff x="0" y="0"/>
+            <a:chExt cx="3078752" cy="1184135"/>
           </a:xfrm>
-          <a:custGeom>
-            <a:avLst/>
-            <a:gdLst/>
-            <a:ahLst/>
-            <a:cxnLst/>
-            <a:rect r="r" b="b" t="t" l="l"/>
-            <a:pathLst>
-              <a:path h="888101" w="2309064">
-                <a:moveTo>
-                  <a:pt x="0" y="0"/>
-                </a:moveTo>
-                <a:lnTo>
-                  <a:pt x="2309064" y="0"/>
-                </a:lnTo>
-                <a:lnTo>
-                  <a:pt x="2309064" y="888102"/>
-                </a:lnTo>
-                <a:lnTo>
-                  <a:pt x="0" y="888102"/>
-                </a:lnTo>
-                <a:lnTo>
-                  <a:pt x="0" y="0"/>
-                </a:lnTo>
-                <a:close/>
-              </a:path>
-            </a:pathLst>
-          </a:custGeom>
-          <a:blipFill>
-            <a:blip r:embed="rId4"/>
-            <a:stretch>
-              <a:fillRect l="0" t="0" r="0" b="0"/>
-            </a:stretch>
-          </a:blipFill>
-        </p:spPr>
-      </p:sp>
+        </p:grpSpPr>
+        <p:sp>
+          <p:nvSpPr>
+            <p:cNvPr name="Freeform 9" id="9"/>
+            <p:cNvSpPr/>
+            <p:nvPr/>
+          </p:nvSpPr>
+          <p:spPr>
+            <a:xfrm flipH="false" flipV="false" rot="0">
+              <a:off x="0" y="0"/>
+              <a:ext cx="3078734" cy="1184148"/>
+            </a:xfrm>
+            <a:custGeom>
+              <a:avLst/>
+              <a:gdLst/>
+              <a:ahLst/>
+              <a:cxnLst/>
+              <a:rect r="r" b="b" t="t" l="l"/>
+              <a:pathLst>
+                <a:path h="1184148" w="3078734">
+                  <a:moveTo>
+                    <a:pt x="0" y="0"/>
+                  </a:moveTo>
+                  <a:lnTo>
+                    <a:pt x="3078734" y="0"/>
+                  </a:lnTo>
+                  <a:lnTo>
+                    <a:pt x="3078734" y="1184148"/>
+                  </a:lnTo>
+                  <a:lnTo>
+                    <a:pt x="0" y="1184148"/>
+                  </a:lnTo>
+                  <a:lnTo>
+                    <a:pt x="0" y="0"/>
+                  </a:lnTo>
+                  <a:close/>
+                </a:path>
+              </a:pathLst>
+            </a:custGeom>
+            <a:blipFill>
+              <a:blip r:embed="rId4"/>
+              <a:stretch>
+                <a:fillRect l="0" t="0" r="0" b="1"/>
+              </a:stretch>
+            </a:blipFill>
+          </p:spPr>
+        </p:sp>
+      </p:grpSp>
     </p:spTree>
   </p:cSld>
   <p:clrMapOvr>
@@ -3322,92 +3364,184 @@
           <a:chExt cx="0" cy="0"/>
         </a:xfrm>
       </p:grpSpPr>
-      <p:sp>
-        <p:nvSpPr>
-          <p:cNvPr name="TextBox 2" id="2"/>
-          <p:cNvSpPr txBox="true"/>
-          <p:nvPr/>
-        </p:nvSpPr>
-        <p:spPr>
-          <a:xfrm rot="0">
-            <a:off x="1028700" y="3705225"/>
-            <a:ext cx="5968654" cy="2876550"/>
-          </a:xfrm>
-          <a:prstGeom prst="rect">
-            <a:avLst/>
-          </a:prstGeom>
-        </p:spPr>
-        <p:txBody>
-          <a:bodyPr anchor="t" rtlCol="false" tIns="0" lIns="0" bIns="0" rIns="0">
-            <a:spAutoFit/>
-          </a:bodyPr>
-          <a:lstStyle/>
-          <a:p>
-            <a:pPr algn="l" marL="0" indent="0" lvl="0">
-              <a:lnSpc>
-                <a:spcPts val="11340"/>
-              </a:lnSpc>
-              <a:spcBef>
-                <a:spcPct val="0"/>
-              </a:spcBef>
-            </a:pPr>
-            <a:r>
-              <a:rPr lang="en-US" b="true" sz="9450" strike="noStrike" u="none">
-                <a:solidFill>
-                  <a:srgbClr val="545454"/>
-                </a:solidFill>
-                <a:latin typeface="Lato Bold"/>
-                <a:ea typeface="Lato Bold"/>
-                <a:cs typeface="Lato Bold"/>
-                <a:sym typeface="Lato Bold"/>
-              </a:rPr>
-              <a:t>Course Overview</a:t>
-            </a:r>
-          </a:p>
-        </p:txBody>
-      </p:sp>
       <p:grpSp>
         <p:nvGrpSpPr>
-          <p:cNvPr name="Group 3" id="3"/>
+          <p:cNvPr name="Group 2" id="2"/>
           <p:cNvGrpSpPr/>
           <p:nvPr/>
         </p:nvGrpSpPr>
         <p:grpSpPr>
           <a:xfrm rot="0">
-            <a:off x="8104982" y="2788974"/>
-            <a:ext cx="9486600" cy="4878697"/>
+            <a:off x="1028700" y="3705225"/>
+            <a:ext cx="5968654" cy="2876550"/>
             <a:chOff x="0" y="0"/>
-            <a:chExt cx="12648800" cy="6504930"/>
+            <a:chExt cx="7958205" cy="3835400"/>
           </a:xfrm>
         </p:grpSpPr>
         <p:sp>
           <p:nvSpPr>
+            <p:cNvPr name="Freeform 3" id="3"/>
+            <p:cNvSpPr/>
+            <p:nvPr/>
+          </p:nvSpPr>
+          <p:spPr>
+            <a:xfrm flipH="false" flipV="false" rot="0">
+              <a:off x="0" y="0"/>
+              <a:ext cx="7958206" cy="3835400"/>
+            </a:xfrm>
+            <a:custGeom>
+              <a:avLst/>
+              <a:gdLst/>
+              <a:ahLst/>
+              <a:cxnLst/>
+              <a:rect r="r" b="b" t="t" l="l"/>
+              <a:pathLst>
+                <a:path h="3835400" w="7958206">
+                  <a:moveTo>
+                    <a:pt x="0" y="0"/>
+                  </a:moveTo>
+                  <a:lnTo>
+                    <a:pt x="7958206" y="0"/>
+                  </a:lnTo>
+                  <a:lnTo>
+                    <a:pt x="7958206" y="3835400"/>
+                  </a:lnTo>
+                  <a:lnTo>
+                    <a:pt x="0" y="3835400"/>
+                  </a:lnTo>
+                  <a:close/>
+                </a:path>
+              </a:pathLst>
+            </a:custGeom>
+            <a:solidFill>
+              <a:srgbClr val="000000">
+                <a:alpha val="0"/>
+              </a:srgbClr>
+            </a:solidFill>
+          </p:spPr>
+        </p:sp>
+        <p:sp>
+          <p:nvSpPr>
             <p:cNvPr name="TextBox 4" id="4"/>
             <p:cNvSpPr txBox="true"/>
             <p:nvPr/>
           </p:nvSpPr>
           <p:spPr>
-            <a:xfrm rot="0">
-              <a:off x="0" y="2840892"/>
-              <a:ext cx="12648800" cy="1516214"/>
+            <a:xfrm>
+              <a:off x="0" y="0"/>
+              <a:ext cx="7958205" cy="3835400"/>
             </a:xfrm>
             <a:prstGeom prst="rect">
               <a:avLst/>
             </a:prstGeom>
           </p:spPr>
           <p:txBody>
-            <a:bodyPr anchor="t" rtlCol="false" tIns="0" lIns="0" bIns="0" rIns="0">
-              <a:spAutoFit/>
-            </a:bodyPr>
+            <a:bodyPr anchor="t" rtlCol="false" tIns="0" lIns="0" bIns="0" rIns="0"/>
             <a:lstStyle/>
             <a:p>
-              <a:pPr algn="l" marL="0" indent="0" lvl="0">
+              <a:pPr algn="l">
+                <a:lnSpc>
+                  <a:spcPts val="11340"/>
+                </a:lnSpc>
+              </a:pPr>
+              <a:r>
+                <a:rPr lang="en-US" sz="9450" b="true">
+                  <a:solidFill>
+                    <a:srgbClr val="545454"/>
+                  </a:solidFill>
+                  <a:latin typeface="Lato Bold"/>
+                  <a:ea typeface="Lato Bold"/>
+                  <a:cs typeface="Lato Bold"/>
+                  <a:sym typeface="Lato Bold"/>
+                </a:rPr>
+                <a:t>Course Overview</a:t>
+              </a:r>
+            </a:p>
+          </p:txBody>
+        </p:sp>
+      </p:grpSp>
+      <p:grpSp>
+        <p:nvGrpSpPr>
+          <p:cNvPr name="Group 5" id="5"/>
+          <p:cNvGrpSpPr/>
+          <p:nvPr/>
+        </p:nvGrpSpPr>
+        <p:grpSpPr>
+          <a:xfrm rot="0">
+            <a:off x="8104982" y="4919643"/>
+            <a:ext cx="9486600" cy="1137160"/>
+            <a:chOff x="0" y="0"/>
+            <a:chExt cx="12648800" cy="1516214"/>
+          </a:xfrm>
+        </p:grpSpPr>
+        <p:sp>
+          <p:nvSpPr>
+            <p:cNvPr name="Freeform 6" id="6"/>
+            <p:cNvSpPr/>
+            <p:nvPr/>
+          </p:nvSpPr>
+          <p:spPr>
+            <a:xfrm flipH="false" flipV="false" rot="0">
+              <a:off x="0" y="0"/>
+              <a:ext cx="12648800" cy="1516214"/>
+            </a:xfrm>
+            <a:custGeom>
+              <a:avLst/>
+              <a:gdLst/>
+              <a:ahLst/>
+              <a:cxnLst/>
+              <a:rect r="r" b="b" t="t" l="l"/>
+              <a:pathLst>
+                <a:path h="1516214" w="12648800">
+                  <a:moveTo>
+                    <a:pt x="0" y="0"/>
+                  </a:moveTo>
+                  <a:lnTo>
+                    <a:pt x="12648800" y="0"/>
+                  </a:lnTo>
+                  <a:lnTo>
+                    <a:pt x="12648800" y="1516214"/>
+                  </a:lnTo>
+                  <a:lnTo>
+                    <a:pt x="0" y="1516214"/>
+                  </a:lnTo>
+                  <a:close/>
+                </a:path>
+              </a:pathLst>
+            </a:custGeom>
+            <a:solidFill>
+              <a:srgbClr val="000000">
+                <a:alpha val="0"/>
+              </a:srgbClr>
+            </a:solidFill>
+          </p:spPr>
+        </p:sp>
+        <p:sp>
+          <p:nvSpPr>
+            <p:cNvPr name="TextBox 7" id="7"/>
+            <p:cNvSpPr txBox="true"/>
+            <p:nvPr/>
+          </p:nvSpPr>
+          <p:spPr>
+            <a:xfrm>
+              <a:off x="0" y="-95250"/>
+              <a:ext cx="12648800" cy="1611464"/>
+            </a:xfrm>
+            <a:prstGeom prst="rect">
+              <a:avLst/>
+            </a:prstGeom>
+          </p:spPr>
+          <p:txBody>
+            <a:bodyPr anchor="t" rtlCol="false" tIns="0" lIns="0" bIns="0" rIns="0"/>
+            <a:lstStyle/>
+            <a:p>
+              <a:pPr algn="l">
                 <a:lnSpc>
                   <a:spcPts val="4661"/>
                 </a:lnSpc>
               </a:pPr>
               <a:r>
-                <a:rPr lang="en-US" sz="3107">
+                <a:rPr lang="en-US" sz="3106">
                   <a:solidFill>
                     <a:srgbClr val="545454"/>
                   </a:solidFill>
@@ -3421,34 +3555,89 @@
             </a:p>
           </p:txBody>
         </p:sp>
-        <p:sp>
-          <p:nvSpPr>
-            <p:cNvPr name="TextBox 5" id="5"/>
+      </p:grpSp>
+      <p:grpSp>
+        <p:nvGrpSpPr>
+          <p:cNvPr name="Group 8" id="8"/>
+          <p:cNvGrpSpPr/>
+          <p:nvPr/>
+        </p:nvGrpSpPr>
+        <p:grpSpPr>
+          <a:xfrm rot="0">
+            <a:off x="8104982" y="6530511"/>
+            <a:ext cx="9486600" cy="1137160"/>
+            <a:chOff x="0" y="0"/>
+            <a:chExt cx="12648800" cy="1516214"/>
+          </a:xfrm>
+        </p:grpSpPr>
+        <p:sp>
+          <p:nvSpPr>
+            <p:cNvPr name="Freeform 9" id="9"/>
+            <p:cNvSpPr/>
+            <p:nvPr/>
+          </p:nvSpPr>
+          <p:spPr>
+            <a:xfrm flipH="false" flipV="false" rot="0">
+              <a:off x="0" y="0"/>
+              <a:ext cx="12648800" cy="1516214"/>
+            </a:xfrm>
+            <a:custGeom>
+              <a:avLst/>
+              <a:gdLst/>
+              <a:ahLst/>
+              <a:cxnLst/>
+              <a:rect r="r" b="b" t="t" l="l"/>
+              <a:pathLst>
+                <a:path h="1516214" w="12648800">
+                  <a:moveTo>
+                    <a:pt x="0" y="0"/>
+                  </a:moveTo>
+                  <a:lnTo>
+                    <a:pt x="12648800" y="0"/>
+                  </a:lnTo>
+                  <a:lnTo>
+                    <a:pt x="12648800" y="1516214"/>
+                  </a:lnTo>
+                  <a:lnTo>
+                    <a:pt x="0" y="1516214"/>
+                  </a:lnTo>
+                  <a:close/>
+                </a:path>
+              </a:pathLst>
+            </a:custGeom>
+            <a:solidFill>
+              <a:srgbClr val="000000">
+                <a:alpha val="0"/>
+              </a:srgbClr>
+            </a:solidFill>
+          </p:spPr>
+        </p:sp>
+        <p:sp>
+          <p:nvSpPr>
+            <p:cNvPr name="TextBox 10" id="10"/>
             <p:cNvSpPr txBox="true"/>
             <p:nvPr/>
           </p:nvSpPr>
           <p:spPr>
-            <a:xfrm rot="0">
-              <a:off x="0" y="4988716"/>
-              <a:ext cx="12648800" cy="1516214"/>
+            <a:xfrm>
+              <a:off x="0" y="-95250"/>
+              <a:ext cx="12648800" cy="1611464"/>
             </a:xfrm>
             <a:prstGeom prst="rect">
               <a:avLst/>
             </a:prstGeom>
           </p:spPr>
           <p:txBody>
-            <a:bodyPr anchor="t" rtlCol="false" tIns="0" lIns="0" bIns="0" rIns="0">
-              <a:spAutoFit/>
-            </a:bodyPr>
+            <a:bodyPr anchor="t" rtlCol="false" tIns="0" lIns="0" bIns="0" rIns="0"/>
             <a:lstStyle/>
             <a:p>
-              <a:pPr algn="l" marL="0" indent="0" lvl="0">
+              <a:pPr algn="l">
                 <a:lnSpc>
                   <a:spcPts val="4661"/>
                 </a:lnSpc>
               </a:pPr>
               <a:r>
-                <a:rPr lang="en-US" sz="3107">
+                <a:rPr lang="en-US" sz="3106">
                   <a:solidFill>
                     <a:srgbClr val="545454"/>
                   </a:solidFill>
@@ -3462,34 +3651,89 @@
             </a:p>
           </p:txBody>
         </p:sp>
-        <p:sp>
-          <p:nvSpPr>
-            <p:cNvPr name="TextBox 6" id="6"/>
+      </p:grpSp>
+      <p:grpSp>
+        <p:nvGrpSpPr>
+          <p:cNvPr name="Group 11" id="11"/>
+          <p:cNvGrpSpPr/>
+          <p:nvPr/>
+        </p:nvGrpSpPr>
+        <p:grpSpPr>
+          <a:xfrm rot="0">
+            <a:off x="8104982" y="2717537"/>
+            <a:ext cx="9486600" cy="1724673"/>
+            <a:chOff x="0" y="0"/>
+            <a:chExt cx="12648800" cy="2299564"/>
+          </a:xfrm>
+        </p:grpSpPr>
+        <p:sp>
+          <p:nvSpPr>
+            <p:cNvPr name="Freeform 12" id="12"/>
+            <p:cNvSpPr/>
+            <p:nvPr/>
+          </p:nvSpPr>
+          <p:spPr>
+            <a:xfrm flipH="false" flipV="false" rot="0">
+              <a:off x="0" y="0"/>
+              <a:ext cx="12648800" cy="2299564"/>
+            </a:xfrm>
+            <a:custGeom>
+              <a:avLst/>
+              <a:gdLst/>
+              <a:ahLst/>
+              <a:cxnLst/>
+              <a:rect r="r" b="b" t="t" l="l"/>
+              <a:pathLst>
+                <a:path h="2299564" w="12648800">
+                  <a:moveTo>
+                    <a:pt x="0" y="0"/>
+                  </a:moveTo>
+                  <a:lnTo>
+                    <a:pt x="12648800" y="0"/>
+                  </a:lnTo>
+                  <a:lnTo>
+                    <a:pt x="12648800" y="2299564"/>
+                  </a:lnTo>
+                  <a:lnTo>
+                    <a:pt x="0" y="2299564"/>
+                  </a:lnTo>
+                  <a:close/>
+                </a:path>
+              </a:pathLst>
+            </a:custGeom>
+            <a:solidFill>
+              <a:srgbClr val="000000">
+                <a:alpha val="0"/>
+              </a:srgbClr>
+            </a:solidFill>
+          </p:spPr>
+        </p:sp>
+        <p:sp>
+          <p:nvSpPr>
+            <p:cNvPr name="TextBox 13" id="13"/>
             <p:cNvSpPr txBox="true"/>
             <p:nvPr/>
           </p:nvSpPr>
           <p:spPr>
-            <a:xfrm rot="0">
+            <a:xfrm>
               <a:off x="0" y="-95250"/>
-              <a:ext cx="12648800" cy="2299564"/>
+              <a:ext cx="12648800" cy="2394814"/>
             </a:xfrm>
             <a:prstGeom prst="rect">
               <a:avLst/>
             </a:prstGeom>
           </p:spPr>
           <p:txBody>
-            <a:bodyPr anchor="t" rtlCol="false" tIns="0" lIns="0" bIns="0" rIns="0">
-              <a:spAutoFit/>
-            </a:bodyPr>
+            <a:bodyPr anchor="t" rtlCol="false" tIns="0" lIns="0" bIns="0" rIns="0"/>
             <a:lstStyle/>
             <a:p>
-              <a:pPr algn="l" marL="0" indent="0" lvl="0">
+              <a:pPr algn="l">
                 <a:lnSpc>
                   <a:spcPts val="4661"/>
                 </a:lnSpc>
               </a:pPr>
               <a:r>
-                <a:rPr lang="en-US" sz="3107">
+                <a:rPr lang="en-US" sz="3106">
                   <a:solidFill>
                     <a:srgbClr val="545454"/>
                   </a:solidFill>
@@ -3504,30 +3748,61 @@
           </p:txBody>
         </p:sp>
       </p:grpSp>
-      <p:sp>
-        <p:nvSpPr>
-          <p:cNvPr name="AutoShape 7" id="7"/>
-          <p:cNvSpPr/>
+      <p:grpSp>
+        <p:nvGrpSpPr>
+          <p:cNvPr name="Group 14" id="14"/>
+          <p:cNvGrpSpPr/>
           <p:nvPr/>
-        </p:nvSpPr>
-        <p:spPr>
-          <a:xfrm flipV="true">
-            <a:off x="7651547" y="0"/>
-            <a:ext cx="0" cy="10287000"/>
+        </p:nvGrpSpPr>
+        <p:grpSpPr>
+          <a:xfrm rot="0">
+            <a:off x="7646785" y="-4762"/>
+            <a:ext cx="9525" cy="10296525"/>
+            <a:chOff x="0" y="0"/>
+            <a:chExt cx="12700" cy="13728700"/>
           </a:xfrm>
-          <a:prstGeom prst="line">
-            <a:avLst/>
-          </a:prstGeom>
-          <a:ln cap="flat" w="9525">
+        </p:grpSpPr>
+        <p:sp>
+          <p:nvSpPr>
+            <p:cNvPr name="Freeform 15" id="15"/>
+            <p:cNvSpPr/>
+            <p:nvPr/>
+          </p:nvSpPr>
+          <p:spPr>
+            <a:xfrm flipH="false" flipV="false" rot="0">
+              <a:off x="0" y="6350"/>
+              <a:ext cx="12700" cy="13716000"/>
+            </a:xfrm>
+            <a:custGeom>
+              <a:avLst/>
+              <a:gdLst/>
+              <a:ahLst/>
+              <a:cxnLst/>
+              <a:rect r="r" b="b" t="t" l="l"/>
+              <a:pathLst>
+                <a:path h="13716000" w="12700">
+                  <a:moveTo>
+                    <a:pt x="0" y="13716000"/>
+                  </a:moveTo>
+                  <a:lnTo>
+                    <a:pt x="0" y="0"/>
+                  </a:lnTo>
+                  <a:lnTo>
+                    <a:pt x="12700" y="0"/>
+                  </a:lnTo>
+                  <a:lnTo>
+                    <a:pt x="12700" y="13716000"/>
+                  </a:lnTo>
+                  <a:close/>
+                </a:path>
+              </a:pathLst>
+            </a:custGeom>
             <a:solidFill>
               <a:srgbClr val="000000"/>
             </a:solidFill>
-            <a:prstDash val="solid"/>
-            <a:headEnd type="none" len="sm" w="sm"/>
-            <a:tailEnd type="none" len="sm" w="sm"/>
-          </a:ln>
-        </p:spPr>
-      </p:sp>
+          </p:spPr>
+        </p:sp>
+      </p:grpSp>
     </p:spTree>
   </p:cSld>
   <p:clrMapOvr>
@@ -3553,1126 +3828,2656 @@
           <a:chExt cx="0" cy="0"/>
         </a:xfrm>
       </p:grpSpPr>
-      <p:sp>
-        <p:nvSpPr>
-          <p:cNvPr name="AutoShape 2" id="2"/>
-          <p:cNvSpPr/>
+      <p:grpSp>
+        <p:nvGrpSpPr>
+          <p:cNvPr name="Group 2" id="2"/>
+          <p:cNvGrpSpPr/>
           <p:nvPr/>
-        </p:nvSpPr>
-        <p:spPr>
+        </p:nvGrpSpPr>
+        <p:grpSpPr>
           <a:xfrm rot="0">
-            <a:off x="9992923" y="1567233"/>
-            <a:ext cx="7092179" cy="0"/>
+            <a:off x="9988160" y="1562470"/>
+            <a:ext cx="7101704" cy="9525"/>
+            <a:chOff x="0" y="0"/>
+            <a:chExt cx="9468939" cy="12700"/>
           </a:xfrm>
-          <a:prstGeom prst="line">
-            <a:avLst/>
-          </a:prstGeom>
-          <a:ln cap="rnd" w="9525">
+        </p:grpSpPr>
+        <p:sp>
+          <p:nvSpPr>
+            <p:cNvPr name="Freeform 3" id="3"/>
+            <p:cNvSpPr/>
+            <p:nvPr/>
+          </p:nvSpPr>
+          <p:spPr>
+            <a:xfrm flipH="false" flipV="false" rot="0">
+              <a:off x="0" y="0"/>
+              <a:ext cx="9468993" cy="12700"/>
+            </a:xfrm>
+            <a:custGeom>
+              <a:avLst/>
+              <a:gdLst/>
+              <a:ahLst/>
+              <a:cxnLst/>
+              <a:rect r="r" b="b" t="t" l="l"/>
+              <a:pathLst>
+                <a:path h="12700" w="9468993">
+                  <a:moveTo>
+                    <a:pt x="6350" y="0"/>
+                  </a:moveTo>
+                  <a:lnTo>
+                    <a:pt x="9462643" y="0"/>
+                  </a:lnTo>
+                  <a:cubicBezTo>
+                    <a:pt x="9466200" y="0"/>
+                    <a:pt x="9468993" y="2794"/>
+                    <a:pt x="9468993" y="6350"/>
+                  </a:cubicBezTo>
+                  <a:cubicBezTo>
+                    <a:pt x="9468993" y="9906"/>
+                    <a:pt x="9466200" y="12700"/>
+                    <a:pt x="9462643" y="12700"/>
+                  </a:cubicBezTo>
+                  <a:lnTo>
+                    <a:pt x="6350" y="12700"/>
+                  </a:lnTo>
+                  <a:cubicBezTo>
+                    <a:pt x="2794" y="12700"/>
+                    <a:pt x="0" y="9906"/>
+                    <a:pt x="0" y="6350"/>
+                  </a:cubicBezTo>
+                  <a:cubicBezTo>
+                    <a:pt x="0" y="2794"/>
+                    <a:pt x="2794" y="0"/>
+                    <a:pt x="6350" y="0"/>
+                  </a:cubicBezTo>
+                  <a:close/>
+                </a:path>
+              </a:pathLst>
+            </a:custGeom>
             <a:solidFill>
               <a:srgbClr val="2B529D"/>
             </a:solidFill>
-            <a:prstDash val="solid"/>
-            <a:headEnd type="none" len="sm" w="sm"/>
-            <a:tailEnd type="none" len="sm" w="sm"/>
-          </a:ln>
-        </p:spPr>
-      </p:sp>
-      <p:sp>
-        <p:nvSpPr>
-          <p:cNvPr name="AutoShape 3" id="3"/>
-          <p:cNvSpPr/>
+          </p:spPr>
+        </p:sp>
+      </p:grpSp>
+      <p:grpSp>
+        <p:nvGrpSpPr>
+          <p:cNvPr name="Group 4" id="4"/>
+          <p:cNvGrpSpPr/>
           <p:nvPr/>
-        </p:nvSpPr>
-        <p:spPr>
+        </p:nvGrpSpPr>
+        <p:grpSpPr>
           <a:xfrm rot="0">
-            <a:off x="9992923" y="2448928"/>
-            <a:ext cx="7092179" cy="0"/>
+            <a:off x="9988160" y="2444165"/>
+            <a:ext cx="7101704" cy="9525"/>
+            <a:chOff x="0" y="0"/>
+            <a:chExt cx="9468939" cy="12700"/>
           </a:xfrm>
-          <a:prstGeom prst="line">
-            <a:avLst/>
-          </a:prstGeom>
-          <a:ln cap="rnd" w="9525">
+        </p:grpSpPr>
+        <p:sp>
+          <p:nvSpPr>
+            <p:cNvPr name="Freeform 5" id="5"/>
+            <p:cNvSpPr/>
+            <p:nvPr/>
+          </p:nvSpPr>
+          <p:spPr>
+            <a:xfrm flipH="false" flipV="false" rot="0">
+              <a:off x="0" y="0"/>
+              <a:ext cx="9468993" cy="12700"/>
+            </a:xfrm>
+            <a:custGeom>
+              <a:avLst/>
+              <a:gdLst/>
+              <a:ahLst/>
+              <a:cxnLst/>
+              <a:rect r="r" b="b" t="t" l="l"/>
+              <a:pathLst>
+                <a:path h="12700" w="9468993">
+                  <a:moveTo>
+                    <a:pt x="6350" y="0"/>
+                  </a:moveTo>
+                  <a:lnTo>
+                    <a:pt x="9462643" y="0"/>
+                  </a:lnTo>
+                  <a:cubicBezTo>
+                    <a:pt x="9466200" y="0"/>
+                    <a:pt x="9468993" y="2794"/>
+                    <a:pt x="9468993" y="6350"/>
+                  </a:cubicBezTo>
+                  <a:cubicBezTo>
+                    <a:pt x="9468993" y="9906"/>
+                    <a:pt x="9466200" y="12700"/>
+                    <a:pt x="9462643" y="12700"/>
+                  </a:cubicBezTo>
+                  <a:lnTo>
+                    <a:pt x="6350" y="12700"/>
+                  </a:lnTo>
+                  <a:cubicBezTo>
+                    <a:pt x="2794" y="12700"/>
+                    <a:pt x="0" y="9906"/>
+                    <a:pt x="0" y="6350"/>
+                  </a:cubicBezTo>
+                  <a:cubicBezTo>
+                    <a:pt x="0" y="2794"/>
+                    <a:pt x="2794" y="0"/>
+                    <a:pt x="6350" y="0"/>
+                  </a:cubicBezTo>
+                  <a:close/>
+                </a:path>
+              </a:pathLst>
+            </a:custGeom>
             <a:solidFill>
               <a:srgbClr val="2B529D"/>
             </a:solidFill>
-            <a:prstDash val="solid"/>
-            <a:headEnd type="none" len="sm" w="sm"/>
-            <a:tailEnd type="none" len="sm" w="sm"/>
-          </a:ln>
-        </p:spPr>
-      </p:sp>
-      <p:sp>
-        <p:nvSpPr>
-          <p:cNvPr name="AutoShape 4" id="4"/>
-          <p:cNvSpPr/>
+          </p:spPr>
+        </p:sp>
+      </p:grpSp>
+      <p:grpSp>
+        <p:nvGrpSpPr>
+          <p:cNvPr name="Group 6" id="6"/>
+          <p:cNvGrpSpPr/>
           <p:nvPr/>
-        </p:nvSpPr>
-        <p:spPr>
+        </p:nvGrpSpPr>
+        <p:grpSpPr>
           <a:xfrm rot="0">
-            <a:off x="9992923" y="3330624"/>
-            <a:ext cx="7092179" cy="0"/>
+            <a:off x="9988160" y="3325861"/>
+            <a:ext cx="7101704" cy="9525"/>
+            <a:chOff x="0" y="0"/>
+            <a:chExt cx="9468939" cy="12700"/>
           </a:xfrm>
-          <a:prstGeom prst="line">
-            <a:avLst/>
-          </a:prstGeom>
-          <a:ln cap="rnd" w="9525">
+        </p:grpSpPr>
+        <p:sp>
+          <p:nvSpPr>
+            <p:cNvPr name="Freeform 7" id="7"/>
+            <p:cNvSpPr/>
+            <p:nvPr/>
+          </p:nvSpPr>
+          <p:spPr>
+            <a:xfrm flipH="false" flipV="false" rot="0">
+              <a:off x="0" y="0"/>
+              <a:ext cx="9468993" cy="12700"/>
+            </a:xfrm>
+            <a:custGeom>
+              <a:avLst/>
+              <a:gdLst/>
+              <a:ahLst/>
+              <a:cxnLst/>
+              <a:rect r="r" b="b" t="t" l="l"/>
+              <a:pathLst>
+                <a:path h="12700" w="9468993">
+                  <a:moveTo>
+                    <a:pt x="6350" y="0"/>
+                  </a:moveTo>
+                  <a:lnTo>
+                    <a:pt x="9462643" y="0"/>
+                  </a:lnTo>
+                  <a:cubicBezTo>
+                    <a:pt x="9466200" y="0"/>
+                    <a:pt x="9468993" y="2794"/>
+                    <a:pt x="9468993" y="6350"/>
+                  </a:cubicBezTo>
+                  <a:cubicBezTo>
+                    <a:pt x="9468993" y="9906"/>
+                    <a:pt x="9466200" y="12700"/>
+                    <a:pt x="9462643" y="12700"/>
+                  </a:cubicBezTo>
+                  <a:lnTo>
+                    <a:pt x="6350" y="12700"/>
+                  </a:lnTo>
+                  <a:cubicBezTo>
+                    <a:pt x="2794" y="12700"/>
+                    <a:pt x="0" y="9906"/>
+                    <a:pt x="0" y="6350"/>
+                  </a:cubicBezTo>
+                  <a:cubicBezTo>
+                    <a:pt x="0" y="2794"/>
+                    <a:pt x="2794" y="0"/>
+                    <a:pt x="6350" y="0"/>
+                  </a:cubicBezTo>
+                  <a:close/>
+                </a:path>
+              </a:pathLst>
+            </a:custGeom>
             <a:solidFill>
               <a:srgbClr val="2B529D"/>
             </a:solidFill>
-            <a:prstDash val="solid"/>
-            <a:headEnd type="none" len="sm" w="sm"/>
-            <a:tailEnd type="none" len="sm" w="sm"/>
-          </a:ln>
-        </p:spPr>
-      </p:sp>
-      <p:sp>
-        <p:nvSpPr>
-          <p:cNvPr name="AutoShape 5" id="5"/>
-          <p:cNvSpPr/>
+          </p:spPr>
+        </p:sp>
+      </p:grpSp>
+      <p:grpSp>
+        <p:nvGrpSpPr>
+          <p:cNvPr name="Group 8" id="8"/>
+          <p:cNvGrpSpPr/>
           <p:nvPr/>
-        </p:nvSpPr>
-        <p:spPr>
+        </p:nvGrpSpPr>
+        <p:grpSpPr>
           <a:xfrm rot="0">
-            <a:off x="9992923" y="4212319"/>
-            <a:ext cx="7092179" cy="0"/>
+            <a:off x="9988160" y="4207556"/>
+            <a:ext cx="7101704" cy="9525"/>
+            <a:chOff x="0" y="0"/>
+            <a:chExt cx="9468939" cy="12700"/>
           </a:xfrm>
-          <a:prstGeom prst="line">
-            <a:avLst/>
-          </a:prstGeom>
-          <a:ln cap="rnd" w="9525">
+        </p:grpSpPr>
+        <p:sp>
+          <p:nvSpPr>
+            <p:cNvPr name="Freeform 9" id="9"/>
+            <p:cNvSpPr/>
+            <p:nvPr/>
+          </p:nvSpPr>
+          <p:spPr>
+            <a:xfrm flipH="false" flipV="false" rot="0">
+              <a:off x="0" y="0"/>
+              <a:ext cx="9468993" cy="12700"/>
+            </a:xfrm>
+            <a:custGeom>
+              <a:avLst/>
+              <a:gdLst/>
+              <a:ahLst/>
+              <a:cxnLst/>
+              <a:rect r="r" b="b" t="t" l="l"/>
+              <a:pathLst>
+                <a:path h="12700" w="9468993">
+                  <a:moveTo>
+                    <a:pt x="6350" y="0"/>
+                  </a:moveTo>
+                  <a:lnTo>
+                    <a:pt x="9462643" y="0"/>
+                  </a:lnTo>
+                  <a:cubicBezTo>
+                    <a:pt x="9466200" y="0"/>
+                    <a:pt x="9468993" y="2794"/>
+                    <a:pt x="9468993" y="6350"/>
+                  </a:cubicBezTo>
+                  <a:cubicBezTo>
+                    <a:pt x="9468993" y="9906"/>
+                    <a:pt x="9466200" y="12700"/>
+                    <a:pt x="9462643" y="12700"/>
+                  </a:cubicBezTo>
+                  <a:lnTo>
+                    <a:pt x="6350" y="12700"/>
+                  </a:lnTo>
+                  <a:cubicBezTo>
+                    <a:pt x="2794" y="12700"/>
+                    <a:pt x="0" y="9906"/>
+                    <a:pt x="0" y="6350"/>
+                  </a:cubicBezTo>
+                  <a:cubicBezTo>
+                    <a:pt x="0" y="2794"/>
+                    <a:pt x="2794" y="0"/>
+                    <a:pt x="6350" y="0"/>
+                  </a:cubicBezTo>
+                  <a:close/>
+                </a:path>
+              </a:pathLst>
+            </a:custGeom>
             <a:solidFill>
               <a:srgbClr val="2B529D"/>
             </a:solidFill>
-            <a:prstDash val="solid"/>
-            <a:headEnd type="none" len="sm" w="sm"/>
-            <a:tailEnd type="none" len="sm" w="sm"/>
-          </a:ln>
-        </p:spPr>
-      </p:sp>
-      <p:sp>
-        <p:nvSpPr>
-          <p:cNvPr name="AutoShape 6" id="6"/>
-          <p:cNvSpPr/>
+          </p:spPr>
+        </p:sp>
+      </p:grpSp>
+      <p:grpSp>
+        <p:nvGrpSpPr>
+          <p:cNvPr name="Group 10" id="10"/>
+          <p:cNvGrpSpPr/>
           <p:nvPr/>
-        </p:nvSpPr>
-        <p:spPr>
+        </p:nvGrpSpPr>
+        <p:grpSpPr>
           <a:xfrm rot="0">
-            <a:off x="9992923" y="5094015"/>
-            <a:ext cx="7092179" cy="0"/>
+            <a:off x="9988160" y="5089252"/>
+            <a:ext cx="7101704" cy="9525"/>
+            <a:chOff x="0" y="0"/>
+            <a:chExt cx="9468939" cy="12700"/>
           </a:xfrm>
-          <a:prstGeom prst="line">
-            <a:avLst/>
-          </a:prstGeom>
-          <a:ln cap="rnd" w="9525">
+        </p:grpSpPr>
+        <p:sp>
+          <p:nvSpPr>
+            <p:cNvPr name="Freeform 11" id="11"/>
+            <p:cNvSpPr/>
+            <p:nvPr/>
+          </p:nvSpPr>
+          <p:spPr>
+            <a:xfrm flipH="false" flipV="false" rot="0">
+              <a:off x="0" y="0"/>
+              <a:ext cx="9468993" cy="12700"/>
+            </a:xfrm>
+            <a:custGeom>
+              <a:avLst/>
+              <a:gdLst/>
+              <a:ahLst/>
+              <a:cxnLst/>
+              <a:rect r="r" b="b" t="t" l="l"/>
+              <a:pathLst>
+                <a:path h="12700" w="9468993">
+                  <a:moveTo>
+                    <a:pt x="6350" y="0"/>
+                  </a:moveTo>
+                  <a:lnTo>
+                    <a:pt x="9462643" y="0"/>
+                  </a:lnTo>
+                  <a:cubicBezTo>
+                    <a:pt x="9466200" y="0"/>
+                    <a:pt x="9468993" y="2794"/>
+                    <a:pt x="9468993" y="6350"/>
+                  </a:cubicBezTo>
+                  <a:cubicBezTo>
+                    <a:pt x="9468993" y="9906"/>
+                    <a:pt x="9466200" y="12700"/>
+                    <a:pt x="9462643" y="12700"/>
+                  </a:cubicBezTo>
+                  <a:lnTo>
+                    <a:pt x="6350" y="12700"/>
+                  </a:lnTo>
+                  <a:cubicBezTo>
+                    <a:pt x="2794" y="12700"/>
+                    <a:pt x="0" y="9906"/>
+                    <a:pt x="0" y="6350"/>
+                  </a:cubicBezTo>
+                  <a:cubicBezTo>
+                    <a:pt x="0" y="2794"/>
+                    <a:pt x="2794" y="0"/>
+                    <a:pt x="6350" y="0"/>
+                  </a:cubicBezTo>
+                  <a:close/>
+                </a:path>
+              </a:pathLst>
+            </a:custGeom>
             <a:solidFill>
               <a:srgbClr val="2B529D"/>
             </a:solidFill>
-            <a:prstDash val="solid"/>
-            <a:headEnd type="none" len="sm" w="sm"/>
-            <a:tailEnd type="none" len="sm" w="sm"/>
-          </a:ln>
-        </p:spPr>
-      </p:sp>
-      <p:sp>
-        <p:nvSpPr>
-          <p:cNvPr name="AutoShape 7" id="7"/>
-          <p:cNvSpPr/>
+          </p:spPr>
+        </p:sp>
+      </p:grpSp>
+      <p:grpSp>
+        <p:nvGrpSpPr>
+          <p:cNvPr name="Group 12" id="12"/>
+          <p:cNvGrpSpPr/>
           <p:nvPr/>
-        </p:nvSpPr>
-        <p:spPr>
+        </p:nvGrpSpPr>
+        <p:grpSpPr>
           <a:xfrm rot="0">
-            <a:off x="9992923" y="5964950"/>
-            <a:ext cx="7092179" cy="0"/>
+            <a:off x="9988160" y="5960187"/>
+            <a:ext cx="7101704" cy="9525"/>
+            <a:chOff x="0" y="0"/>
+            <a:chExt cx="9468939" cy="12700"/>
           </a:xfrm>
-          <a:prstGeom prst="line">
-            <a:avLst/>
-          </a:prstGeom>
-          <a:ln cap="rnd" w="9525">
+        </p:grpSpPr>
+        <p:sp>
+          <p:nvSpPr>
+            <p:cNvPr name="Freeform 13" id="13"/>
+            <p:cNvSpPr/>
+            <p:nvPr/>
+          </p:nvSpPr>
+          <p:spPr>
+            <a:xfrm flipH="false" flipV="false" rot="0">
+              <a:off x="0" y="0"/>
+              <a:ext cx="9468993" cy="12700"/>
+            </a:xfrm>
+            <a:custGeom>
+              <a:avLst/>
+              <a:gdLst/>
+              <a:ahLst/>
+              <a:cxnLst/>
+              <a:rect r="r" b="b" t="t" l="l"/>
+              <a:pathLst>
+                <a:path h="12700" w="9468993">
+                  <a:moveTo>
+                    <a:pt x="6350" y="0"/>
+                  </a:moveTo>
+                  <a:lnTo>
+                    <a:pt x="9462643" y="0"/>
+                  </a:lnTo>
+                  <a:cubicBezTo>
+                    <a:pt x="9466200" y="0"/>
+                    <a:pt x="9468993" y="2794"/>
+                    <a:pt x="9468993" y="6350"/>
+                  </a:cubicBezTo>
+                  <a:cubicBezTo>
+                    <a:pt x="9468993" y="9906"/>
+                    <a:pt x="9466200" y="12700"/>
+                    <a:pt x="9462643" y="12700"/>
+                  </a:cubicBezTo>
+                  <a:lnTo>
+                    <a:pt x="6350" y="12700"/>
+                  </a:lnTo>
+                  <a:cubicBezTo>
+                    <a:pt x="2794" y="12700"/>
+                    <a:pt x="0" y="9906"/>
+                    <a:pt x="0" y="6350"/>
+                  </a:cubicBezTo>
+                  <a:cubicBezTo>
+                    <a:pt x="0" y="2794"/>
+                    <a:pt x="2794" y="0"/>
+                    <a:pt x="6350" y="0"/>
+                  </a:cubicBezTo>
+                  <a:close/>
+                </a:path>
+              </a:pathLst>
+            </a:custGeom>
             <a:solidFill>
               <a:srgbClr val="2B529D"/>
             </a:solidFill>
-            <a:prstDash val="solid"/>
-            <a:headEnd type="none" len="sm" w="sm"/>
-            <a:tailEnd type="none" len="sm" w="sm"/>
-          </a:ln>
-        </p:spPr>
-      </p:sp>
-      <p:sp>
-        <p:nvSpPr>
-          <p:cNvPr name="AutoShape 8" id="8"/>
-          <p:cNvSpPr/>
+          </p:spPr>
+        </p:sp>
+      </p:grpSp>
+      <p:grpSp>
+        <p:nvGrpSpPr>
+          <p:cNvPr name="Group 14" id="14"/>
+          <p:cNvGrpSpPr/>
           <p:nvPr/>
-        </p:nvSpPr>
-        <p:spPr>
+        </p:nvGrpSpPr>
+        <p:grpSpPr>
           <a:xfrm rot="0">
-            <a:off x="9992923" y="6846645"/>
-            <a:ext cx="7092179" cy="0"/>
+            <a:off x="9988160" y="6841882"/>
+            <a:ext cx="7101704" cy="9525"/>
+            <a:chOff x="0" y="0"/>
+            <a:chExt cx="9468939" cy="12700"/>
           </a:xfrm>
-          <a:prstGeom prst="line">
-            <a:avLst/>
-          </a:prstGeom>
-          <a:ln cap="rnd" w="9525">
+        </p:grpSpPr>
+        <p:sp>
+          <p:nvSpPr>
+            <p:cNvPr name="Freeform 15" id="15"/>
+            <p:cNvSpPr/>
+            <p:nvPr/>
+          </p:nvSpPr>
+          <p:spPr>
+            <a:xfrm flipH="false" flipV="false" rot="0">
+              <a:off x="0" y="0"/>
+              <a:ext cx="9468993" cy="12700"/>
+            </a:xfrm>
+            <a:custGeom>
+              <a:avLst/>
+              <a:gdLst/>
+              <a:ahLst/>
+              <a:cxnLst/>
+              <a:rect r="r" b="b" t="t" l="l"/>
+              <a:pathLst>
+                <a:path h="12700" w="9468993">
+                  <a:moveTo>
+                    <a:pt x="6350" y="0"/>
+                  </a:moveTo>
+                  <a:lnTo>
+                    <a:pt x="9462643" y="0"/>
+                  </a:lnTo>
+                  <a:cubicBezTo>
+                    <a:pt x="9466200" y="0"/>
+                    <a:pt x="9468993" y="2794"/>
+                    <a:pt x="9468993" y="6350"/>
+                  </a:cubicBezTo>
+                  <a:cubicBezTo>
+                    <a:pt x="9468993" y="9906"/>
+                    <a:pt x="9466200" y="12700"/>
+                    <a:pt x="9462643" y="12700"/>
+                  </a:cubicBezTo>
+                  <a:lnTo>
+                    <a:pt x="6350" y="12700"/>
+                  </a:lnTo>
+                  <a:cubicBezTo>
+                    <a:pt x="2794" y="12700"/>
+                    <a:pt x="0" y="9906"/>
+                    <a:pt x="0" y="6350"/>
+                  </a:cubicBezTo>
+                  <a:cubicBezTo>
+                    <a:pt x="0" y="2794"/>
+                    <a:pt x="2794" y="0"/>
+                    <a:pt x="6350" y="0"/>
+                  </a:cubicBezTo>
+                  <a:close/>
+                </a:path>
+              </a:pathLst>
+            </a:custGeom>
             <a:solidFill>
               <a:srgbClr val="2B529D"/>
             </a:solidFill>
-            <a:prstDash val="solid"/>
-            <a:headEnd type="none" len="sm" w="sm"/>
-            <a:tailEnd type="none" len="sm" w="sm"/>
-          </a:ln>
-        </p:spPr>
-      </p:sp>
-      <p:sp>
-        <p:nvSpPr>
-          <p:cNvPr name="AutoShape 9" id="9"/>
-          <p:cNvSpPr/>
+          </p:spPr>
+        </p:sp>
+      </p:grpSp>
+      <p:grpSp>
+        <p:nvGrpSpPr>
+          <p:cNvPr name="Group 16" id="16"/>
+          <p:cNvGrpSpPr/>
           <p:nvPr/>
-        </p:nvSpPr>
-        <p:spPr>
+        </p:nvGrpSpPr>
+        <p:grpSpPr>
           <a:xfrm rot="0">
-            <a:off x="9992923" y="7739101"/>
-            <a:ext cx="7092179" cy="0"/>
+            <a:off x="9988160" y="7734338"/>
+            <a:ext cx="7101704" cy="9525"/>
+            <a:chOff x="0" y="0"/>
+            <a:chExt cx="9468939" cy="12700"/>
           </a:xfrm>
-          <a:prstGeom prst="line">
-            <a:avLst/>
-          </a:prstGeom>
-          <a:ln cap="rnd" w="9525">
+        </p:grpSpPr>
+        <p:sp>
+          <p:nvSpPr>
+            <p:cNvPr name="Freeform 17" id="17"/>
+            <p:cNvSpPr/>
+            <p:nvPr/>
+          </p:nvSpPr>
+          <p:spPr>
+            <a:xfrm flipH="false" flipV="false" rot="0">
+              <a:off x="0" y="0"/>
+              <a:ext cx="9468993" cy="12700"/>
+            </a:xfrm>
+            <a:custGeom>
+              <a:avLst/>
+              <a:gdLst/>
+              <a:ahLst/>
+              <a:cxnLst/>
+              <a:rect r="r" b="b" t="t" l="l"/>
+              <a:pathLst>
+                <a:path h="12700" w="9468993">
+                  <a:moveTo>
+                    <a:pt x="6350" y="0"/>
+                  </a:moveTo>
+                  <a:lnTo>
+                    <a:pt x="9462643" y="0"/>
+                  </a:lnTo>
+                  <a:cubicBezTo>
+                    <a:pt x="9466200" y="0"/>
+                    <a:pt x="9468993" y="2794"/>
+                    <a:pt x="9468993" y="6350"/>
+                  </a:cubicBezTo>
+                  <a:cubicBezTo>
+                    <a:pt x="9468993" y="9906"/>
+                    <a:pt x="9466200" y="12700"/>
+                    <a:pt x="9462643" y="12700"/>
+                  </a:cubicBezTo>
+                  <a:lnTo>
+                    <a:pt x="6350" y="12700"/>
+                  </a:lnTo>
+                  <a:cubicBezTo>
+                    <a:pt x="2794" y="12700"/>
+                    <a:pt x="0" y="9906"/>
+                    <a:pt x="0" y="6350"/>
+                  </a:cubicBezTo>
+                  <a:cubicBezTo>
+                    <a:pt x="0" y="2794"/>
+                    <a:pt x="2794" y="0"/>
+                    <a:pt x="6350" y="0"/>
+                  </a:cubicBezTo>
+                  <a:close/>
+                </a:path>
+              </a:pathLst>
+            </a:custGeom>
             <a:solidFill>
               <a:srgbClr val="2B529D"/>
             </a:solidFill>
-            <a:prstDash val="solid"/>
-            <a:headEnd type="none" len="sm" w="sm"/>
-            <a:tailEnd type="none" len="sm" w="sm"/>
-          </a:ln>
-        </p:spPr>
-      </p:sp>
-      <p:sp>
-        <p:nvSpPr>
-          <p:cNvPr name="AutoShape 10" id="10"/>
-          <p:cNvSpPr/>
+          </p:spPr>
+        </p:sp>
+      </p:grpSp>
+      <p:grpSp>
+        <p:nvGrpSpPr>
+          <p:cNvPr name="Group 18" id="18"/>
+          <p:cNvGrpSpPr/>
           <p:nvPr/>
-        </p:nvSpPr>
-        <p:spPr>
+        </p:nvGrpSpPr>
+        <p:grpSpPr>
           <a:xfrm rot="0">
-            <a:off x="9992923" y="8620796"/>
-            <a:ext cx="7092179" cy="0"/>
+            <a:off x="9988160" y="8616034"/>
+            <a:ext cx="7101704" cy="9525"/>
+            <a:chOff x="0" y="0"/>
+            <a:chExt cx="9468939" cy="12700"/>
           </a:xfrm>
-          <a:prstGeom prst="line">
-            <a:avLst/>
-          </a:prstGeom>
-          <a:ln cap="rnd" w="9525">
+        </p:grpSpPr>
+        <p:sp>
+          <p:nvSpPr>
+            <p:cNvPr name="Freeform 19" id="19"/>
+            <p:cNvSpPr/>
+            <p:nvPr/>
+          </p:nvSpPr>
+          <p:spPr>
+            <a:xfrm flipH="false" flipV="false" rot="0">
+              <a:off x="0" y="0"/>
+              <a:ext cx="9468993" cy="12700"/>
+            </a:xfrm>
+            <a:custGeom>
+              <a:avLst/>
+              <a:gdLst/>
+              <a:ahLst/>
+              <a:cxnLst/>
+              <a:rect r="r" b="b" t="t" l="l"/>
+              <a:pathLst>
+                <a:path h="12700" w="9468993">
+                  <a:moveTo>
+                    <a:pt x="6350" y="0"/>
+                  </a:moveTo>
+                  <a:lnTo>
+                    <a:pt x="9462643" y="0"/>
+                  </a:lnTo>
+                  <a:cubicBezTo>
+                    <a:pt x="9466200" y="0"/>
+                    <a:pt x="9468993" y="2794"/>
+                    <a:pt x="9468993" y="6350"/>
+                  </a:cubicBezTo>
+                  <a:cubicBezTo>
+                    <a:pt x="9468993" y="9906"/>
+                    <a:pt x="9466200" y="12700"/>
+                    <a:pt x="9462643" y="12700"/>
+                  </a:cubicBezTo>
+                  <a:lnTo>
+                    <a:pt x="6350" y="12700"/>
+                  </a:lnTo>
+                  <a:cubicBezTo>
+                    <a:pt x="2794" y="12700"/>
+                    <a:pt x="0" y="9906"/>
+                    <a:pt x="0" y="6350"/>
+                  </a:cubicBezTo>
+                  <a:cubicBezTo>
+                    <a:pt x="0" y="2794"/>
+                    <a:pt x="2794" y="0"/>
+                    <a:pt x="6350" y="0"/>
+                  </a:cubicBezTo>
+                  <a:close/>
+                </a:path>
+              </a:pathLst>
+            </a:custGeom>
             <a:solidFill>
               <a:srgbClr val="2B529D"/>
             </a:solidFill>
-            <a:prstDash val="solid"/>
-            <a:headEnd type="none" len="sm" w="sm"/>
-            <a:tailEnd type="none" len="sm" w="sm"/>
-          </a:ln>
-        </p:spPr>
-      </p:sp>
-      <p:sp>
-        <p:nvSpPr>
-          <p:cNvPr name="TextBox 11" id="11"/>
-          <p:cNvSpPr txBox="true"/>
+          </p:spPr>
+        </p:sp>
+      </p:grpSp>
+      <p:grpSp>
+        <p:nvGrpSpPr>
+          <p:cNvPr name="Group 20" id="20"/>
+          <p:cNvGrpSpPr/>
           <p:nvPr/>
-        </p:nvSpPr>
-        <p:spPr>
+        </p:nvGrpSpPr>
+        <p:grpSpPr>
           <a:xfrm rot="0">
             <a:off x="11413520" y="830765"/>
             <a:ext cx="5012986" cy="656679"/>
+            <a:chOff x="0" y="0"/>
+            <a:chExt cx="6683981" cy="875572"/>
           </a:xfrm>
-          <a:prstGeom prst="rect">
-            <a:avLst/>
-          </a:prstGeom>
-        </p:spPr>
-        <p:txBody>
-          <a:bodyPr anchor="t" rtlCol="false" tIns="0" lIns="0" bIns="0" rIns="0">
-            <a:spAutoFit/>
-          </a:bodyPr>
-          <a:lstStyle/>
-          <a:p>
-            <a:pPr algn="l" marL="0" indent="0" lvl="0">
-              <a:lnSpc>
-                <a:spcPts val="2646"/>
-              </a:lnSpc>
-            </a:pPr>
-            <a:r>
-              <a:rPr lang="en-US" sz="1764">
-                <a:solidFill>
-                  <a:srgbClr val="545454"/>
-                </a:solidFill>
-                <a:latin typeface="Lato"/>
-                <a:ea typeface="Lato"/>
-                <a:cs typeface="Lato"/>
-                <a:sym typeface="Lato"/>
-              </a:rPr>
-              <a:t>Introduction to Python and Research Workflow (1 Hour)</a:t>
-            </a:r>
-          </a:p>
-        </p:txBody>
-      </p:sp>
-      <p:sp>
-        <p:nvSpPr>
-          <p:cNvPr name="TextBox 12" id="12"/>
-          <p:cNvSpPr txBox="true"/>
+        </p:grpSpPr>
+        <p:sp>
+          <p:nvSpPr>
+            <p:cNvPr name="Freeform 21" id="21"/>
+            <p:cNvSpPr/>
+            <p:nvPr/>
+          </p:nvSpPr>
+          <p:spPr>
+            <a:xfrm flipH="false" flipV="false" rot="0">
+              <a:off x="0" y="0"/>
+              <a:ext cx="6683981" cy="875572"/>
+            </a:xfrm>
+            <a:custGeom>
+              <a:avLst/>
+              <a:gdLst/>
+              <a:ahLst/>
+              <a:cxnLst/>
+              <a:rect r="r" b="b" t="t" l="l"/>
+              <a:pathLst>
+                <a:path h="875572" w="6683981">
+                  <a:moveTo>
+                    <a:pt x="0" y="0"/>
+                  </a:moveTo>
+                  <a:lnTo>
+                    <a:pt x="6683981" y="0"/>
+                  </a:lnTo>
+                  <a:lnTo>
+                    <a:pt x="6683981" y="875572"/>
+                  </a:lnTo>
+                  <a:lnTo>
+                    <a:pt x="0" y="875572"/>
+                  </a:lnTo>
+                  <a:close/>
+                </a:path>
+              </a:pathLst>
+            </a:custGeom>
+            <a:solidFill>
+              <a:srgbClr val="000000">
+                <a:alpha val="0"/>
+              </a:srgbClr>
+            </a:solidFill>
+          </p:spPr>
+        </p:sp>
+        <p:sp>
+          <p:nvSpPr>
+            <p:cNvPr name="TextBox 22" id="22"/>
+            <p:cNvSpPr txBox="true"/>
+            <p:nvPr/>
+          </p:nvSpPr>
+          <p:spPr>
+            <a:xfrm>
+              <a:off x="0" y="-57150"/>
+              <a:ext cx="6683981" cy="932722"/>
+            </a:xfrm>
+            <a:prstGeom prst="rect">
+              <a:avLst/>
+            </a:prstGeom>
+          </p:spPr>
+          <p:txBody>
+            <a:bodyPr anchor="t" rtlCol="false" tIns="0" lIns="0" bIns="0" rIns="0"/>
+            <a:lstStyle/>
+            <a:p>
+              <a:pPr algn="l">
+                <a:lnSpc>
+                  <a:spcPts val="2646"/>
+                </a:lnSpc>
+              </a:pPr>
+              <a:r>
+                <a:rPr lang="en-US" sz="1764">
+                  <a:solidFill>
+                    <a:srgbClr val="545454"/>
+                  </a:solidFill>
+                  <a:latin typeface="Lato"/>
+                  <a:ea typeface="Lato"/>
+                  <a:cs typeface="Lato"/>
+                  <a:sym typeface="Lato"/>
+                </a:rPr>
+                <a:t>Introduction to Python and Research Workflow (1 Hour)</a:t>
+              </a:r>
+            </a:p>
+          </p:txBody>
+        </p:sp>
+      </p:grpSp>
+      <p:grpSp>
+        <p:nvGrpSpPr>
+          <p:cNvPr name="Group 23" id="23"/>
+          <p:cNvGrpSpPr/>
           <p:nvPr/>
-        </p:nvSpPr>
-        <p:spPr>
+        </p:nvGrpSpPr>
+        <p:grpSpPr>
           <a:xfrm rot="0">
             <a:off x="11413520" y="1871580"/>
             <a:ext cx="5012986" cy="323304"/>
+            <a:chOff x="0" y="0"/>
+            <a:chExt cx="6683981" cy="431072"/>
           </a:xfrm>
-          <a:prstGeom prst="rect">
-            <a:avLst/>
-          </a:prstGeom>
-        </p:spPr>
-        <p:txBody>
-          <a:bodyPr anchor="t" rtlCol="false" tIns="0" lIns="0" bIns="0" rIns="0">
-            <a:spAutoFit/>
-          </a:bodyPr>
-          <a:lstStyle/>
-          <a:p>
-            <a:pPr algn="l" marL="0" indent="0" lvl="0">
-              <a:lnSpc>
-                <a:spcPts val="2646"/>
-              </a:lnSpc>
-            </a:pPr>
-            <a:r>
-              <a:rPr lang="en-US" sz="1764">
-                <a:solidFill>
-                  <a:srgbClr val="545454"/>
-                </a:solidFill>
-                <a:latin typeface="Lato"/>
-                <a:ea typeface="Lato"/>
-                <a:cs typeface="Lato"/>
-                <a:sym typeface="Lato"/>
-              </a:rPr>
-              <a:t>Python Basics (3 Hours)</a:t>
-            </a:r>
-          </a:p>
-        </p:txBody>
-      </p:sp>
-      <p:sp>
-        <p:nvSpPr>
-          <p:cNvPr name="TextBox 13" id="13"/>
-          <p:cNvSpPr txBox="true"/>
+        </p:grpSpPr>
+        <p:sp>
+          <p:nvSpPr>
+            <p:cNvPr name="Freeform 24" id="24"/>
+            <p:cNvSpPr/>
+            <p:nvPr/>
+          </p:nvSpPr>
+          <p:spPr>
+            <a:xfrm flipH="false" flipV="false" rot="0">
+              <a:off x="0" y="0"/>
+              <a:ext cx="6683981" cy="431072"/>
+            </a:xfrm>
+            <a:custGeom>
+              <a:avLst/>
+              <a:gdLst/>
+              <a:ahLst/>
+              <a:cxnLst/>
+              <a:rect r="r" b="b" t="t" l="l"/>
+              <a:pathLst>
+                <a:path h="431072" w="6683981">
+                  <a:moveTo>
+                    <a:pt x="0" y="0"/>
+                  </a:moveTo>
+                  <a:lnTo>
+                    <a:pt x="6683981" y="0"/>
+                  </a:lnTo>
+                  <a:lnTo>
+                    <a:pt x="6683981" y="431072"/>
+                  </a:lnTo>
+                  <a:lnTo>
+                    <a:pt x="0" y="431072"/>
+                  </a:lnTo>
+                  <a:close/>
+                </a:path>
+              </a:pathLst>
+            </a:custGeom>
+            <a:solidFill>
+              <a:srgbClr val="000000">
+                <a:alpha val="0"/>
+              </a:srgbClr>
+            </a:solidFill>
+          </p:spPr>
+        </p:sp>
+        <p:sp>
+          <p:nvSpPr>
+            <p:cNvPr name="TextBox 25" id="25"/>
+            <p:cNvSpPr txBox="true"/>
+            <p:nvPr/>
+          </p:nvSpPr>
+          <p:spPr>
+            <a:xfrm>
+              <a:off x="0" y="-57150"/>
+              <a:ext cx="6683981" cy="488222"/>
+            </a:xfrm>
+            <a:prstGeom prst="rect">
+              <a:avLst/>
+            </a:prstGeom>
+          </p:spPr>
+          <p:txBody>
+            <a:bodyPr anchor="t" rtlCol="false" tIns="0" lIns="0" bIns="0" rIns="0"/>
+            <a:lstStyle/>
+            <a:p>
+              <a:pPr algn="l">
+                <a:lnSpc>
+                  <a:spcPts val="2646"/>
+                </a:lnSpc>
+              </a:pPr>
+              <a:r>
+                <a:rPr lang="en-US" sz="1764">
+                  <a:solidFill>
+                    <a:srgbClr val="545454"/>
+                  </a:solidFill>
+                  <a:latin typeface="Lato"/>
+                  <a:ea typeface="Lato"/>
+                  <a:cs typeface="Lato"/>
+                  <a:sym typeface="Lato"/>
+                </a:rPr>
+                <a:t>Python Basics (3 Hours)</a:t>
+              </a:r>
+            </a:p>
+          </p:txBody>
+        </p:sp>
+      </p:grpSp>
+      <p:grpSp>
+        <p:nvGrpSpPr>
+          <p:cNvPr name="Group 26" id="26"/>
+          <p:cNvGrpSpPr/>
           <p:nvPr/>
-        </p:nvSpPr>
-        <p:spPr>
+        </p:nvGrpSpPr>
+        <p:grpSpPr>
           <a:xfrm rot="0">
             <a:off x="11413520" y="2745709"/>
             <a:ext cx="5012986" cy="323304"/>
+            <a:chOff x="0" y="0"/>
+            <a:chExt cx="6683981" cy="431072"/>
           </a:xfrm>
-          <a:prstGeom prst="rect">
-            <a:avLst/>
-          </a:prstGeom>
-        </p:spPr>
-        <p:txBody>
-          <a:bodyPr anchor="t" rtlCol="false" tIns="0" lIns="0" bIns="0" rIns="0">
-            <a:spAutoFit/>
-          </a:bodyPr>
-          <a:lstStyle/>
-          <a:p>
-            <a:pPr algn="l" marL="0" indent="0" lvl="0">
-              <a:lnSpc>
-                <a:spcPts val="2646"/>
-              </a:lnSpc>
-            </a:pPr>
-            <a:r>
-              <a:rPr lang="en-US" sz="1764">
-                <a:solidFill>
-                  <a:srgbClr val="545454"/>
-                </a:solidFill>
-                <a:latin typeface="Lato"/>
-                <a:ea typeface="Lato"/>
-                <a:cs typeface="Lato"/>
-                <a:sym typeface="Lato"/>
-              </a:rPr>
-              <a:t>Data Structures in Python (2 Hours)</a:t>
-            </a:r>
-          </a:p>
-        </p:txBody>
-      </p:sp>
-      <p:sp>
-        <p:nvSpPr>
-          <p:cNvPr name="TextBox 14" id="14"/>
-          <p:cNvSpPr txBox="true"/>
+        </p:grpSpPr>
+        <p:sp>
+          <p:nvSpPr>
+            <p:cNvPr name="Freeform 27" id="27"/>
+            <p:cNvSpPr/>
+            <p:nvPr/>
+          </p:nvSpPr>
+          <p:spPr>
+            <a:xfrm flipH="false" flipV="false" rot="0">
+              <a:off x="0" y="0"/>
+              <a:ext cx="6683981" cy="431072"/>
+            </a:xfrm>
+            <a:custGeom>
+              <a:avLst/>
+              <a:gdLst/>
+              <a:ahLst/>
+              <a:cxnLst/>
+              <a:rect r="r" b="b" t="t" l="l"/>
+              <a:pathLst>
+                <a:path h="431072" w="6683981">
+                  <a:moveTo>
+                    <a:pt x="0" y="0"/>
+                  </a:moveTo>
+                  <a:lnTo>
+                    <a:pt x="6683981" y="0"/>
+                  </a:lnTo>
+                  <a:lnTo>
+                    <a:pt x="6683981" y="431072"/>
+                  </a:lnTo>
+                  <a:lnTo>
+                    <a:pt x="0" y="431072"/>
+                  </a:lnTo>
+                  <a:close/>
+                </a:path>
+              </a:pathLst>
+            </a:custGeom>
+            <a:solidFill>
+              <a:srgbClr val="000000">
+                <a:alpha val="0"/>
+              </a:srgbClr>
+            </a:solidFill>
+          </p:spPr>
+        </p:sp>
+        <p:sp>
+          <p:nvSpPr>
+            <p:cNvPr name="TextBox 28" id="28"/>
+            <p:cNvSpPr txBox="true"/>
+            <p:nvPr/>
+          </p:nvSpPr>
+          <p:spPr>
+            <a:xfrm>
+              <a:off x="0" y="-57150"/>
+              <a:ext cx="6683981" cy="488222"/>
+            </a:xfrm>
+            <a:prstGeom prst="rect">
+              <a:avLst/>
+            </a:prstGeom>
+          </p:spPr>
+          <p:txBody>
+            <a:bodyPr anchor="t" rtlCol="false" tIns="0" lIns="0" bIns="0" rIns="0"/>
+            <a:lstStyle/>
+            <a:p>
+              <a:pPr algn="l">
+                <a:lnSpc>
+                  <a:spcPts val="2646"/>
+                </a:lnSpc>
+              </a:pPr>
+              <a:r>
+                <a:rPr lang="en-US" sz="1764">
+                  <a:solidFill>
+                    <a:srgbClr val="545454"/>
+                  </a:solidFill>
+                  <a:latin typeface="Lato"/>
+                  <a:ea typeface="Lato"/>
+                  <a:cs typeface="Lato"/>
+                  <a:sym typeface="Lato"/>
+                </a:rPr>
+                <a:t>Data Structures in Python (2 Hours)</a:t>
+              </a:r>
+            </a:p>
+          </p:txBody>
+        </p:sp>
+      </p:grpSp>
+      <p:grpSp>
+        <p:nvGrpSpPr>
+          <p:cNvPr name="Group 29" id="29"/>
+          <p:cNvGrpSpPr/>
           <p:nvPr/>
-        </p:nvSpPr>
-        <p:spPr>
+        </p:nvGrpSpPr>
+        <p:grpSpPr>
           <a:xfrm rot="0">
             <a:off x="11413520" y="3619837"/>
             <a:ext cx="5012986" cy="323304"/>
+            <a:chOff x="0" y="0"/>
+            <a:chExt cx="6683981" cy="431072"/>
           </a:xfrm>
-          <a:prstGeom prst="rect">
-            <a:avLst/>
-          </a:prstGeom>
-        </p:spPr>
-        <p:txBody>
-          <a:bodyPr anchor="t" rtlCol="false" tIns="0" lIns="0" bIns="0" rIns="0">
-            <a:spAutoFit/>
-          </a:bodyPr>
-          <a:lstStyle/>
-          <a:p>
-            <a:pPr algn="l" marL="0" indent="0" lvl="0">
-              <a:lnSpc>
-                <a:spcPts val="2646"/>
-              </a:lnSpc>
-            </a:pPr>
-            <a:r>
-              <a:rPr lang="en-US" sz="1764">
-                <a:solidFill>
-                  <a:srgbClr val="545454"/>
-                </a:solidFill>
-                <a:latin typeface="Lato"/>
-                <a:ea typeface="Lato"/>
-                <a:cs typeface="Lato"/>
-                <a:sym typeface="Lato"/>
-              </a:rPr>
-              <a:t>Working with Data in Pandas (3 Hours)</a:t>
-            </a:r>
-          </a:p>
-        </p:txBody>
-      </p:sp>
-      <p:sp>
-        <p:nvSpPr>
-          <p:cNvPr name="TextBox 15" id="15"/>
-          <p:cNvSpPr txBox="true"/>
+        </p:grpSpPr>
+        <p:sp>
+          <p:nvSpPr>
+            <p:cNvPr name="Freeform 30" id="30"/>
+            <p:cNvSpPr/>
+            <p:nvPr/>
+          </p:nvSpPr>
+          <p:spPr>
+            <a:xfrm flipH="false" flipV="false" rot="0">
+              <a:off x="0" y="0"/>
+              <a:ext cx="6683981" cy="431072"/>
+            </a:xfrm>
+            <a:custGeom>
+              <a:avLst/>
+              <a:gdLst/>
+              <a:ahLst/>
+              <a:cxnLst/>
+              <a:rect r="r" b="b" t="t" l="l"/>
+              <a:pathLst>
+                <a:path h="431072" w="6683981">
+                  <a:moveTo>
+                    <a:pt x="0" y="0"/>
+                  </a:moveTo>
+                  <a:lnTo>
+                    <a:pt x="6683981" y="0"/>
+                  </a:lnTo>
+                  <a:lnTo>
+                    <a:pt x="6683981" y="431072"/>
+                  </a:lnTo>
+                  <a:lnTo>
+                    <a:pt x="0" y="431072"/>
+                  </a:lnTo>
+                  <a:close/>
+                </a:path>
+              </a:pathLst>
+            </a:custGeom>
+            <a:solidFill>
+              <a:srgbClr val="000000">
+                <a:alpha val="0"/>
+              </a:srgbClr>
+            </a:solidFill>
+          </p:spPr>
+        </p:sp>
+        <p:sp>
+          <p:nvSpPr>
+            <p:cNvPr name="TextBox 31" id="31"/>
+            <p:cNvSpPr txBox="true"/>
+            <p:nvPr/>
+          </p:nvSpPr>
+          <p:spPr>
+            <a:xfrm>
+              <a:off x="0" y="-57150"/>
+              <a:ext cx="6683981" cy="488222"/>
+            </a:xfrm>
+            <a:prstGeom prst="rect">
+              <a:avLst/>
+            </a:prstGeom>
+          </p:spPr>
+          <p:txBody>
+            <a:bodyPr anchor="t" rtlCol="false" tIns="0" lIns="0" bIns="0" rIns="0"/>
+            <a:lstStyle/>
+            <a:p>
+              <a:pPr algn="l">
+                <a:lnSpc>
+                  <a:spcPts val="2646"/>
+                </a:lnSpc>
+              </a:pPr>
+              <a:r>
+                <a:rPr lang="en-US" sz="1764">
+                  <a:solidFill>
+                    <a:srgbClr val="545454"/>
+                  </a:solidFill>
+                  <a:latin typeface="Lato"/>
+                  <a:ea typeface="Lato"/>
+                  <a:cs typeface="Lato"/>
+                  <a:sym typeface="Lato"/>
+                </a:rPr>
+                <a:t>Working with Data in Pandas (3 Hours)</a:t>
+              </a:r>
+            </a:p>
+          </p:txBody>
+        </p:sp>
+      </p:grpSp>
+      <p:grpSp>
+        <p:nvGrpSpPr>
+          <p:cNvPr name="Group 32" id="32"/>
+          <p:cNvGrpSpPr/>
           <p:nvPr/>
-        </p:nvSpPr>
-        <p:spPr>
+        </p:nvGrpSpPr>
+        <p:grpSpPr>
           <a:xfrm rot="0">
             <a:off x="11413520" y="4327278"/>
             <a:ext cx="5012986" cy="656679"/>
+            <a:chOff x="0" y="0"/>
+            <a:chExt cx="6683981" cy="875572"/>
           </a:xfrm>
-          <a:prstGeom prst="rect">
-            <a:avLst/>
-          </a:prstGeom>
-        </p:spPr>
-        <p:txBody>
-          <a:bodyPr anchor="t" rtlCol="false" tIns="0" lIns="0" bIns="0" rIns="0">
-            <a:spAutoFit/>
-          </a:bodyPr>
-          <a:lstStyle/>
-          <a:p>
-            <a:pPr algn="l" marL="0" indent="0" lvl="0">
-              <a:lnSpc>
-                <a:spcPts val="2646"/>
-              </a:lnSpc>
-            </a:pPr>
-            <a:r>
-              <a:rPr lang="en-US" sz="1764">
-                <a:solidFill>
-                  <a:srgbClr val="545454"/>
-                </a:solidFill>
-                <a:latin typeface="Lato"/>
-                <a:ea typeface="Lato"/>
-                <a:cs typeface="Lato"/>
-                <a:sym typeface="Lato"/>
-              </a:rPr>
-              <a:t>Data Visualization with Matplotlib and Seaborn (3 Hours)</a:t>
-            </a:r>
-          </a:p>
-        </p:txBody>
-      </p:sp>
-      <p:sp>
-        <p:nvSpPr>
-          <p:cNvPr name="TextBox 16" id="16"/>
-          <p:cNvSpPr txBox="true"/>
+        </p:grpSpPr>
+        <p:sp>
+          <p:nvSpPr>
+            <p:cNvPr name="Freeform 33" id="33"/>
+            <p:cNvSpPr/>
+            <p:nvPr/>
+          </p:nvSpPr>
+          <p:spPr>
+            <a:xfrm flipH="false" flipV="false" rot="0">
+              <a:off x="0" y="0"/>
+              <a:ext cx="6683981" cy="875572"/>
+            </a:xfrm>
+            <a:custGeom>
+              <a:avLst/>
+              <a:gdLst/>
+              <a:ahLst/>
+              <a:cxnLst/>
+              <a:rect r="r" b="b" t="t" l="l"/>
+              <a:pathLst>
+                <a:path h="875572" w="6683981">
+                  <a:moveTo>
+                    <a:pt x="0" y="0"/>
+                  </a:moveTo>
+                  <a:lnTo>
+                    <a:pt x="6683981" y="0"/>
+                  </a:lnTo>
+                  <a:lnTo>
+                    <a:pt x="6683981" y="875572"/>
+                  </a:lnTo>
+                  <a:lnTo>
+                    <a:pt x="0" y="875572"/>
+                  </a:lnTo>
+                  <a:close/>
+                </a:path>
+              </a:pathLst>
+            </a:custGeom>
+            <a:solidFill>
+              <a:srgbClr val="000000">
+                <a:alpha val="0"/>
+              </a:srgbClr>
+            </a:solidFill>
+          </p:spPr>
+        </p:sp>
+        <p:sp>
+          <p:nvSpPr>
+            <p:cNvPr name="TextBox 34" id="34"/>
+            <p:cNvSpPr txBox="true"/>
+            <p:nvPr/>
+          </p:nvSpPr>
+          <p:spPr>
+            <a:xfrm>
+              <a:off x="0" y="-57150"/>
+              <a:ext cx="6683981" cy="932722"/>
+            </a:xfrm>
+            <a:prstGeom prst="rect">
+              <a:avLst/>
+            </a:prstGeom>
+          </p:spPr>
+          <p:txBody>
+            <a:bodyPr anchor="t" rtlCol="false" tIns="0" lIns="0" bIns="0" rIns="0"/>
+            <a:lstStyle/>
+            <a:p>
+              <a:pPr algn="l">
+                <a:lnSpc>
+                  <a:spcPts val="2646"/>
+                </a:lnSpc>
+              </a:pPr>
+              <a:r>
+                <a:rPr lang="en-US" sz="1764">
+                  <a:solidFill>
+                    <a:srgbClr val="545454"/>
+                  </a:solidFill>
+                  <a:latin typeface="Lato"/>
+                  <a:ea typeface="Lato"/>
+                  <a:cs typeface="Lato"/>
+                  <a:sym typeface="Lato"/>
+                </a:rPr>
+                <a:t>Data Visualization with Matplotlib and Seaborn (3 Hours)</a:t>
+              </a:r>
+            </a:p>
+          </p:txBody>
+        </p:sp>
+      </p:grpSp>
+      <p:grpSp>
+        <p:nvGrpSpPr>
+          <p:cNvPr name="Group 35" id="35"/>
+          <p:cNvGrpSpPr/>
           <p:nvPr/>
-        </p:nvSpPr>
-        <p:spPr>
+        </p:nvGrpSpPr>
+        <p:grpSpPr>
           <a:xfrm rot="0">
             <a:off x="11413520" y="5368094"/>
             <a:ext cx="5012986" cy="323304"/>
+            <a:chOff x="0" y="0"/>
+            <a:chExt cx="6683981" cy="431072"/>
           </a:xfrm>
-          <a:prstGeom prst="rect">
-            <a:avLst/>
-          </a:prstGeom>
-        </p:spPr>
-        <p:txBody>
-          <a:bodyPr anchor="t" rtlCol="false" tIns="0" lIns="0" bIns="0" rIns="0">
-            <a:spAutoFit/>
-          </a:bodyPr>
-          <a:lstStyle/>
-          <a:p>
-            <a:pPr algn="l" marL="0" indent="0" lvl="0">
-              <a:lnSpc>
-                <a:spcPts val="2646"/>
-              </a:lnSpc>
-            </a:pPr>
-            <a:r>
-              <a:rPr lang="en-US" sz="1764">
-                <a:solidFill>
-                  <a:srgbClr val="545454"/>
-                </a:solidFill>
-                <a:latin typeface="Lato"/>
-                <a:ea typeface="Lato"/>
-                <a:cs typeface="Lato"/>
-                <a:sym typeface="Lato"/>
-              </a:rPr>
-              <a:t>Automating Tasks with Python (2 Hours)</a:t>
-            </a:r>
-          </a:p>
-        </p:txBody>
-      </p:sp>
-      <p:sp>
-        <p:nvSpPr>
-          <p:cNvPr name="TextBox 17" id="17"/>
-          <p:cNvSpPr txBox="true"/>
+        </p:grpSpPr>
+        <p:sp>
+          <p:nvSpPr>
+            <p:cNvPr name="Freeform 36" id="36"/>
+            <p:cNvSpPr/>
+            <p:nvPr/>
+          </p:nvSpPr>
+          <p:spPr>
+            <a:xfrm flipH="false" flipV="false" rot="0">
+              <a:off x="0" y="0"/>
+              <a:ext cx="6683981" cy="431072"/>
+            </a:xfrm>
+            <a:custGeom>
+              <a:avLst/>
+              <a:gdLst/>
+              <a:ahLst/>
+              <a:cxnLst/>
+              <a:rect r="r" b="b" t="t" l="l"/>
+              <a:pathLst>
+                <a:path h="431072" w="6683981">
+                  <a:moveTo>
+                    <a:pt x="0" y="0"/>
+                  </a:moveTo>
+                  <a:lnTo>
+                    <a:pt x="6683981" y="0"/>
+                  </a:lnTo>
+                  <a:lnTo>
+                    <a:pt x="6683981" y="431072"/>
+                  </a:lnTo>
+                  <a:lnTo>
+                    <a:pt x="0" y="431072"/>
+                  </a:lnTo>
+                  <a:close/>
+                </a:path>
+              </a:pathLst>
+            </a:custGeom>
+            <a:solidFill>
+              <a:srgbClr val="000000">
+                <a:alpha val="0"/>
+              </a:srgbClr>
+            </a:solidFill>
+          </p:spPr>
+        </p:sp>
+        <p:sp>
+          <p:nvSpPr>
+            <p:cNvPr name="TextBox 37" id="37"/>
+            <p:cNvSpPr txBox="true"/>
+            <p:nvPr/>
+          </p:nvSpPr>
+          <p:spPr>
+            <a:xfrm>
+              <a:off x="0" y="-57150"/>
+              <a:ext cx="6683981" cy="488222"/>
+            </a:xfrm>
+            <a:prstGeom prst="rect">
+              <a:avLst/>
+            </a:prstGeom>
+          </p:spPr>
+          <p:txBody>
+            <a:bodyPr anchor="t" rtlCol="false" tIns="0" lIns="0" bIns="0" rIns="0"/>
+            <a:lstStyle/>
+            <a:p>
+              <a:pPr algn="l">
+                <a:lnSpc>
+                  <a:spcPts val="2646"/>
+                </a:lnSpc>
+              </a:pPr>
+              <a:r>
+                <a:rPr lang="en-US" sz="1764">
+                  <a:solidFill>
+                    <a:srgbClr val="545454"/>
+                  </a:solidFill>
+                  <a:latin typeface="Lato"/>
+                  <a:ea typeface="Lato"/>
+                  <a:cs typeface="Lato"/>
+                  <a:sym typeface="Lato"/>
+                </a:rPr>
+                <a:t>Automating Tasks with Python (2 Hours)</a:t>
+              </a:r>
+            </a:p>
+          </p:txBody>
+        </p:sp>
+      </p:grpSp>
+      <p:grpSp>
+        <p:nvGrpSpPr>
+          <p:cNvPr name="Group 38" id="38"/>
+          <p:cNvGrpSpPr/>
           <p:nvPr/>
-        </p:nvSpPr>
-        <p:spPr>
+        </p:nvGrpSpPr>
+        <p:grpSpPr>
           <a:xfrm rot="0">
             <a:off x="9977048" y="984229"/>
             <a:ext cx="818665" cy="387850"/>
+            <a:chOff x="0" y="0"/>
+            <a:chExt cx="1091553" cy="517133"/>
           </a:xfrm>
-          <a:prstGeom prst="rect">
-            <a:avLst/>
-          </a:prstGeom>
-        </p:spPr>
-        <p:txBody>
-          <a:bodyPr anchor="t" rtlCol="false" tIns="0" lIns="0" bIns="0" rIns="0">
-            <a:spAutoFit/>
-          </a:bodyPr>
-          <a:lstStyle/>
-          <a:p>
-            <a:pPr algn="ctr" marL="0" indent="0" lvl="0">
-              <a:lnSpc>
-                <a:spcPts val="3198"/>
-              </a:lnSpc>
-              <a:spcBef>
-                <a:spcPct val="0"/>
-              </a:spcBef>
-            </a:pPr>
-            <a:r>
-              <a:rPr lang="en-US" b="true" sz="2460">
-                <a:solidFill>
-                  <a:srgbClr val="545454"/>
-                </a:solidFill>
-                <a:latin typeface="Lato Bold"/>
-                <a:ea typeface="Lato Bold"/>
-                <a:cs typeface="Lato Bold"/>
-                <a:sym typeface="Lato Bold"/>
-              </a:rPr>
-              <a:t>0</a:t>
-            </a:r>
-            <a:r>
-              <a:rPr lang="en-US" b="true" sz="2460" u="none">
-                <a:solidFill>
-                  <a:srgbClr val="545454"/>
-                </a:solidFill>
-                <a:latin typeface="Lato Bold"/>
-                <a:ea typeface="Lato Bold"/>
-                <a:cs typeface="Lato Bold"/>
-                <a:sym typeface="Lato Bold"/>
-              </a:rPr>
-              <a:t>1</a:t>
-            </a:r>
-          </a:p>
-        </p:txBody>
-      </p:sp>
-      <p:sp>
-        <p:nvSpPr>
-          <p:cNvPr name="TextBox 18" id="18"/>
-          <p:cNvSpPr txBox="true"/>
+        </p:grpSpPr>
+        <p:sp>
+          <p:nvSpPr>
+            <p:cNvPr name="Freeform 39" id="39"/>
+            <p:cNvSpPr/>
+            <p:nvPr/>
+          </p:nvSpPr>
+          <p:spPr>
+            <a:xfrm flipH="false" flipV="false" rot="0">
+              <a:off x="0" y="0"/>
+              <a:ext cx="1091553" cy="517133"/>
+            </a:xfrm>
+            <a:custGeom>
+              <a:avLst/>
+              <a:gdLst/>
+              <a:ahLst/>
+              <a:cxnLst/>
+              <a:rect r="r" b="b" t="t" l="l"/>
+              <a:pathLst>
+                <a:path h="517133" w="1091553">
+                  <a:moveTo>
+                    <a:pt x="0" y="0"/>
+                  </a:moveTo>
+                  <a:lnTo>
+                    <a:pt x="1091553" y="0"/>
+                  </a:lnTo>
+                  <a:lnTo>
+                    <a:pt x="1091553" y="517133"/>
+                  </a:lnTo>
+                  <a:lnTo>
+                    <a:pt x="0" y="517133"/>
+                  </a:lnTo>
+                  <a:close/>
+                </a:path>
+              </a:pathLst>
+            </a:custGeom>
+            <a:solidFill>
+              <a:srgbClr val="000000">
+                <a:alpha val="0"/>
+              </a:srgbClr>
+            </a:solidFill>
+          </p:spPr>
+        </p:sp>
+        <p:sp>
+          <p:nvSpPr>
+            <p:cNvPr name="TextBox 40" id="40"/>
+            <p:cNvSpPr txBox="true"/>
+            <p:nvPr/>
+          </p:nvSpPr>
+          <p:spPr>
+            <a:xfrm>
+              <a:off x="0" y="-19050"/>
+              <a:ext cx="1091553" cy="536183"/>
+            </a:xfrm>
+            <a:prstGeom prst="rect">
+              <a:avLst/>
+            </a:prstGeom>
+          </p:spPr>
+          <p:txBody>
+            <a:bodyPr anchor="t" rtlCol="false" tIns="0" lIns="0" bIns="0" rIns="0"/>
+            <a:lstStyle/>
+            <a:p>
+              <a:pPr algn="ctr">
+                <a:lnSpc>
+                  <a:spcPts val="3197"/>
+                </a:lnSpc>
+              </a:pPr>
+              <a:r>
+                <a:rPr lang="en-US" sz="2460" b="true">
+                  <a:solidFill>
+                    <a:srgbClr val="545454"/>
+                  </a:solidFill>
+                  <a:latin typeface="Lato Bold"/>
+                  <a:ea typeface="Lato Bold"/>
+                  <a:cs typeface="Lato Bold"/>
+                  <a:sym typeface="Lato Bold"/>
+                </a:rPr>
+                <a:t>01</a:t>
+              </a:r>
+            </a:p>
+          </p:txBody>
+        </p:sp>
+      </p:grpSp>
+      <p:grpSp>
+        <p:nvGrpSpPr>
+          <p:cNvPr name="Group 41" id="41"/>
+          <p:cNvGrpSpPr/>
           <p:nvPr/>
-        </p:nvSpPr>
-        <p:spPr>
+        </p:nvGrpSpPr>
+        <p:grpSpPr>
           <a:xfrm rot="0">
             <a:off x="9977048" y="1858357"/>
             <a:ext cx="818665" cy="387850"/>
+            <a:chOff x="0" y="0"/>
+            <a:chExt cx="1091553" cy="517133"/>
           </a:xfrm>
-          <a:prstGeom prst="rect">
-            <a:avLst/>
-          </a:prstGeom>
-        </p:spPr>
-        <p:txBody>
-          <a:bodyPr anchor="t" rtlCol="false" tIns="0" lIns="0" bIns="0" rIns="0">
-            <a:spAutoFit/>
-          </a:bodyPr>
-          <a:lstStyle/>
-          <a:p>
-            <a:pPr algn="ctr" marL="0" indent="0" lvl="0">
-              <a:lnSpc>
-                <a:spcPts val="3198"/>
-              </a:lnSpc>
-              <a:spcBef>
-                <a:spcPct val="0"/>
-              </a:spcBef>
-            </a:pPr>
-            <a:r>
-              <a:rPr lang="en-US" b="true" sz="2460">
-                <a:solidFill>
-                  <a:srgbClr val="545454"/>
-                </a:solidFill>
-                <a:latin typeface="Lato Bold"/>
-                <a:ea typeface="Lato Bold"/>
-                <a:cs typeface="Lato Bold"/>
-                <a:sym typeface="Lato Bold"/>
-              </a:rPr>
-              <a:t>02</a:t>
-            </a:r>
-          </a:p>
-        </p:txBody>
-      </p:sp>
-      <p:sp>
-        <p:nvSpPr>
-          <p:cNvPr name="TextBox 19" id="19"/>
-          <p:cNvSpPr txBox="true"/>
+        </p:grpSpPr>
+        <p:sp>
+          <p:nvSpPr>
+            <p:cNvPr name="Freeform 42" id="42"/>
+            <p:cNvSpPr/>
+            <p:nvPr/>
+          </p:nvSpPr>
+          <p:spPr>
+            <a:xfrm flipH="false" flipV="false" rot="0">
+              <a:off x="0" y="0"/>
+              <a:ext cx="1091553" cy="517133"/>
+            </a:xfrm>
+            <a:custGeom>
+              <a:avLst/>
+              <a:gdLst/>
+              <a:ahLst/>
+              <a:cxnLst/>
+              <a:rect r="r" b="b" t="t" l="l"/>
+              <a:pathLst>
+                <a:path h="517133" w="1091553">
+                  <a:moveTo>
+                    <a:pt x="0" y="0"/>
+                  </a:moveTo>
+                  <a:lnTo>
+                    <a:pt x="1091553" y="0"/>
+                  </a:lnTo>
+                  <a:lnTo>
+                    <a:pt x="1091553" y="517133"/>
+                  </a:lnTo>
+                  <a:lnTo>
+                    <a:pt x="0" y="517133"/>
+                  </a:lnTo>
+                  <a:close/>
+                </a:path>
+              </a:pathLst>
+            </a:custGeom>
+            <a:solidFill>
+              <a:srgbClr val="000000">
+                <a:alpha val="0"/>
+              </a:srgbClr>
+            </a:solidFill>
+          </p:spPr>
+        </p:sp>
+        <p:sp>
+          <p:nvSpPr>
+            <p:cNvPr name="TextBox 43" id="43"/>
+            <p:cNvSpPr txBox="true"/>
+            <p:nvPr/>
+          </p:nvSpPr>
+          <p:spPr>
+            <a:xfrm>
+              <a:off x="0" y="-19050"/>
+              <a:ext cx="1091553" cy="536183"/>
+            </a:xfrm>
+            <a:prstGeom prst="rect">
+              <a:avLst/>
+            </a:prstGeom>
+          </p:spPr>
+          <p:txBody>
+            <a:bodyPr anchor="t" rtlCol="false" tIns="0" lIns="0" bIns="0" rIns="0"/>
+            <a:lstStyle/>
+            <a:p>
+              <a:pPr algn="ctr">
+                <a:lnSpc>
+                  <a:spcPts val="3197"/>
+                </a:lnSpc>
+              </a:pPr>
+              <a:r>
+                <a:rPr lang="en-US" sz="2460" b="true">
+                  <a:solidFill>
+                    <a:srgbClr val="545454"/>
+                  </a:solidFill>
+                  <a:latin typeface="Lato Bold"/>
+                  <a:ea typeface="Lato Bold"/>
+                  <a:cs typeface="Lato Bold"/>
+                  <a:sym typeface="Lato Bold"/>
+                </a:rPr>
+                <a:t>02</a:t>
+              </a:r>
+            </a:p>
+          </p:txBody>
+        </p:sp>
+      </p:grpSp>
+      <p:grpSp>
+        <p:nvGrpSpPr>
+          <p:cNvPr name="Group 44" id="44"/>
+          <p:cNvGrpSpPr/>
           <p:nvPr/>
-        </p:nvSpPr>
-        <p:spPr>
+        </p:nvGrpSpPr>
+        <p:grpSpPr>
           <a:xfrm rot="0">
             <a:off x="9977048" y="2732486"/>
             <a:ext cx="818665" cy="387850"/>
+            <a:chOff x="0" y="0"/>
+            <a:chExt cx="1091553" cy="517133"/>
           </a:xfrm>
-          <a:prstGeom prst="rect">
-            <a:avLst/>
-          </a:prstGeom>
-        </p:spPr>
-        <p:txBody>
-          <a:bodyPr anchor="t" rtlCol="false" tIns="0" lIns="0" bIns="0" rIns="0">
-            <a:spAutoFit/>
-          </a:bodyPr>
-          <a:lstStyle/>
-          <a:p>
-            <a:pPr algn="ctr" marL="0" indent="0" lvl="0">
-              <a:lnSpc>
-                <a:spcPts val="3198"/>
-              </a:lnSpc>
-              <a:spcBef>
-                <a:spcPct val="0"/>
-              </a:spcBef>
-            </a:pPr>
-            <a:r>
-              <a:rPr lang="en-US" b="true" sz="2460">
-                <a:solidFill>
-                  <a:srgbClr val="545454"/>
-                </a:solidFill>
-                <a:latin typeface="Lato Bold"/>
-                <a:ea typeface="Lato Bold"/>
-                <a:cs typeface="Lato Bold"/>
-                <a:sym typeface="Lato Bold"/>
-              </a:rPr>
-              <a:t>03</a:t>
-            </a:r>
-          </a:p>
-        </p:txBody>
-      </p:sp>
-      <p:sp>
-        <p:nvSpPr>
-          <p:cNvPr name="TextBox 20" id="20"/>
-          <p:cNvSpPr txBox="true"/>
+        </p:grpSpPr>
+        <p:sp>
+          <p:nvSpPr>
+            <p:cNvPr name="Freeform 45" id="45"/>
+            <p:cNvSpPr/>
+            <p:nvPr/>
+          </p:nvSpPr>
+          <p:spPr>
+            <a:xfrm flipH="false" flipV="false" rot="0">
+              <a:off x="0" y="0"/>
+              <a:ext cx="1091553" cy="517133"/>
+            </a:xfrm>
+            <a:custGeom>
+              <a:avLst/>
+              <a:gdLst/>
+              <a:ahLst/>
+              <a:cxnLst/>
+              <a:rect r="r" b="b" t="t" l="l"/>
+              <a:pathLst>
+                <a:path h="517133" w="1091553">
+                  <a:moveTo>
+                    <a:pt x="0" y="0"/>
+                  </a:moveTo>
+                  <a:lnTo>
+                    <a:pt x="1091553" y="0"/>
+                  </a:lnTo>
+                  <a:lnTo>
+                    <a:pt x="1091553" y="517133"/>
+                  </a:lnTo>
+                  <a:lnTo>
+                    <a:pt x="0" y="517133"/>
+                  </a:lnTo>
+                  <a:close/>
+                </a:path>
+              </a:pathLst>
+            </a:custGeom>
+            <a:solidFill>
+              <a:srgbClr val="000000">
+                <a:alpha val="0"/>
+              </a:srgbClr>
+            </a:solidFill>
+          </p:spPr>
+        </p:sp>
+        <p:sp>
+          <p:nvSpPr>
+            <p:cNvPr name="TextBox 46" id="46"/>
+            <p:cNvSpPr txBox="true"/>
+            <p:nvPr/>
+          </p:nvSpPr>
+          <p:spPr>
+            <a:xfrm>
+              <a:off x="0" y="-19050"/>
+              <a:ext cx="1091553" cy="536183"/>
+            </a:xfrm>
+            <a:prstGeom prst="rect">
+              <a:avLst/>
+            </a:prstGeom>
+          </p:spPr>
+          <p:txBody>
+            <a:bodyPr anchor="t" rtlCol="false" tIns="0" lIns="0" bIns="0" rIns="0"/>
+            <a:lstStyle/>
+            <a:p>
+              <a:pPr algn="ctr">
+                <a:lnSpc>
+                  <a:spcPts val="3197"/>
+                </a:lnSpc>
+              </a:pPr>
+              <a:r>
+                <a:rPr lang="en-US" sz="2460" b="true">
+                  <a:solidFill>
+                    <a:srgbClr val="545454"/>
+                  </a:solidFill>
+                  <a:latin typeface="Lato Bold"/>
+                  <a:ea typeface="Lato Bold"/>
+                  <a:cs typeface="Lato Bold"/>
+                  <a:sym typeface="Lato Bold"/>
+                </a:rPr>
+                <a:t>03</a:t>
+              </a:r>
+            </a:p>
+          </p:txBody>
+        </p:sp>
+      </p:grpSp>
+      <p:grpSp>
+        <p:nvGrpSpPr>
+          <p:cNvPr name="Group 47" id="47"/>
+          <p:cNvGrpSpPr/>
           <p:nvPr/>
-        </p:nvSpPr>
-        <p:spPr>
+        </p:nvGrpSpPr>
+        <p:grpSpPr>
           <a:xfrm rot="0">
             <a:off x="9977048" y="3606614"/>
             <a:ext cx="818665" cy="387850"/>
+            <a:chOff x="0" y="0"/>
+            <a:chExt cx="1091553" cy="517133"/>
           </a:xfrm>
-          <a:prstGeom prst="rect">
-            <a:avLst/>
-          </a:prstGeom>
-        </p:spPr>
-        <p:txBody>
-          <a:bodyPr anchor="t" rtlCol="false" tIns="0" lIns="0" bIns="0" rIns="0">
-            <a:spAutoFit/>
-          </a:bodyPr>
-          <a:lstStyle/>
-          <a:p>
-            <a:pPr algn="ctr" marL="0" indent="0" lvl="0">
-              <a:lnSpc>
-                <a:spcPts val="3198"/>
-              </a:lnSpc>
-              <a:spcBef>
-                <a:spcPct val="0"/>
-              </a:spcBef>
-            </a:pPr>
-            <a:r>
-              <a:rPr lang="en-US" b="true" sz="2460">
-                <a:solidFill>
-                  <a:srgbClr val="545454"/>
-                </a:solidFill>
-                <a:latin typeface="Lato Bold"/>
-                <a:ea typeface="Lato Bold"/>
-                <a:cs typeface="Lato Bold"/>
-                <a:sym typeface="Lato Bold"/>
-              </a:rPr>
-              <a:t>04</a:t>
-            </a:r>
-          </a:p>
-        </p:txBody>
-      </p:sp>
-      <p:sp>
-        <p:nvSpPr>
-          <p:cNvPr name="TextBox 21" id="21"/>
-          <p:cNvSpPr txBox="true"/>
+        </p:grpSpPr>
+        <p:sp>
+          <p:nvSpPr>
+            <p:cNvPr name="Freeform 48" id="48"/>
+            <p:cNvSpPr/>
+            <p:nvPr/>
+          </p:nvSpPr>
+          <p:spPr>
+            <a:xfrm flipH="false" flipV="false" rot="0">
+              <a:off x="0" y="0"/>
+              <a:ext cx="1091553" cy="517133"/>
+            </a:xfrm>
+            <a:custGeom>
+              <a:avLst/>
+              <a:gdLst/>
+              <a:ahLst/>
+              <a:cxnLst/>
+              <a:rect r="r" b="b" t="t" l="l"/>
+              <a:pathLst>
+                <a:path h="517133" w="1091553">
+                  <a:moveTo>
+                    <a:pt x="0" y="0"/>
+                  </a:moveTo>
+                  <a:lnTo>
+                    <a:pt x="1091553" y="0"/>
+                  </a:lnTo>
+                  <a:lnTo>
+                    <a:pt x="1091553" y="517133"/>
+                  </a:lnTo>
+                  <a:lnTo>
+                    <a:pt x="0" y="517133"/>
+                  </a:lnTo>
+                  <a:close/>
+                </a:path>
+              </a:pathLst>
+            </a:custGeom>
+            <a:solidFill>
+              <a:srgbClr val="000000">
+                <a:alpha val="0"/>
+              </a:srgbClr>
+            </a:solidFill>
+          </p:spPr>
+        </p:sp>
+        <p:sp>
+          <p:nvSpPr>
+            <p:cNvPr name="TextBox 49" id="49"/>
+            <p:cNvSpPr txBox="true"/>
+            <p:nvPr/>
+          </p:nvSpPr>
+          <p:spPr>
+            <a:xfrm>
+              <a:off x="0" y="-19050"/>
+              <a:ext cx="1091553" cy="536183"/>
+            </a:xfrm>
+            <a:prstGeom prst="rect">
+              <a:avLst/>
+            </a:prstGeom>
+          </p:spPr>
+          <p:txBody>
+            <a:bodyPr anchor="t" rtlCol="false" tIns="0" lIns="0" bIns="0" rIns="0"/>
+            <a:lstStyle/>
+            <a:p>
+              <a:pPr algn="ctr">
+                <a:lnSpc>
+                  <a:spcPts val="3197"/>
+                </a:lnSpc>
+              </a:pPr>
+              <a:r>
+                <a:rPr lang="en-US" sz="2460" b="true">
+                  <a:solidFill>
+                    <a:srgbClr val="545454"/>
+                  </a:solidFill>
+                  <a:latin typeface="Lato Bold"/>
+                  <a:ea typeface="Lato Bold"/>
+                  <a:cs typeface="Lato Bold"/>
+                  <a:sym typeface="Lato Bold"/>
+                </a:rPr>
+                <a:t>04</a:t>
+              </a:r>
+            </a:p>
+          </p:txBody>
+        </p:sp>
+      </p:grpSp>
+      <p:grpSp>
+        <p:nvGrpSpPr>
+          <p:cNvPr name="Group 50" id="50"/>
+          <p:cNvGrpSpPr/>
           <p:nvPr/>
-        </p:nvSpPr>
-        <p:spPr>
+        </p:nvGrpSpPr>
+        <p:grpSpPr>
           <a:xfrm rot="0">
             <a:off x="9977048" y="4480742"/>
             <a:ext cx="818665" cy="387850"/>
+            <a:chOff x="0" y="0"/>
+            <a:chExt cx="1091553" cy="517133"/>
           </a:xfrm>
-          <a:prstGeom prst="rect">
-            <a:avLst/>
-          </a:prstGeom>
-        </p:spPr>
-        <p:txBody>
-          <a:bodyPr anchor="t" rtlCol="false" tIns="0" lIns="0" bIns="0" rIns="0">
-            <a:spAutoFit/>
-          </a:bodyPr>
-          <a:lstStyle/>
-          <a:p>
-            <a:pPr algn="ctr" marL="0" indent="0" lvl="0">
-              <a:lnSpc>
-                <a:spcPts val="3198"/>
-              </a:lnSpc>
-              <a:spcBef>
-                <a:spcPct val="0"/>
-              </a:spcBef>
-            </a:pPr>
-            <a:r>
-              <a:rPr lang="en-US" b="true" sz="2460">
-                <a:solidFill>
-                  <a:srgbClr val="545454"/>
-                </a:solidFill>
-                <a:latin typeface="Lato Bold"/>
-                <a:ea typeface="Lato Bold"/>
-                <a:cs typeface="Lato Bold"/>
-                <a:sym typeface="Lato Bold"/>
-              </a:rPr>
-              <a:t>05</a:t>
-            </a:r>
-          </a:p>
-        </p:txBody>
-      </p:sp>
-      <p:sp>
-        <p:nvSpPr>
-          <p:cNvPr name="TextBox 22" id="22"/>
-          <p:cNvSpPr txBox="true"/>
+        </p:grpSpPr>
+        <p:sp>
+          <p:nvSpPr>
+            <p:cNvPr name="Freeform 51" id="51"/>
+            <p:cNvSpPr/>
+            <p:nvPr/>
+          </p:nvSpPr>
+          <p:spPr>
+            <a:xfrm flipH="false" flipV="false" rot="0">
+              <a:off x="0" y="0"/>
+              <a:ext cx="1091553" cy="517133"/>
+            </a:xfrm>
+            <a:custGeom>
+              <a:avLst/>
+              <a:gdLst/>
+              <a:ahLst/>
+              <a:cxnLst/>
+              <a:rect r="r" b="b" t="t" l="l"/>
+              <a:pathLst>
+                <a:path h="517133" w="1091553">
+                  <a:moveTo>
+                    <a:pt x="0" y="0"/>
+                  </a:moveTo>
+                  <a:lnTo>
+                    <a:pt x="1091553" y="0"/>
+                  </a:lnTo>
+                  <a:lnTo>
+                    <a:pt x="1091553" y="517133"/>
+                  </a:lnTo>
+                  <a:lnTo>
+                    <a:pt x="0" y="517133"/>
+                  </a:lnTo>
+                  <a:close/>
+                </a:path>
+              </a:pathLst>
+            </a:custGeom>
+            <a:solidFill>
+              <a:srgbClr val="000000">
+                <a:alpha val="0"/>
+              </a:srgbClr>
+            </a:solidFill>
+          </p:spPr>
+        </p:sp>
+        <p:sp>
+          <p:nvSpPr>
+            <p:cNvPr name="TextBox 52" id="52"/>
+            <p:cNvSpPr txBox="true"/>
+            <p:nvPr/>
+          </p:nvSpPr>
+          <p:spPr>
+            <a:xfrm>
+              <a:off x="0" y="-19050"/>
+              <a:ext cx="1091553" cy="536183"/>
+            </a:xfrm>
+            <a:prstGeom prst="rect">
+              <a:avLst/>
+            </a:prstGeom>
+          </p:spPr>
+          <p:txBody>
+            <a:bodyPr anchor="t" rtlCol="false" tIns="0" lIns="0" bIns="0" rIns="0"/>
+            <a:lstStyle/>
+            <a:p>
+              <a:pPr algn="ctr">
+                <a:lnSpc>
+                  <a:spcPts val="3197"/>
+                </a:lnSpc>
+              </a:pPr>
+              <a:r>
+                <a:rPr lang="en-US" sz="2460" b="true">
+                  <a:solidFill>
+                    <a:srgbClr val="545454"/>
+                  </a:solidFill>
+                  <a:latin typeface="Lato Bold"/>
+                  <a:ea typeface="Lato Bold"/>
+                  <a:cs typeface="Lato Bold"/>
+                  <a:sym typeface="Lato Bold"/>
+                </a:rPr>
+                <a:t>05</a:t>
+              </a:r>
+            </a:p>
+          </p:txBody>
+        </p:sp>
+      </p:grpSp>
+      <p:grpSp>
+        <p:nvGrpSpPr>
+          <p:cNvPr name="Group 53" id="53"/>
+          <p:cNvGrpSpPr/>
           <p:nvPr/>
-        </p:nvSpPr>
-        <p:spPr>
+        </p:nvGrpSpPr>
+        <p:grpSpPr>
           <a:xfrm rot="0">
             <a:off x="9977048" y="5354871"/>
             <a:ext cx="818665" cy="387850"/>
+            <a:chOff x="0" y="0"/>
+            <a:chExt cx="1091553" cy="517133"/>
           </a:xfrm>
-          <a:prstGeom prst="rect">
-            <a:avLst/>
-          </a:prstGeom>
-        </p:spPr>
-        <p:txBody>
-          <a:bodyPr anchor="t" rtlCol="false" tIns="0" lIns="0" bIns="0" rIns="0">
-            <a:spAutoFit/>
-          </a:bodyPr>
-          <a:lstStyle/>
-          <a:p>
-            <a:pPr algn="ctr" marL="0" indent="0" lvl="0">
-              <a:lnSpc>
-                <a:spcPts val="3198"/>
-              </a:lnSpc>
-              <a:spcBef>
-                <a:spcPct val="0"/>
-              </a:spcBef>
-            </a:pPr>
-            <a:r>
-              <a:rPr lang="en-US" b="true" sz="2460">
-                <a:solidFill>
-                  <a:srgbClr val="545454"/>
-                </a:solidFill>
-                <a:latin typeface="Lato Bold"/>
-                <a:ea typeface="Lato Bold"/>
-                <a:cs typeface="Lato Bold"/>
-                <a:sym typeface="Lato Bold"/>
-              </a:rPr>
-              <a:t>06</a:t>
-            </a:r>
-          </a:p>
-        </p:txBody>
-      </p:sp>
-      <p:sp>
-        <p:nvSpPr>
-          <p:cNvPr name="TextBox 23" id="23"/>
-          <p:cNvSpPr txBox="true"/>
+        </p:grpSpPr>
+        <p:sp>
+          <p:nvSpPr>
+            <p:cNvPr name="Freeform 54" id="54"/>
+            <p:cNvSpPr/>
+            <p:nvPr/>
+          </p:nvSpPr>
+          <p:spPr>
+            <a:xfrm flipH="false" flipV="false" rot="0">
+              <a:off x="0" y="0"/>
+              <a:ext cx="1091553" cy="517133"/>
+            </a:xfrm>
+            <a:custGeom>
+              <a:avLst/>
+              <a:gdLst/>
+              <a:ahLst/>
+              <a:cxnLst/>
+              <a:rect r="r" b="b" t="t" l="l"/>
+              <a:pathLst>
+                <a:path h="517133" w="1091553">
+                  <a:moveTo>
+                    <a:pt x="0" y="0"/>
+                  </a:moveTo>
+                  <a:lnTo>
+                    <a:pt x="1091553" y="0"/>
+                  </a:lnTo>
+                  <a:lnTo>
+                    <a:pt x="1091553" y="517133"/>
+                  </a:lnTo>
+                  <a:lnTo>
+                    <a:pt x="0" y="517133"/>
+                  </a:lnTo>
+                  <a:close/>
+                </a:path>
+              </a:pathLst>
+            </a:custGeom>
+            <a:solidFill>
+              <a:srgbClr val="000000">
+                <a:alpha val="0"/>
+              </a:srgbClr>
+            </a:solidFill>
+          </p:spPr>
+        </p:sp>
+        <p:sp>
+          <p:nvSpPr>
+            <p:cNvPr name="TextBox 55" id="55"/>
+            <p:cNvSpPr txBox="true"/>
+            <p:nvPr/>
+          </p:nvSpPr>
+          <p:spPr>
+            <a:xfrm>
+              <a:off x="0" y="-19050"/>
+              <a:ext cx="1091553" cy="536183"/>
+            </a:xfrm>
+            <a:prstGeom prst="rect">
+              <a:avLst/>
+            </a:prstGeom>
+          </p:spPr>
+          <p:txBody>
+            <a:bodyPr anchor="t" rtlCol="false" tIns="0" lIns="0" bIns="0" rIns="0"/>
+            <a:lstStyle/>
+            <a:p>
+              <a:pPr algn="ctr">
+                <a:lnSpc>
+                  <a:spcPts val="3197"/>
+                </a:lnSpc>
+              </a:pPr>
+              <a:r>
+                <a:rPr lang="en-US" sz="2460" b="true">
+                  <a:solidFill>
+                    <a:srgbClr val="545454"/>
+                  </a:solidFill>
+                  <a:latin typeface="Lato Bold"/>
+                  <a:ea typeface="Lato Bold"/>
+                  <a:cs typeface="Lato Bold"/>
+                  <a:sym typeface="Lato Bold"/>
+                </a:rPr>
+                <a:t>06</a:t>
+              </a:r>
+            </a:p>
+          </p:txBody>
+        </p:sp>
+      </p:grpSp>
+      <p:grpSp>
+        <p:nvGrpSpPr>
+          <p:cNvPr name="Group 56" id="56"/>
+          <p:cNvGrpSpPr/>
           <p:nvPr/>
-        </p:nvSpPr>
-        <p:spPr>
+        </p:nvGrpSpPr>
+        <p:grpSpPr>
           <a:xfrm rot="0">
             <a:off x="9977048" y="6228999"/>
             <a:ext cx="818665" cy="387850"/>
+            <a:chOff x="0" y="0"/>
+            <a:chExt cx="1091553" cy="517133"/>
           </a:xfrm>
-          <a:prstGeom prst="rect">
-            <a:avLst/>
-          </a:prstGeom>
-        </p:spPr>
-        <p:txBody>
-          <a:bodyPr anchor="t" rtlCol="false" tIns="0" lIns="0" bIns="0" rIns="0">
-            <a:spAutoFit/>
-          </a:bodyPr>
-          <a:lstStyle/>
-          <a:p>
-            <a:pPr algn="ctr" marL="0" indent="0" lvl="0">
-              <a:lnSpc>
-                <a:spcPts val="3198"/>
-              </a:lnSpc>
-              <a:spcBef>
-                <a:spcPct val="0"/>
-              </a:spcBef>
-            </a:pPr>
-            <a:r>
-              <a:rPr lang="en-US" b="true" sz="2460">
-                <a:solidFill>
-                  <a:srgbClr val="545454"/>
-                </a:solidFill>
-                <a:latin typeface="Lato Bold"/>
-                <a:ea typeface="Lato Bold"/>
-                <a:cs typeface="Lato Bold"/>
-                <a:sym typeface="Lato Bold"/>
-              </a:rPr>
-              <a:t>07</a:t>
-            </a:r>
-          </a:p>
-        </p:txBody>
-      </p:sp>
-      <p:sp>
-        <p:nvSpPr>
-          <p:cNvPr name="TextBox 24" id="24"/>
-          <p:cNvSpPr txBox="true"/>
+        </p:grpSpPr>
+        <p:sp>
+          <p:nvSpPr>
+            <p:cNvPr name="Freeform 57" id="57"/>
+            <p:cNvSpPr/>
+            <p:nvPr/>
+          </p:nvSpPr>
+          <p:spPr>
+            <a:xfrm flipH="false" flipV="false" rot="0">
+              <a:off x="0" y="0"/>
+              <a:ext cx="1091553" cy="517133"/>
+            </a:xfrm>
+            <a:custGeom>
+              <a:avLst/>
+              <a:gdLst/>
+              <a:ahLst/>
+              <a:cxnLst/>
+              <a:rect r="r" b="b" t="t" l="l"/>
+              <a:pathLst>
+                <a:path h="517133" w="1091553">
+                  <a:moveTo>
+                    <a:pt x="0" y="0"/>
+                  </a:moveTo>
+                  <a:lnTo>
+                    <a:pt x="1091553" y="0"/>
+                  </a:lnTo>
+                  <a:lnTo>
+                    <a:pt x="1091553" y="517133"/>
+                  </a:lnTo>
+                  <a:lnTo>
+                    <a:pt x="0" y="517133"/>
+                  </a:lnTo>
+                  <a:close/>
+                </a:path>
+              </a:pathLst>
+            </a:custGeom>
+            <a:solidFill>
+              <a:srgbClr val="000000">
+                <a:alpha val="0"/>
+              </a:srgbClr>
+            </a:solidFill>
+          </p:spPr>
+        </p:sp>
+        <p:sp>
+          <p:nvSpPr>
+            <p:cNvPr name="TextBox 58" id="58"/>
+            <p:cNvSpPr txBox="true"/>
+            <p:nvPr/>
+          </p:nvSpPr>
+          <p:spPr>
+            <a:xfrm>
+              <a:off x="0" y="-19050"/>
+              <a:ext cx="1091553" cy="536183"/>
+            </a:xfrm>
+            <a:prstGeom prst="rect">
+              <a:avLst/>
+            </a:prstGeom>
+          </p:spPr>
+          <p:txBody>
+            <a:bodyPr anchor="t" rtlCol="false" tIns="0" lIns="0" bIns="0" rIns="0"/>
+            <a:lstStyle/>
+            <a:p>
+              <a:pPr algn="ctr">
+                <a:lnSpc>
+                  <a:spcPts val="3197"/>
+                </a:lnSpc>
+              </a:pPr>
+              <a:r>
+                <a:rPr lang="en-US" sz="2460" b="true">
+                  <a:solidFill>
+                    <a:srgbClr val="545454"/>
+                  </a:solidFill>
+                  <a:latin typeface="Lato Bold"/>
+                  <a:ea typeface="Lato Bold"/>
+                  <a:cs typeface="Lato Bold"/>
+                  <a:sym typeface="Lato Bold"/>
+                </a:rPr>
+                <a:t>07</a:t>
+              </a:r>
+            </a:p>
+          </p:txBody>
+        </p:sp>
+      </p:grpSp>
+      <p:grpSp>
+        <p:nvGrpSpPr>
+          <p:cNvPr name="Group 59" id="59"/>
+          <p:cNvGrpSpPr/>
           <p:nvPr/>
-        </p:nvSpPr>
-        <p:spPr>
+        </p:nvGrpSpPr>
+        <p:grpSpPr>
           <a:xfrm rot="0">
             <a:off x="9977048" y="7103127"/>
             <a:ext cx="818665" cy="387850"/>
+            <a:chOff x="0" y="0"/>
+            <a:chExt cx="1091553" cy="517133"/>
           </a:xfrm>
-          <a:prstGeom prst="rect">
-            <a:avLst/>
-          </a:prstGeom>
-        </p:spPr>
-        <p:txBody>
-          <a:bodyPr anchor="t" rtlCol="false" tIns="0" lIns="0" bIns="0" rIns="0">
-            <a:spAutoFit/>
-          </a:bodyPr>
-          <a:lstStyle/>
-          <a:p>
-            <a:pPr algn="ctr" marL="0" indent="0" lvl="0">
-              <a:lnSpc>
-                <a:spcPts val="3198"/>
-              </a:lnSpc>
-              <a:spcBef>
-                <a:spcPct val="0"/>
-              </a:spcBef>
-            </a:pPr>
-            <a:r>
-              <a:rPr lang="en-US" b="true" sz="2460">
-                <a:solidFill>
-                  <a:srgbClr val="545454"/>
-                </a:solidFill>
-                <a:latin typeface="Lato Bold"/>
-                <a:ea typeface="Lato Bold"/>
-                <a:cs typeface="Lato Bold"/>
-                <a:sym typeface="Lato Bold"/>
-              </a:rPr>
-              <a:t>08</a:t>
-            </a:r>
-          </a:p>
-        </p:txBody>
-      </p:sp>
-      <p:sp>
-        <p:nvSpPr>
-          <p:cNvPr name="TextBox 25" id="25"/>
-          <p:cNvSpPr txBox="true"/>
+        </p:grpSpPr>
+        <p:sp>
+          <p:nvSpPr>
+            <p:cNvPr name="Freeform 60" id="60"/>
+            <p:cNvSpPr/>
+            <p:nvPr/>
+          </p:nvSpPr>
+          <p:spPr>
+            <a:xfrm flipH="false" flipV="false" rot="0">
+              <a:off x="0" y="0"/>
+              <a:ext cx="1091553" cy="517133"/>
+            </a:xfrm>
+            <a:custGeom>
+              <a:avLst/>
+              <a:gdLst/>
+              <a:ahLst/>
+              <a:cxnLst/>
+              <a:rect r="r" b="b" t="t" l="l"/>
+              <a:pathLst>
+                <a:path h="517133" w="1091553">
+                  <a:moveTo>
+                    <a:pt x="0" y="0"/>
+                  </a:moveTo>
+                  <a:lnTo>
+                    <a:pt x="1091553" y="0"/>
+                  </a:lnTo>
+                  <a:lnTo>
+                    <a:pt x="1091553" y="517133"/>
+                  </a:lnTo>
+                  <a:lnTo>
+                    <a:pt x="0" y="517133"/>
+                  </a:lnTo>
+                  <a:close/>
+                </a:path>
+              </a:pathLst>
+            </a:custGeom>
+            <a:solidFill>
+              <a:srgbClr val="000000">
+                <a:alpha val="0"/>
+              </a:srgbClr>
+            </a:solidFill>
+          </p:spPr>
+        </p:sp>
+        <p:sp>
+          <p:nvSpPr>
+            <p:cNvPr name="TextBox 61" id="61"/>
+            <p:cNvSpPr txBox="true"/>
+            <p:nvPr/>
+          </p:nvSpPr>
+          <p:spPr>
+            <a:xfrm>
+              <a:off x="0" y="-19050"/>
+              <a:ext cx="1091553" cy="536183"/>
+            </a:xfrm>
+            <a:prstGeom prst="rect">
+              <a:avLst/>
+            </a:prstGeom>
+          </p:spPr>
+          <p:txBody>
+            <a:bodyPr anchor="t" rtlCol="false" tIns="0" lIns="0" bIns="0" rIns="0"/>
+            <a:lstStyle/>
+            <a:p>
+              <a:pPr algn="ctr">
+                <a:lnSpc>
+                  <a:spcPts val="3197"/>
+                </a:lnSpc>
+              </a:pPr>
+              <a:r>
+                <a:rPr lang="en-US" sz="2460" b="true">
+                  <a:solidFill>
+                    <a:srgbClr val="545454"/>
+                  </a:solidFill>
+                  <a:latin typeface="Lato Bold"/>
+                  <a:ea typeface="Lato Bold"/>
+                  <a:cs typeface="Lato Bold"/>
+                  <a:sym typeface="Lato Bold"/>
+                </a:rPr>
+                <a:t>08</a:t>
+              </a:r>
+            </a:p>
+          </p:txBody>
+        </p:sp>
+      </p:grpSp>
+      <p:grpSp>
+        <p:nvGrpSpPr>
+          <p:cNvPr name="Group 62" id="62"/>
+          <p:cNvGrpSpPr/>
           <p:nvPr/>
-        </p:nvSpPr>
-        <p:spPr>
+        </p:nvGrpSpPr>
+        <p:grpSpPr>
           <a:xfrm rot="0">
             <a:off x="9977048" y="7988016"/>
             <a:ext cx="818665" cy="387850"/>
+            <a:chOff x="0" y="0"/>
+            <a:chExt cx="1091553" cy="517133"/>
           </a:xfrm>
-          <a:prstGeom prst="rect">
-            <a:avLst/>
-          </a:prstGeom>
-        </p:spPr>
-        <p:txBody>
-          <a:bodyPr anchor="t" rtlCol="false" tIns="0" lIns="0" bIns="0" rIns="0">
-            <a:spAutoFit/>
-          </a:bodyPr>
-          <a:lstStyle/>
-          <a:p>
-            <a:pPr algn="ctr" marL="0" indent="0" lvl="0">
-              <a:lnSpc>
-                <a:spcPts val="3198"/>
-              </a:lnSpc>
-              <a:spcBef>
-                <a:spcPct val="0"/>
-              </a:spcBef>
-            </a:pPr>
-            <a:r>
-              <a:rPr lang="en-US" b="true" sz="2460">
-                <a:solidFill>
-                  <a:srgbClr val="545454"/>
-                </a:solidFill>
-                <a:latin typeface="Lato Bold"/>
-                <a:ea typeface="Lato Bold"/>
-                <a:cs typeface="Lato Bold"/>
-                <a:sym typeface="Lato Bold"/>
-              </a:rPr>
-              <a:t>09</a:t>
-            </a:r>
-          </a:p>
-        </p:txBody>
-      </p:sp>
-      <p:sp>
-        <p:nvSpPr>
-          <p:cNvPr name="TextBox 26" id="26"/>
-          <p:cNvSpPr txBox="true"/>
+        </p:grpSpPr>
+        <p:sp>
+          <p:nvSpPr>
+            <p:cNvPr name="Freeform 63" id="63"/>
+            <p:cNvSpPr/>
+            <p:nvPr/>
+          </p:nvSpPr>
+          <p:spPr>
+            <a:xfrm flipH="false" flipV="false" rot="0">
+              <a:off x="0" y="0"/>
+              <a:ext cx="1091553" cy="517133"/>
+            </a:xfrm>
+            <a:custGeom>
+              <a:avLst/>
+              <a:gdLst/>
+              <a:ahLst/>
+              <a:cxnLst/>
+              <a:rect r="r" b="b" t="t" l="l"/>
+              <a:pathLst>
+                <a:path h="517133" w="1091553">
+                  <a:moveTo>
+                    <a:pt x="0" y="0"/>
+                  </a:moveTo>
+                  <a:lnTo>
+                    <a:pt x="1091553" y="0"/>
+                  </a:lnTo>
+                  <a:lnTo>
+                    <a:pt x="1091553" y="517133"/>
+                  </a:lnTo>
+                  <a:lnTo>
+                    <a:pt x="0" y="517133"/>
+                  </a:lnTo>
+                  <a:close/>
+                </a:path>
+              </a:pathLst>
+            </a:custGeom>
+            <a:solidFill>
+              <a:srgbClr val="000000">
+                <a:alpha val="0"/>
+              </a:srgbClr>
+            </a:solidFill>
+          </p:spPr>
+        </p:sp>
+        <p:sp>
+          <p:nvSpPr>
+            <p:cNvPr name="TextBox 64" id="64"/>
+            <p:cNvSpPr txBox="true"/>
+            <p:nvPr/>
+          </p:nvSpPr>
+          <p:spPr>
+            <a:xfrm>
+              <a:off x="0" y="-19050"/>
+              <a:ext cx="1091553" cy="536183"/>
+            </a:xfrm>
+            <a:prstGeom prst="rect">
+              <a:avLst/>
+            </a:prstGeom>
+          </p:spPr>
+          <p:txBody>
+            <a:bodyPr anchor="t" rtlCol="false" tIns="0" lIns="0" bIns="0" rIns="0"/>
+            <a:lstStyle/>
+            <a:p>
+              <a:pPr algn="ctr">
+                <a:lnSpc>
+                  <a:spcPts val="3197"/>
+                </a:lnSpc>
+              </a:pPr>
+              <a:r>
+                <a:rPr lang="en-US" sz="2460" b="true">
+                  <a:solidFill>
+                    <a:srgbClr val="545454"/>
+                  </a:solidFill>
+                  <a:latin typeface="Lato Bold"/>
+                  <a:ea typeface="Lato Bold"/>
+                  <a:cs typeface="Lato Bold"/>
+                  <a:sym typeface="Lato Bold"/>
+                </a:rPr>
+                <a:t>09</a:t>
+              </a:r>
+            </a:p>
+          </p:txBody>
+        </p:sp>
+      </p:grpSp>
+      <p:grpSp>
+        <p:nvGrpSpPr>
+          <p:cNvPr name="Group 65" id="65"/>
+          <p:cNvGrpSpPr/>
           <p:nvPr/>
-        </p:nvSpPr>
-        <p:spPr>
+        </p:nvGrpSpPr>
+        <p:grpSpPr>
           <a:xfrm rot="0">
             <a:off x="9977048" y="8862356"/>
             <a:ext cx="818665" cy="387850"/>
+            <a:chOff x="0" y="0"/>
+            <a:chExt cx="1091553" cy="517133"/>
           </a:xfrm>
-          <a:prstGeom prst="rect">
-            <a:avLst/>
-          </a:prstGeom>
-        </p:spPr>
-        <p:txBody>
-          <a:bodyPr anchor="t" rtlCol="false" tIns="0" lIns="0" bIns="0" rIns="0">
-            <a:spAutoFit/>
-          </a:bodyPr>
-          <a:lstStyle/>
-          <a:p>
-            <a:pPr algn="ctr" marL="0" indent="0" lvl="0">
-              <a:lnSpc>
-                <a:spcPts val="3198"/>
-              </a:lnSpc>
-              <a:spcBef>
-                <a:spcPct val="0"/>
-              </a:spcBef>
-            </a:pPr>
-            <a:r>
-              <a:rPr lang="en-US" b="true" sz="2460">
-                <a:solidFill>
-                  <a:srgbClr val="545454"/>
-                </a:solidFill>
-                <a:latin typeface="Lato Bold"/>
-                <a:ea typeface="Lato Bold"/>
-                <a:cs typeface="Lato Bold"/>
-                <a:sym typeface="Lato Bold"/>
-              </a:rPr>
-              <a:t>10</a:t>
-            </a:r>
-          </a:p>
-        </p:txBody>
-      </p:sp>
-      <p:sp>
-        <p:nvSpPr>
-          <p:cNvPr name="TextBox 27" id="27"/>
-          <p:cNvSpPr txBox="true"/>
+        </p:grpSpPr>
+        <p:sp>
+          <p:nvSpPr>
+            <p:cNvPr name="Freeform 66" id="66"/>
+            <p:cNvSpPr/>
+            <p:nvPr/>
+          </p:nvSpPr>
+          <p:spPr>
+            <a:xfrm flipH="false" flipV="false" rot="0">
+              <a:off x="0" y="0"/>
+              <a:ext cx="1091553" cy="517133"/>
+            </a:xfrm>
+            <a:custGeom>
+              <a:avLst/>
+              <a:gdLst/>
+              <a:ahLst/>
+              <a:cxnLst/>
+              <a:rect r="r" b="b" t="t" l="l"/>
+              <a:pathLst>
+                <a:path h="517133" w="1091553">
+                  <a:moveTo>
+                    <a:pt x="0" y="0"/>
+                  </a:moveTo>
+                  <a:lnTo>
+                    <a:pt x="1091553" y="0"/>
+                  </a:lnTo>
+                  <a:lnTo>
+                    <a:pt x="1091553" y="517133"/>
+                  </a:lnTo>
+                  <a:lnTo>
+                    <a:pt x="0" y="517133"/>
+                  </a:lnTo>
+                  <a:close/>
+                </a:path>
+              </a:pathLst>
+            </a:custGeom>
+            <a:solidFill>
+              <a:srgbClr val="000000">
+                <a:alpha val="0"/>
+              </a:srgbClr>
+            </a:solidFill>
+          </p:spPr>
+        </p:sp>
+        <p:sp>
+          <p:nvSpPr>
+            <p:cNvPr name="TextBox 67" id="67"/>
+            <p:cNvSpPr txBox="true"/>
+            <p:nvPr/>
+          </p:nvSpPr>
+          <p:spPr>
+            <a:xfrm>
+              <a:off x="0" y="-19050"/>
+              <a:ext cx="1091553" cy="536183"/>
+            </a:xfrm>
+            <a:prstGeom prst="rect">
+              <a:avLst/>
+            </a:prstGeom>
+          </p:spPr>
+          <p:txBody>
+            <a:bodyPr anchor="t" rtlCol="false" tIns="0" lIns="0" bIns="0" rIns="0"/>
+            <a:lstStyle/>
+            <a:p>
+              <a:pPr algn="ctr">
+                <a:lnSpc>
+                  <a:spcPts val="3197"/>
+                </a:lnSpc>
+              </a:pPr>
+              <a:r>
+                <a:rPr lang="en-US" sz="2460" b="true">
+                  <a:solidFill>
+                    <a:srgbClr val="545454"/>
+                  </a:solidFill>
+                  <a:latin typeface="Lato Bold"/>
+                  <a:ea typeface="Lato Bold"/>
+                  <a:cs typeface="Lato Bold"/>
+                  <a:sym typeface="Lato Bold"/>
+                </a:rPr>
+                <a:t>10</a:t>
+              </a:r>
+            </a:p>
+          </p:txBody>
+        </p:sp>
+      </p:grpSp>
+      <p:grpSp>
+        <p:nvGrpSpPr>
+          <p:cNvPr name="Group 68" id="68"/>
+          <p:cNvGrpSpPr/>
           <p:nvPr/>
-        </p:nvSpPr>
-        <p:spPr>
+        </p:nvGrpSpPr>
+        <p:grpSpPr>
           <a:xfrm rot="0">
             <a:off x="11413520" y="6242222"/>
             <a:ext cx="5012986" cy="323304"/>
+            <a:chOff x="0" y="0"/>
+            <a:chExt cx="6683981" cy="431072"/>
           </a:xfrm>
-          <a:prstGeom prst="rect">
-            <a:avLst/>
-          </a:prstGeom>
-        </p:spPr>
-        <p:txBody>
-          <a:bodyPr anchor="t" rtlCol="false" tIns="0" lIns="0" bIns="0" rIns="0">
-            <a:spAutoFit/>
-          </a:bodyPr>
-          <a:lstStyle/>
-          <a:p>
-            <a:pPr algn="l" marL="0" indent="0" lvl="0">
-              <a:lnSpc>
-                <a:spcPts val="2646"/>
-              </a:lnSpc>
-            </a:pPr>
-            <a:r>
-              <a:rPr lang="en-US" sz="1764">
-                <a:solidFill>
-                  <a:srgbClr val="545454"/>
-                </a:solidFill>
-                <a:latin typeface="Lato"/>
-                <a:ea typeface="Lato"/>
-                <a:cs typeface="Lato"/>
-                <a:sym typeface="Lato"/>
-              </a:rPr>
-              <a:t>Statistical Analysis with Python (3 Hours)</a:t>
-            </a:r>
-          </a:p>
-        </p:txBody>
-      </p:sp>
-      <p:sp>
-        <p:nvSpPr>
-          <p:cNvPr name="TextBox 28" id="28"/>
-          <p:cNvSpPr txBox="true"/>
+        </p:grpSpPr>
+        <p:sp>
+          <p:nvSpPr>
+            <p:cNvPr name="Freeform 69" id="69"/>
+            <p:cNvSpPr/>
+            <p:nvPr/>
+          </p:nvSpPr>
+          <p:spPr>
+            <a:xfrm flipH="false" flipV="false" rot="0">
+              <a:off x="0" y="0"/>
+              <a:ext cx="6683981" cy="431072"/>
+            </a:xfrm>
+            <a:custGeom>
+              <a:avLst/>
+              <a:gdLst/>
+              <a:ahLst/>
+              <a:cxnLst/>
+              <a:rect r="r" b="b" t="t" l="l"/>
+              <a:pathLst>
+                <a:path h="431072" w="6683981">
+                  <a:moveTo>
+                    <a:pt x="0" y="0"/>
+                  </a:moveTo>
+                  <a:lnTo>
+                    <a:pt x="6683981" y="0"/>
+                  </a:lnTo>
+                  <a:lnTo>
+                    <a:pt x="6683981" y="431072"/>
+                  </a:lnTo>
+                  <a:lnTo>
+                    <a:pt x="0" y="431072"/>
+                  </a:lnTo>
+                  <a:close/>
+                </a:path>
+              </a:pathLst>
+            </a:custGeom>
+            <a:solidFill>
+              <a:srgbClr val="000000">
+                <a:alpha val="0"/>
+              </a:srgbClr>
+            </a:solidFill>
+          </p:spPr>
+        </p:sp>
+        <p:sp>
+          <p:nvSpPr>
+            <p:cNvPr name="TextBox 70" id="70"/>
+            <p:cNvSpPr txBox="true"/>
+            <p:nvPr/>
+          </p:nvSpPr>
+          <p:spPr>
+            <a:xfrm>
+              <a:off x="0" y="-57150"/>
+              <a:ext cx="6683981" cy="488222"/>
+            </a:xfrm>
+            <a:prstGeom prst="rect">
+              <a:avLst/>
+            </a:prstGeom>
+          </p:spPr>
+          <p:txBody>
+            <a:bodyPr anchor="t" rtlCol="false" tIns="0" lIns="0" bIns="0" rIns="0"/>
+            <a:lstStyle/>
+            <a:p>
+              <a:pPr algn="l">
+                <a:lnSpc>
+                  <a:spcPts val="2646"/>
+                </a:lnSpc>
+              </a:pPr>
+              <a:r>
+                <a:rPr lang="en-US" sz="1764">
+                  <a:solidFill>
+                    <a:srgbClr val="545454"/>
+                  </a:solidFill>
+                  <a:latin typeface="Lato"/>
+                  <a:ea typeface="Lato"/>
+                  <a:cs typeface="Lato"/>
+                  <a:sym typeface="Lato"/>
+                </a:rPr>
+                <a:t>Statistical Analysis with Python (3 Hours)</a:t>
+              </a:r>
+            </a:p>
+          </p:txBody>
+        </p:sp>
+      </p:grpSp>
+      <p:grpSp>
+        <p:nvGrpSpPr>
+          <p:cNvPr name="Group 71" id="71"/>
+          <p:cNvGrpSpPr/>
           <p:nvPr/>
-        </p:nvSpPr>
-        <p:spPr>
+        </p:nvGrpSpPr>
+        <p:grpSpPr>
           <a:xfrm rot="0">
             <a:off x="11413520" y="6949663"/>
             <a:ext cx="5012986" cy="656679"/>
+            <a:chOff x="0" y="0"/>
+            <a:chExt cx="6683981" cy="875572"/>
           </a:xfrm>
-          <a:prstGeom prst="rect">
-            <a:avLst/>
-          </a:prstGeom>
-        </p:spPr>
-        <p:txBody>
-          <a:bodyPr anchor="t" rtlCol="false" tIns="0" lIns="0" bIns="0" rIns="0">
-            <a:spAutoFit/>
-          </a:bodyPr>
-          <a:lstStyle/>
-          <a:p>
-            <a:pPr algn="l" marL="0" indent="0" lvl="0">
-              <a:lnSpc>
-                <a:spcPts val="2646"/>
-              </a:lnSpc>
-            </a:pPr>
-            <a:r>
-              <a:rPr lang="en-US" sz="1764">
-                <a:solidFill>
-                  <a:srgbClr val="545454"/>
-                </a:solidFill>
-                <a:latin typeface="Lato"/>
-                <a:ea typeface="Lato"/>
-                <a:cs typeface="Lato"/>
-                <a:sym typeface="Lato"/>
-              </a:rPr>
-              <a:t>Introduction to Machine Learning with Scikit-Learn (2 Hours)</a:t>
-            </a:r>
-          </a:p>
-        </p:txBody>
-      </p:sp>
-      <p:sp>
-        <p:nvSpPr>
-          <p:cNvPr name="TextBox 29" id="29"/>
-          <p:cNvSpPr txBox="true"/>
+        </p:grpSpPr>
+        <p:sp>
+          <p:nvSpPr>
+            <p:cNvPr name="Freeform 72" id="72"/>
+            <p:cNvSpPr/>
+            <p:nvPr/>
+          </p:nvSpPr>
+          <p:spPr>
+            <a:xfrm flipH="false" flipV="false" rot="0">
+              <a:off x="0" y="0"/>
+              <a:ext cx="6683981" cy="875572"/>
+            </a:xfrm>
+            <a:custGeom>
+              <a:avLst/>
+              <a:gdLst/>
+              <a:ahLst/>
+              <a:cxnLst/>
+              <a:rect r="r" b="b" t="t" l="l"/>
+              <a:pathLst>
+                <a:path h="875572" w="6683981">
+                  <a:moveTo>
+                    <a:pt x="0" y="0"/>
+                  </a:moveTo>
+                  <a:lnTo>
+                    <a:pt x="6683981" y="0"/>
+                  </a:lnTo>
+                  <a:lnTo>
+                    <a:pt x="6683981" y="875572"/>
+                  </a:lnTo>
+                  <a:lnTo>
+                    <a:pt x="0" y="875572"/>
+                  </a:lnTo>
+                  <a:close/>
+                </a:path>
+              </a:pathLst>
+            </a:custGeom>
+            <a:solidFill>
+              <a:srgbClr val="000000">
+                <a:alpha val="0"/>
+              </a:srgbClr>
+            </a:solidFill>
+          </p:spPr>
+        </p:sp>
+        <p:sp>
+          <p:nvSpPr>
+            <p:cNvPr name="TextBox 73" id="73"/>
+            <p:cNvSpPr txBox="true"/>
+            <p:nvPr/>
+          </p:nvSpPr>
+          <p:spPr>
+            <a:xfrm>
+              <a:off x="0" y="-57150"/>
+              <a:ext cx="6683981" cy="932722"/>
+            </a:xfrm>
+            <a:prstGeom prst="rect">
+              <a:avLst/>
+            </a:prstGeom>
+          </p:spPr>
+          <p:txBody>
+            <a:bodyPr anchor="t" rtlCol="false" tIns="0" lIns="0" bIns="0" rIns="0"/>
+            <a:lstStyle/>
+            <a:p>
+              <a:pPr algn="l">
+                <a:lnSpc>
+                  <a:spcPts val="2646"/>
+                </a:lnSpc>
+              </a:pPr>
+              <a:r>
+                <a:rPr lang="en-US" sz="1764">
+                  <a:solidFill>
+                    <a:srgbClr val="545454"/>
+                  </a:solidFill>
+                  <a:latin typeface="Lato"/>
+                  <a:ea typeface="Lato"/>
+                  <a:cs typeface="Lato"/>
+                  <a:sym typeface="Lato"/>
+                </a:rPr>
+                <a:t>Introduction to Machine Learning with Scikit-Learn (2 Hours)</a:t>
+              </a:r>
+            </a:p>
+          </p:txBody>
+        </p:sp>
+      </p:grpSp>
+      <p:grpSp>
+        <p:nvGrpSpPr>
+          <p:cNvPr name="Group 74" id="74"/>
+          <p:cNvGrpSpPr/>
           <p:nvPr/>
-        </p:nvSpPr>
-        <p:spPr>
+        </p:nvGrpSpPr>
+        <p:grpSpPr>
           <a:xfrm rot="0">
             <a:off x="11413520" y="7834552"/>
             <a:ext cx="5012986" cy="656679"/>
+            <a:chOff x="0" y="0"/>
+            <a:chExt cx="6683981" cy="875572"/>
           </a:xfrm>
-          <a:prstGeom prst="rect">
-            <a:avLst/>
-          </a:prstGeom>
-        </p:spPr>
-        <p:txBody>
-          <a:bodyPr anchor="t" rtlCol="false" tIns="0" lIns="0" bIns="0" rIns="0">
-            <a:spAutoFit/>
-          </a:bodyPr>
-          <a:lstStyle/>
-          <a:p>
-            <a:pPr algn="l" marL="0" indent="0" lvl="0">
-              <a:lnSpc>
-                <a:spcPts val="2646"/>
-              </a:lnSpc>
-            </a:pPr>
-            <a:r>
-              <a:rPr lang="en-US" sz="1764">
-                <a:solidFill>
-                  <a:srgbClr val="545454"/>
-                </a:solidFill>
-                <a:latin typeface="Lato"/>
-                <a:ea typeface="Lato"/>
-                <a:cs typeface="Lato"/>
-                <a:sym typeface="Lato"/>
-              </a:rPr>
-              <a:t>Reproducible Research with Jupyter Notebooks (1 Hour)</a:t>
-            </a:r>
-          </a:p>
-        </p:txBody>
-      </p:sp>
-      <p:sp>
-        <p:nvSpPr>
-          <p:cNvPr name="TextBox 30" id="30"/>
-          <p:cNvSpPr txBox="true"/>
+        </p:grpSpPr>
+        <p:sp>
+          <p:nvSpPr>
+            <p:cNvPr name="Freeform 75" id="75"/>
+            <p:cNvSpPr/>
+            <p:nvPr/>
+          </p:nvSpPr>
+          <p:spPr>
+            <a:xfrm flipH="false" flipV="false" rot="0">
+              <a:off x="0" y="0"/>
+              <a:ext cx="6683981" cy="875572"/>
+            </a:xfrm>
+            <a:custGeom>
+              <a:avLst/>
+              <a:gdLst/>
+              <a:ahLst/>
+              <a:cxnLst/>
+              <a:rect r="r" b="b" t="t" l="l"/>
+              <a:pathLst>
+                <a:path h="875572" w="6683981">
+                  <a:moveTo>
+                    <a:pt x="0" y="0"/>
+                  </a:moveTo>
+                  <a:lnTo>
+                    <a:pt x="6683981" y="0"/>
+                  </a:lnTo>
+                  <a:lnTo>
+                    <a:pt x="6683981" y="875572"/>
+                  </a:lnTo>
+                  <a:lnTo>
+                    <a:pt x="0" y="875572"/>
+                  </a:lnTo>
+                  <a:close/>
+                </a:path>
+              </a:pathLst>
+            </a:custGeom>
+            <a:solidFill>
+              <a:srgbClr val="000000">
+                <a:alpha val="0"/>
+              </a:srgbClr>
+            </a:solidFill>
+          </p:spPr>
+        </p:sp>
+        <p:sp>
+          <p:nvSpPr>
+            <p:cNvPr name="TextBox 76" id="76"/>
+            <p:cNvSpPr txBox="true"/>
+            <p:nvPr/>
+          </p:nvSpPr>
+          <p:spPr>
+            <a:xfrm>
+              <a:off x="0" y="-57150"/>
+              <a:ext cx="6683981" cy="932722"/>
+            </a:xfrm>
+            <a:prstGeom prst="rect">
+              <a:avLst/>
+            </a:prstGeom>
+          </p:spPr>
+          <p:txBody>
+            <a:bodyPr anchor="t" rtlCol="false" tIns="0" lIns="0" bIns="0" rIns="0"/>
+            <a:lstStyle/>
+            <a:p>
+              <a:pPr algn="l">
+                <a:lnSpc>
+                  <a:spcPts val="2646"/>
+                </a:lnSpc>
+              </a:pPr>
+              <a:r>
+                <a:rPr lang="en-US" sz="1764">
+                  <a:solidFill>
+                    <a:srgbClr val="545454"/>
+                  </a:solidFill>
+                  <a:latin typeface="Lato"/>
+                  <a:ea typeface="Lato"/>
+                  <a:cs typeface="Lato"/>
+                  <a:sym typeface="Lato"/>
+                </a:rPr>
+                <a:t>Reproducible Research with Jupyter Notebooks (1 Hour)</a:t>
+              </a:r>
+            </a:p>
+          </p:txBody>
+        </p:sp>
+      </p:grpSp>
+      <p:grpSp>
+        <p:nvGrpSpPr>
+          <p:cNvPr name="Group 77" id="77"/>
+          <p:cNvGrpSpPr/>
           <p:nvPr/>
-        </p:nvSpPr>
-        <p:spPr>
+        </p:nvGrpSpPr>
+        <p:grpSpPr>
           <a:xfrm rot="0">
             <a:off x="11413520" y="8875579"/>
             <a:ext cx="5012986" cy="323304"/>
+            <a:chOff x="0" y="0"/>
+            <a:chExt cx="6683981" cy="431072"/>
           </a:xfrm>
-          <a:prstGeom prst="rect">
-            <a:avLst/>
-          </a:prstGeom>
-        </p:spPr>
-        <p:txBody>
-          <a:bodyPr anchor="t" rtlCol="false" tIns="0" lIns="0" bIns="0" rIns="0">
-            <a:spAutoFit/>
-          </a:bodyPr>
-          <a:lstStyle/>
-          <a:p>
-            <a:pPr algn="l" marL="0" indent="0" lvl="0">
-              <a:lnSpc>
-                <a:spcPts val="2646"/>
-              </a:lnSpc>
-            </a:pPr>
-            <a:r>
-              <a:rPr lang="en-US" sz="1764">
-                <a:solidFill>
-                  <a:srgbClr val="545454"/>
-                </a:solidFill>
-                <a:latin typeface="Lato"/>
-                <a:ea typeface="Lato"/>
-                <a:cs typeface="Lato"/>
-                <a:sym typeface="Lato"/>
-              </a:rPr>
-              <a:t>Closing and Feedback (1 Hour)</a:t>
-            </a:r>
-          </a:p>
-        </p:txBody>
-      </p:sp>
+        </p:grpSpPr>
+        <p:sp>
+          <p:nvSpPr>
+            <p:cNvPr name="Freeform 78" id="78"/>
+            <p:cNvSpPr/>
+            <p:nvPr/>
+          </p:nvSpPr>
+          <p:spPr>
+            <a:xfrm flipH="false" flipV="false" rot="0">
+              <a:off x="0" y="0"/>
+              <a:ext cx="6683981" cy="431072"/>
+            </a:xfrm>
+            <a:custGeom>
+              <a:avLst/>
+              <a:gdLst/>
+              <a:ahLst/>
+              <a:cxnLst/>
+              <a:rect r="r" b="b" t="t" l="l"/>
+              <a:pathLst>
+                <a:path h="431072" w="6683981">
+                  <a:moveTo>
+                    <a:pt x="0" y="0"/>
+                  </a:moveTo>
+                  <a:lnTo>
+                    <a:pt x="6683981" y="0"/>
+                  </a:lnTo>
+                  <a:lnTo>
+                    <a:pt x="6683981" y="431072"/>
+                  </a:lnTo>
+                  <a:lnTo>
+                    <a:pt x="0" y="431072"/>
+                  </a:lnTo>
+                  <a:close/>
+                </a:path>
+              </a:pathLst>
+            </a:custGeom>
+            <a:solidFill>
+              <a:srgbClr val="000000">
+                <a:alpha val="0"/>
+              </a:srgbClr>
+            </a:solidFill>
+          </p:spPr>
+        </p:sp>
+        <p:sp>
+          <p:nvSpPr>
+            <p:cNvPr name="TextBox 79" id="79"/>
+            <p:cNvSpPr txBox="true"/>
+            <p:nvPr/>
+          </p:nvSpPr>
+          <p:spPr>
+            <a:xfrm>
+              <a:off x="0" y="-57150"/>
+              <a:ext cx="6683981" cy="488222"/>
+            </a:xfrm>
+            <a:prstGeom prst="rect">
+              <a:avLst/>
+            </a:prstGeom>
+          </p:spPr>
+          <p:txBody>
+            <a:bodyPr anchor="t" rtlCol="false" tIns="0" lIns="0" bIns="0" rIns="0"/>
+            <a:lstStyle/>
+            <a:p>
+              <a:pPr algn="l">
+                <a:lnSpc>
+                  <a:spcPts val="2646"/>
+                </a:lnSpc>
+              </a:pPr>
+              <a:r>
+                <a:rPr lang="en-US" sz="1764">
+                  <a:solidFill>
+                    <a:srgbClr val="545454"/>
+                  </a:solidFill>
+                  <a:latin typeface="Lato"/>
+                  <a:ea typeface="Lato"/>
+                  <a:cs typeface="Lato"/>
+                  <a:sym typeface="Lato"/>
+                </a:rPr>
+                <a:t>Closing and Feedback (1 Hour)</a:t>
+              </a:r>
+            </a:p>
+          </p:txBody>
+        </p:sp>
+      </p:grpSp>
       <p:grpSp>
         <p:nvGrpSpPr>
-          <p:cNvPr name="Group 31" id="31"/>
+          <p:cNvPr name="Group 80" id="80"/>
           <p:cNvGrpSpPr/>
           <p:nvPr/>
         </p:nvGrpSpPr>
         <p:grpSpPr>
           <a:xfrm rot="0">
             <a:off x="1028700" y="3870672"/>
-            <a:ext cx="7578725" cy="2123859"/>
+            <a:ext cx="7578725" cy="971550"/>
             <a:chOff x="0" y="0"/>
-            <a:chExt cx="10104967" cy="2831812"/>
+            <a:chExt cx="10104967" cy="1295400"/>
           </a:xfrm>
         </p:grpSpPr>
         <p:sp>
           <p:nvSpPr>
-            <p:cNvPr name="TextBox 32" id="32"/>
-            <p:cNvSpPr txBox="true"/>
-            <p:nvPr/>
-          </p:nvSpPr>
-          <p:spPr>
-            <a:xfrm rot="0">
+            <p:cNvPr name="Freeform 81" id="81"/>
+            <p:cNvSpPr/>
+            <p:nvPr/>
+          </p:nvSpPr>
+          <p:spPr>
+            <a:xfrm flipH="false" flipV="false" rot="0">
               <a:off x="0" y="0"/>
               <a:ext cx="10104967" cy="1295400"/>
             </a:xfrm>
+            <a:custGeom>
+              <a:avLst/>
+              <a:gdLst/>
+              <a:ahLst/>
+              <a:cxnLst/>
+              <a:rect r="r" b="b" t="t" l="l"/>
+              <a:pathLst>
+                <a:path h="1295400" w="10104967">
+                  <a:moveTo>
+                    <a:pt x="0" y="0"/>
+                  </a:moveTo>
+                  <a:lnTo>
+                    <a:pt x="10104967" y="0"/>
+                  </a:lnTo>
+                  <a:lnTo>
+                    <a:pt x="10104967" y="1295400"/>
+                  </a:lnTo>
+                  <a:lnTo>
+                    <a:pt x="0" y="1295400"/>
+                  </a:lnTo>
+                  <a:close/>
+                </a:path>
+              </a:pathLst>
+            </a:custGeom>
+            <a:solidFill>
+              <a:srgbClr val="000000">
+                <a:alpha val="0"/>
+              </a:srgbClr>
+            </a:solidFill>
+          </p:spPr>
+        </p:sp>
+        <p:sp>
+          <p:nvSpPr>
+            <p:cNvPr name="TextBox 82" id="82"/>
+            <p:cNvSpPr txBox="true"/>
+            <p:nvPr/>
+          </p:nvSpPr>
+          <p:spPr>
+            <a:xfrm>
+              <a:off x="0" y="0"/>
+              <a:ext cx="10104967" cy="1295400"/>
+            </a:xfrm>
             <a:prstGeom prst="rect">
               <a:avLst/>
             </a:prstGeom>
           </p:spPr>
           <p:txBody>
-            <a:bodyPr anchor="t" rtlCol="false" tIns="0" lIns="0" bIns="0" rIns="0">
-              <a:spAutoFit/>
-            </a:bodyPr>
+            <a:bodyPr anchor="t" rtlCol="false" tIns="0" lIns="0" bIns="0" rIns="0"/>
             <a:lstStyle/>
             <a:p>
-              <a:pPr algn="l" marL="0" indent="0" lvl="0">
+              <a:pPr algn="l">
                 <a:lnSpc>
-                  <a:spcPts val="7679"/>
+                  <a:spcPts val="7678"/>
                 </a:lnSpc>
               </a:pPr>
               <a:r>
-                <a:rPr lang="en-US" b="true" sz="6399">
+                <a:rPr lang="en-US" sz="6398" b="true">
                   <a:solidFill>
                     <a:srgbClr val="545454"/>
                   </a:solidFill>
@@ -4683,35 +6488,6 @@
                 </a:rPr>
                 <a:t>Session Breakdown</a:t>
               </a:r>
-            </a:p>
-          </p:txBody>
-        </p:sp>
-        <p:sp>
-          <p:nvSpPr>
-            <p:cNvPr name="TextBox 33" id="33"/>
-            <p:cNvSpPr txBox="true"/>
-            <p:nvPr/>
-          </p:nvSpPr>
-          <p:spPr>
-            <a:xfrm rot="0">
-              <a:off x="0" y="1985992"/>
-              <a:ext cx="10104967" cy="845820"/>
-            </a:xfrm>
-            <a:prstGeom prst="rect">
-              <a:avLst/>
-            </a:prstGeom>
-          </p:spPr>
-          <p:txBody>
-            <a:bodyPr anchor="t" rtlCol="false" tIns="0" lIns="0" bIns="0" rIns="0">
-              <a:spAutoFit/>
-            </a:bodyPr>
-            <a:lstStyle/>
-            <a:p>
-              <a:pPr algn="l" marL="0" indent="0" lvl="0">
-                <a:lnSpc>
-                  <a:spcPts val="5400"/>
-                </a:lnSpc>
-              </a:pPr>
             </a:p>
           </p:txBody>
         </p:sp>
@@ -4764,10 +6540,10 @@
                   <a:pt x="0" y="0"/>
                 </a:moveTo>
                 <a:lnTo>
-                  <a:pt x="13313736" y="0"/>
+                  <a:pt x="13313735" y="0"/>
                 </a:lnTo>
                 <a:lnTo>
-                  <a:pt x="13313736" y="5325494"/>
+                  <a:pt x="13313735" y="5325494"/>
                 </a:lnTo>
                 <a:lnTo>
                   <a:pt x="0" y="5325494"/>
@@ -4789,52 +6565,107 @@
               </a:extLst>
             </a:blip>
             <a:stretch>
-              <a:fillRect l="0" t="0" r="0" b="0"/>
+              <a:fillRect l="0" t="-71" r="0" b="-71"/>
             </a:stretch>
           </a:blipFill>
         </p:spPr>
       </p:sp>
-      <p:sp>
-        <p:nvSpPr>
-          <p:cNvPr name="TextBox 3" id="3"/>
-          <p:cNvSpPr txBox="true"/>
+      <p:grpSp>
+        <p:nvGrpSpPr>
+          <p:cNvPr name="Group 3" id="3"/>
+          <p:cNvGrpSpPr/>
           <p:nvPr/>
-        </p:nvSpPr>
-        <p:spPr>
+        </p:nvGrpSpPr>
+        <p:grpSpPr>
           <a:xfrm rot="0">
             <a:off x="1992901" y="3246114"/>
-            <a:ext cx="14302199" cy="3985271"/>
+            <a:ext cx="14302199" cy="4718609"/>
+            <a:chOff x="0" y="0"/>
+            <a:chExt cx="19069599" cy="6291478"/>
           </a:xfrm>
-          <a:prstGeom prst="rect">
-            <a:avLst/>
-          </a:prstGeom>
-        </p:spPr>
-        <p:txBody>
-          <a:bodyPr anchor="t" rtlCol="false" tIns="0" lIns="0" bIns="0" rIns="0">
-            <a:spAutoFit/>
-          </a:bodyPr>
-          <a:lstStyle/>
-          <a:p>
-            <a:pPr algn="ctr" marL="0" indent="0" lvl="0">
-              <a:lnSpc>
-                <a:spcPts val="10275"/>
-              </a:lnSpc>
-            </a:pPr>
-            <a:r>
-              <a:rPr lang="en-US" b="true" sz="10275">
-                <a:solidFill>
-                  <a:srgbClr val="000000"/>
-                </a:solidFill>
-                <a:latin typeface="Lato Bold"/>
-                <a:ea typeface="Lato Bold"/>
-                <a:cs typeface="Lato Bold"/>
-                <a:sym typeface="Lato Bold"/>
-              </a:rPr>
-              <a:t>Introduction to Python and the Research Workflow</a:t>
-            </a:r>
-          </a:p>
-        </p:txBody>
-      </p:sp>
+        </p:grpSpPr>
+        <p:sp>
+          <p:nvSpPr>
+            <p:cNvPr name="Freeform 4" id="4"/>
+            <p:cNvSpPr/>
+            <p:nvPr/>
+          </p:nvSpPr>
+          <p:spPr>
+            <a:xfrm flipH="false" flipV="false" rot="0">
+              <a:off x="0" y="0"/>
+              <a:ext cx="19069599" cy="6291478"/>
+            </a:xfrm>
+            <a:custGeom>
+              <a:avLst/>
+              <a:gdLst/>
+              <a:ahLst/>
+              <a:cxnLst/>
+              <a:rect r="r" b="b" t="t" l="l"/>
+              <a:pathLst>
+                <a:path h="6291478" w="19069599">
+                  <a:moveTo>
+                    <a:pt x="0" y="0"/>
+                  </a:moveTo>
+                  <a:lnTo>
+                    <a:pt x="19069599" y="0"/>
+                  </a:lnTo>
+                  <a:lnTo>
+                    <a:pt x="19069599" y="6291478"/>
+                  </a:lnTo>
+                  <a:lnTo>
+                    <a:pt x="0" y="6291478"/>
+                  </a:lnTo>
+                  <a:close/>
+                </a:path>
+              </a:pathLst>
+            </a:custGeom>
+            <a:solidFill>
+              <a:srgbClr val="000000">
+                <a:alpha val="0"/>
+              </a:srgbClr>
+            </a:solidFill>
+          </p:spPr>
+        </p:sp>
+        <p:sp>
+          <p:nvSpPr>
+            <p:cNvPr name="TextBox 5" id="5"/>
+            <p:cNvSpPr txBox="true"/>
+            <p:nvPr/>
+          </p:nvSpPr>
+          <p:spPr>
+            <a:xfrm>
+              <a:off x="0" y="190500"/>
+              <a:ext cx="19069599" cy="6100978"/>
+            </a:xfrm>
+            <a:prstGeom prst="rect">
+              <a:avLst/>
+            </a:prstGeom>
+          </p:spPr>
+          <p:txBody>
+            <a:bodyPr anchor="t" rtlCol="false" tIns="0" lIns="0" bIns="0" rIns="0"/>
+            <a:lstStyle/>
+            <a:p>
+              <a:pPr algn="ctr">
+                <a:lnSpc>
+                  <a:spcPts val="10275"/>
+                </a:lnSpc>
+              </a:pPr>
+              <a:r>
+                <a:rPr lang="en-US" sz="10275" b="true">
+                  <a:solidFill>
+                    <a:srgbClr val="000000"/>
+                  </a:solidFill>
+                  <a:latin typeface="Lato Bold"/>
+                  <a:ea typeface="Lato Bold"/>
+                  <a:cs typeface="Lato Bold"/>
+                  <a:sym typeface="Lato Bold"/>
+                </a:rPr>
+                <a:t>Introduction to Python and the Research Workflow</a:t>
+              </a:r>
+            </a:p>
+          </p:txBody>
+        </p:sp>
+      </p:grpSp>
     </p:spTree>
   </p:cSld>
   <p:clrMapOvr>
@@ -4860,539 +6691,1254 @@
           <a:chExt cx="0" cy="0"/>
         </a:xfrm>
       </p:grpSpPr>
-      <p:sp>
-        <p:nvSpPr>
-          <p:cNvPr name="TextBox 2" id="2"/>
-          <p:cNvSpPr txBox="true"/>
+      <p:grpSp>
+        <p:nvGrpSpPr>
+          <p:cNvPr name="Group 2" id="2"/>
+          <p:cNvGrpSpPr/>
           <p:nvPr/>
-        </p:nvSpPr>
-        <p:spPr>
+        </p:nvGrpSpPr>
+        <p:grpSpPr>
           <a:xfrm rot="0">
             <a:off x="6866871" y="554717"/>
             <a:ext cx="1458577" cy="1152525"/>
+            <a:chOff x="0" y="0"/>
+            <a:chExt cx="1944769" cy="1536700"/>
           </a:xfrm>
-          <a:prstGeom prst="rect">
-            <a:avLst/>
-          </a:prstGeom>
-        </p:spPr>
-        <p:txBody>
-          <a:bodyPr anchor="t" rtlCol="false" tIns="0" lIns="0" bIns="0" rIns="0">
-            <a:spAutoFit/>
-          </a:bodyPr>
-          <a:lstStyle/>
-          <a:p>
-            <a:pPr algn="l">
-              <a:lnSpc>
-                <a:spcPts val="9000"/>
-              </a:lnSpc>
-            </a:pPr>
-            <a:r>
-              <a:rPr lang="en-US" sz="7500">
-                <a:solidFill>
-                  <a:srgbClr val="000000"/>
-                </a:solidFill>
-                <a:latin typeface="Lato"/>
-                <a:ea typeface="Lato"/>
-                <a:cs typeface="Lato"/>
-                <a:sym typeface="Lato"/>
-              </a:rPr>
-              <a:t>01</a:t>
-            </a:r>
-          </a:p>
-        </p:txBody>
-      </p:sp>
-      <p:sp>
-        <p:nvSpPr>
-          <p:cNvPr name="TextBox 3" id="3"/>
-          <p:cNvSpPr txBox="true"/>
+        </p:grpSpPr>
+        <p:sp>
+          <p:nvSpPr>
+            <p:cNvPr name="Freeform 3" id="3"/>
+            <p:cNvSpPr/>
+            <p:nvPr/>
+          </p:nvSpPr>
+          <p:spPr>
+            <a:xfrm flipH="false" flipV="false" rot="0">
+              <a:off x="0" y="0"/>
+              <a:ext cx="1944769" cy="1536700"/>
+            </a:xfrm>
+            <a:custGeom>
+              <a:avLst/>
+              <a:gdLst/>
+              <a:ahLst/>
+              <a:cxnLst/>
+              <a:rect r="r" b="b" t="t" l="l"/>
+              <a:pathLst>
+                <a:path h="1536700" w="1944769">
+                  <a:moveTo>
+                    <a:pt x="0" y="0"/>
+                  </a:moveTo>
+                  <a:lnTo>
+                    <a:pt x="1944769" y="0"/>
+                  </a:lnTo>
+                  <a:lnTo>
+                    <a:pt x="1944769" y="1536700"/>
+                  </a:lnTo>
+                  <a:lnTo>
+                    <a:pt x="0" y="1536700"/>
+                  </a:lnTo>
+                  <a:close/>
+                </a:path>
+              </a:pathLst>
+            </a:custGeom>
+            <a:solidFill>
+              <a:srgbClr val="000000">
+                <a:alpha val="0"/>
+              </a:srgbClr>
+            </a:solidFill>
+          </p:spPr>
+        </p:sp>
+        <p:sp>
+          <p:nvSpPr>
+            <p:cNvPr name="TextBox 4" id="4"/>
+            <p:cNvSpPr txBox="true"/>
+            <p:nvPr/>
+          </p:nvSpPr>
+          <p:spPr>
+            <a:xfrm>
+              <a:off x="0" y="-9525"/>
+              <a:ext cx="1944769" cy="1546225"/>
+            </a:xfrm>
+            <a:prstGeom prst="rect">
+              <a:avLst/>
+            </a:prstGeom>
+          </p:spPr>
+          <p:txBody>
+            <a:bodyPr anchor="t" rtlCol="false" tIns="0" lIns="0" bIns="0" rIns="0"/>
+            <a:lstStyle/>
+            <a:p>
+              <a:pPr algn="l">
+                <a:lnSpc>
+                  <a:spcPts val="9000"/>
+                </a:lnSpc>
+              </a:pPr>
+              <a:r>
+                <a:rPr lang="en-US" sz="7500">
+                  <a:solidFill>
+                    <a:srgbClr val="000000"/>
+                  </a:solidFill>
+                  <a:latin typeface="Lato"/>
+                  <a:ea typeface="Lato"/>
+                  <a:cs typeface="Lato"/>
+                  <a:sym typeface="Lato"/>
+                </a:rPr>
+                <a:t>01</a:t>
+              </a:r>
+            </a:p>
+          </p:txBody>
+        </p:sp>
+      </p:grpSp>
+      <p:grpSp>
+        <p:nvGrpSpPr>
+          <p:cNvPr name="Group 5" id="5"/>
+          <p:cNvGrpSpPr/>
           <p:nvPr/>
-        </p:nvSpPr>
-        <p:spPr>
+        </p:nvGrpSpPr>
+        <p:grpSpPr>
           <a:xfrm rot="0">
             <a:off x="6866871" y="2070644"/>
             <a:ext cx="1458577" cy="1152525"/>
+            <a:chOff x="0" y="0"/>
+            <a:chExt cx="1944769" cy="1536700"/>
           </a:xfrm>
-          <a:prstGeom prst="rect">
-            <a:avLst/>
-          </a:prstGeom>
-        </p:spPr>
-        <p:txBody>
-          <a:bodyPr anchor="t" rtlCol="false" tIns="0" lIns="0" bIns="0" rIns="0">
-            <a:spAutoFit/>
-          </a:bodyPr>
-          <a:lstStyle/>
-          <a:p>
-            <a:pPr algn="l">
-              <a:lnSpc>
-                <a:spcPts val="9000"/>
-              </a:lnSpc>
-            </a:pPr>
-            <a:r>
-              <a:rPr lang="en-US" sz="7500">
-                <a:solidFill>
-                  <a:srgbClr val="000000"/>
-                </a:solidFill>
-                <a:latin typeface="Lato"/>
-                <a:ea typeface="Lato"/>
-                <a:cs typeface="Lato"/>
-                <a:sym typeface="Lato"/>
-              </a:rPr>
-              <a:t>02</a:t>
-            </a:r>
-          </a:p>
-        </p:txBody>
-      </p:sp>
-      <p:sp>
-        <p:nvSpPr>
-          <p:cNvPr name="TextBox 4" id="4"/>
-          <p:cNvSpPr txBox="true"/>
+        </p:grpSpPr>
+        <p:sp>
+          <p:nvSpPr>
+            <p:cNvPr name="Freeform 6" id="6"/>
+            <p:cNvSpPr/>
+            <p:nvPr/>
+          </p:nvSpPr>
+          <p:spPr>
+            <a:xfrm flipH="false" flipV="false" rot="0">
+              <a:off x="0" y="0"/>
+              <a:ext cx="1944769" cy="1536700"/>
+            </a:xfrm>
+            <a:custGeom>
+              <a:avLst/>
+              <a:gdLst/>
+              <a:ahLst/>
+              <a:cxnLst/>
+              <a:rect r="r" b="b" t="t" l="l"/>
+              <a:pathLst>
+                <a:path h="1536700" w="1944769">
+                  <a:moveTo>
+                    <a:pt x="0" y="0"/>
+                  </a:moveTo>
+                  <a:lnTo>
+                    <a:pt x="1944769" y="0"/>
+                  </a:lnTo>
+                  <a:lnTo>
+                    <a:pt x="1944769" y="1536700"/>
+                  </a:lnTo>
+                  <a:lnTo>
+                    <a:pt x="0" y="1536700"/>
+                  </a:lnTo>
+                  <a:close/>
+                </a:path>
+              </a:pathLst>
+            </a:custGeom>
+            <a:solidFill>
+              <a:srgbClr val="000000">
+                <a:alpha val="0"/>
+              </a:srgbClr>
+            </a:solidFill>
+          </p:spPr>
+        </p:sp>
+        <p:sp>
+          <p:nvSpPr>
+            <p:cNvPr name="TextBox 7" id="7"/>
+            <p:cNvSpPr txBox="true"/>
+            <p:nvPr/>
+          </p:nvSpPr>
+          <p:spPr>
+            <a:xfrm>
+              <a:off x="0" y="-9525"/>
+              <a:ext cx="1944769" cy="1546225"/>
+            </a:xfrm>
+            <a:prstGeom prst="rect">
+              <a:avLst/>
+            </a:prstGeom>
+          </p:spPr>
+          <p:txBody>
+            <a:bodyPr anchor="t" rtlCol="false" tIns="0" lIns="0" bIns="0" rIns="0"/>
+            <a:lstStyle/>
+            <a:p>
+              <a:pPr algn="l">
+                <a:lnSpc>
+                  <a:spcPts val="9000"/>
+                </a:lnSpc>
+              </a:pPr>
+              <a:r>
+                <a:rPr lang="en-US" sz="7500">
+                  <a:solidFill>
+                    <a:srgbClr val="000000"/>
+                  </a:solidFill>
+                  <a:latin typeface="Lato"/>
+                  <a:ea typeface="Lato"/>
+                  <a:cs typeface="Lato"/>
+                  <a:sym typeface="Lato"/>
+                </a:rPr>
+                <a:t>02</a:t>
+              </a:r>
+            </a:p>
+          </p:txBody>
+        </p:sp>
+      </p:grpSp>
+      <p:grpSp>
+        <p:nvGrpSpPr>
+          <p:cNvPr name="Group 8" id="8"/>
+          <p:cNvGrpSpPr/>
           <p:nvPr/>
-        </p:nvSpPr>
-        <p:spPr>
+        </p:nvGrpSpPr>
+        <p:grpSpPr>
           <a:xfrm rot="0">
             <a:off x="6866871" y="3586570"/>
             <a:ext cx="1458577" cy="1152525"/>
+            <a:chOff x="0" y="0"/>
+            <a:chExt cx="1944769" cy="1536700"/>
           </a:xfrm>
-          <a:prstGeom prst="rect">
-            <a:avLst/>
-          </a:prstGeom>
-        </p:spPr>
-        <p:txBody>
-          <a:bodyPr anchor="t" rtlCol="false" tIns="0" lIns="0" bIns="0" rIns="0">
-            <a:spAutoFit/>
-          </a:bodyPr>
-          <a:lstStyle/>
-          <a:p>
-            <a:pPr algn="l">
-              <a:lnSpc>
-                <a:spcPts val="9000"/>
-              </a:lnSpc>
-            </a:pPr>
-            <a:r>
-              <a:rPr lang="en-US" sz="7500">
-                <a:solidFill>
-                  <a:srgbClr val="000000"/>
-                </a:solidFill>
-                <a:latin typeface="Lato"/>
-                <a:ea typeface="Lato"/>
-                <a:cs typeface="Lato"/>
-                <a:sym typeface="Lato"/>
-              </a:rPr>
-              <a:t>03</a:t>
-            </a:r>
-          </a:p>
-        </p:txBody>
-      </p:sp>
-      <p:sp>
-        <p:nvSpPr>
-          <p:cNvPr name="TextBox 5" id="5"/>
-          <p:cNvSpPr txBox="true"/>
+        </p:grpSpPr>
+        <p:sp>
+          <p:nvSpPr>
+            <p:cNvPr name="Freeform 9" id="9"/>
+            <p:cNvSpPr/>
+            <p:nvPr/>
+          </p:nvSpPr>
+          <p:spPr>
+            <a:xfrm flipH="false" flipV="false" rot="0">
+              <a:off x="0" y="0"/>
+              <a:ext cx="1944769" cy="1536700"/>
+            </a:xfrm>
+            <a:custGeom>
+              <a:avLst/>
+              <a:gdLst/>
+              <a:ahLst/>
+              <a:cxnLst/>
+              <a:rect r="r" b="b" t="t" l="l"/>
+              <a:pathLst>
+                <a:path h="1536700" w="1944769">
+                  <a:moveTo>
+                    <a:pt x="0" y="0"/>
+                  </a:moveTo>
+                  <a:lnTo>
+                    <a:pt x="1944769" y="0"/>
+                  </a:lnTo>
+                  <a:lnTo>
+                    <a:pt x="1944769" y="1536700"/>
+                  </a:lnTo>
+                  <a:lnTo>
+                    <a:pt x="0" y="1536700"/>
+                  </a:lnTo>
+                  <a:close/>
+                </a:path>
+              </a:pathLst>
+            </a:custGeom>
+            <a:solidFill>
+              <a:srgbClr val="000000">
+                <a:alpha val="0"/>
+              </a:srgbClr>
+            </a:solidFill>
+          </p:spPr>
+        </p:sp>
+        <p:sp>
+          <p:nvSpPr>
+            <p:cNvPr name="TextBox 10" id="10"/>
+            <p:cNvSpPr txBox="true"/>
+            <p:nvPr/>
+          </p:nvSpPr>
+          <p:spPr>
+            <a:xfrm>
+              <a:off x="0" y="-9525"/>
+              <a:ext cx="1944769" cy="1546225"/>
+            </a:xfrm>
+            <a:prstGeom prst="rect">
+              <a:avLst/>
+            </a:prstGeom>
+          </p:spPr>
+          <p:txBody>
+            <a:bodyPr anchor="t" rtlCol="false" tIns="0" lIns="0" bIns="0" rIns="0"/>
+            <a:lstStyle/>
+            <a:p>
+              <a:pPr algn="l">
+                <a:lnSpc>
+                  <a:spcPts val="9000"/>
+                </a:lnSpc>
+              </a:pPr>
+              <a:r>
+                <a:rPr lang="en-US" sz="7500">
+                  <a:solidFill>
+                    <a:srgbClr val="000000"/>
+                  </a:solidFill>
+                  <a:latin typeface="Lato"/>
+                  <a:ea typeface="Lato"/>
+                  <a:cs typeface="Lato"/>
+                  <a:sym typeface="Lato"/>
+                </a:rPr>
+                <a:t>03</a:t>
+              </a:r>
+            </a:p>
+          </p:txBody>
+        </p:sp>
+      </p:grpSp>
+      <p:grpSp>
+        <p:nvGrpSpPr>
+          <p:cNvPr name="Group 11" id="11"/>
+          <p:cNvGrpSpPr/>
           <p:nvPr/>
-        </p:nvSpPr>
-        <p:spPr>
+        </p:nvGrpSpPr>
+        <p:grpSpPr>
           <a:xfrm rot="0">
             <a:off x="6866871" y="5102497"/>
             <a:ext cx="1458577" cy="1152525"/>
+            <a:chOff x="0" y="0"/>
+            <a:chExt cx="1944769" cy="1536700"/>
           </a:xfrm>
-          <a:prstGeom prst="rect">
-            <a:avLst/>
-          </a:prstGeom>
-        </p:spPr>
-        <p:txBody>
-          <a:bodyPr anchor="t" rtlCol="false" tIns="0" lIns="0" bIns="0" rIns="0">
-            <a:spAutoFit/>
-          </a:bodyPr>
-          <a:lstStyle/>
-          <a:p>
-            <a:pPr algn="l">
-              <a:lnSpc>
-                <a:spcPts val="9000"/>
-              </a:lnSpc>
-            </a:pPr>
-            <a:r>
-              <a:rPr lang="en-US" sz="7500">
-                <a:solidFill>
-                  <a:srgbClr val="000000"/>
-                </a:solidFill>
-                <a:latin typeface="Lato"/>
-                <a:ea typeface="Lato"/>
-                <a:cs typeface="Lato"/>
-                <a:sym typeface="Lato"/>
-              </a:rPr>
-              <a:t>04</a:t>
-            </a:r>
-          </a:p>
-        </p:txBody>
-      </p:sp>
-      <p:sp>
-        <p:nvSpPr>
-          <p:cNvPr name="TextBox 6" id="6"/>
-          <p:cNvSpPr txBox="true"/>
+        </p:grpSpPr>
+        <p:sp>
+          <p:nvSpPr>
+            <p:cNvPr name="Freeform 12" id="12"/>
+            <p:cNvSpPr/>
+            <p:nvPr/>
+          </p:nvSpPr>
+          <p:spPr>
+            <a:xfrm flipH="false" flipV="false" rot="0">
+              <a:off x="0" y="0"/>
+              <a:ext cx="1944769" cy="1536700"/>
+            </a:xfrm>
+            <a:custGeom>
+              <a:avLst/>
+              <a:gdLst/>
+              <a:ahLst/>
+              <a:cxnLst/>
+              <a:rect r="r" b="b" t="t" l="l"/>
+              <a:pathLst>
+                <a:path h="1536700" w="1944769">
+                  <a:moveTo>
+                    <a:pt x="0" y="0"/>
+                  </a:moveTo>
+                  <a:lnTo>
+                    <a:pt x="1944769" y="0"/>
+                  </a:lnTo>
+                  <a:lnTo>
+                    <a:pt x="1944769" y="1536700"/>
+                  </a:lnTo>
+                  <a:lnTo>
+                    <a:pt x="0" y="1536700"/>
+                  </a:lnTo>
+                  <a:close/>
+                </a:path>
+              </a:pathLst>
+            </a:custGeom>
+            <a:solidFill>
+              <a:srgbClr val="000000">
+                <a:alpha val="0"/>
+              </a:srgbClr>
+            </a:solidFill>
+          </p:spPr>
+        </p:sp>
+        <p:sp>
+          <p:nvSpPr>
+            <p:cNvPr name="TextBox 13" id="13"/>
+            <p:cNvSpPr txBox="true"/>
+            <p:nvPr/>
+          </p:nvSpPr>
+          <p:spPr>
+            <a:xfrm>
+              <a:off x="0" y="-9525"/>
+              <a:ext cx="1944769" cy="1546225"/>
+            </a:xfrm>
+            <a:prstGeom prst="rect">
+              <a:avLst/>
+            </a:prstGeom>
+          </p:spPr>
+          <p:txBody>
+            <a:bodyPr anchor="t" rtlCol="false" tIns="0" lIns="0" bIns="0" rIns="0"/>
+            <a:lstStyle/>
+            <a:p>
+              <a:pPr algn="l">
+                <a:lnSpc>
+                  <a:spcPts val="9000"/>
+                </a:lnSpc>
+              </a:pPr>
+              <a:r>
+                <a:rPr lang="en-US" sz="7500">
+                  <a:solidFill>
+                    <a:srgbClr val="000000"/>
+                  </a:solidFill>
+                  <a:latin typeface="Lato"/>
+                  <a:ea typeface="Lato"/>
+                  <a:cs typeface="Lato"/>
+                  <a:sym typeface="Lato"/>
+                </a:rPr>
+                <a:t>04</a:t>
+              </a:r>
+            </a:p>
+          </p:txBody>
+        </p:sp>
+      </p:grpSp>
+      <p:grpSp>
+        <p:nvGrpSpPr>
+          <p:cNvPr name="Group 14" id="14"/>
+          <p:cNvGrpSpPr/>
           <p:nvPr/>
-        </p:nvSpPr>
-        <p:spPr>
+        </p:nvGrpSpPr>
+        <p:grpSpPr>
           <a:xfrm rot="0">
             <a:off x="6866871" y="6618423"/>
             <a:ext cx="1458577" cy="1152525"/>
+            <a:chOff x="0" y="0"/>
+            <a:chExt cx="1944769" cy="1536700"/>
           </a:xfrm>
-          <a:prstGeom prst="rect">
-            <a:avLst/>
-          </a:prstGeom>
-        </p:spPr>
-        <p:txBody>
-          <a:bodyPr anchor="t" rtlCol="false" tIns="0" lIns="0" bIns="0" rIns="0">
-            <a:spAutoFit/>
-          </a:bodyPr>
-          <a:lstStyle/>
-          <a:p>
-            <a:pPr algn="l">
-              <a:lnSpc>
-                <a:spcPts val="9000"/>
-              </a:lnSpc>
-            </a:pPr>
-            <a:r>
-              <a:rPr lang="en-US" sz="7500">
-                <a:solidFill>
-                  <a:srgbClr val="000000"/>
-                </a:solidFill>
-                <a:latin typeface="Lato"/>
-                <a:ea typeface="Lato"/>
-                <a:cs typeface="Lato"/>
-                <a:sym typeface="Lato"/>
-              </a:rPr>
-              <a:t>05</a:t>
-            </a:r>
-          </a:p>
-        </p:txBody>
-      </p:sp>
-      <p:sp>
-        <p:nvSpPr>
-          <p:cNvPr name="TextBox 7" id="7"/>
-          <p:cNvSpPr txBox="true"/>
+        </p:grpSpPr>
+        <p:sp>
+          <p:nvSpPr>
+            <p:cNvPr name="Freeform 15" id="15"/>
+            <p:cNvSpPr/>
+            <p:nvPr/>
+          </p:nvSpPr>
+          <p:spPr>
+            <a:xfrm flipH="false" flipV="false" rot="0">
+              <a:off x="0" y="0"/>
+              <a:ext cx="1944769" cy="1536700"/>
+            </a:xfrm>
+            <a:custGeom>
+              <a:avLst/>
+              <a:gdLst/>
+              <a:ahLst/>
+              <a:cxnLst/>
+              <a:rect r="r" b="b" t="t" l="l"/>
+              <a:pathLst>
+                <a:path h="1536700" w="1944769">
+                  <a:moveTo>
+                    <a:pt x="0" y="0"/>
+                  </a:moveTo>
+                  <a:lnTo>
+                    <a:pt x="1944769" y="0"/>
+                  </a:lnTo>
+                  <a:lnTo>
+                    <a:pt x="1944769" y="1536700"/>
+                  </a:lnTo>
+                  <a:lnTo>
+                    <a:pt x="0" y="1536700"/>
+                  </a:lnTo>
+                  <a:close/>
+                </a:path>
+              </a:pathLst>
+            </a:custGeom>
+            <a:solidFill>
+              <a:srgbClr val="000000">
+                <a:alpha val="0"/>
+              </a:srgbClr>
+            </a:solidFill>
+          </p:spPr>
+        </p:sp>
+        <p:sp>
+          <p:nvSpPr>
+            <p:cNvPr name="TextBox 16" id="16"/>
+            <p:cNvSpPr txBox="true"/>
+            <p:nvPr/>
+          </p:nvSpPr>
+          <p:spPr>
+            <a:xfrm>
+              <a:off x="0" y="-9525"/>
+              <a:ext cx="1944769" cy="1546225"/>
+            </a:xfrm>
+            <a:prstGeom prst="rect">
+              <a:avLst/>
+            </a:prstGeom>
+          </p:spPr>
+          <p:txBody>
+            <a:bodyPr anchor="t" rtlCol="false" tIns="0" lIns="0" bIns="0" rIns="0"/>
+            <a:lstStyle/>
+            <a:p>
+              <a:pPr algn="l">
+                <a:lnSpc>
+                  <a:spcPts val="9000"/>
+                </a:lnSpc>
+              </a:pPr>
+              <a:r>
+                <a:rPr lang="en-US" sz="7500">
+                  <a:solidFill>
+                    <a:srgbClr val="000000"/>
+                  </a:solidFill>
+                  <a:latin typeface="Lato"/>
+                  <a:ea typeface="Lato"/>
+                  <a:cs typeface="Lato"/>
+                  <a:sym typeface="Lato"/>
+                </a:rPr>
+                <a:t>05</a:t>
+              </a:r>
+            </a:p>
+          </p:txBody>
+        </p:sp>
+      </p:grpSp>
+      <p:grpSp>
+        <p:nvGrpSpPr>
+          <p:cNvPr name="Group 17" id="17"/>
+          <p:cNvGrpSpPr/>
           <p:nvPr/>
-        </p:nvSpPr>
-        <p:spPr>
+        </p:nvGrpSpPr>
+        <p:grpSpPr>
           <a:xfrm rot="0">
             <a:off x="6866871" y="8134350"/>
             <a:ext cx="1458577" cy="1152525"/>
+            <a:chOff x="0" y="0"/>
+            <a:chExt cx="1944769" cy="1536700"/>
           </a:xfrm>
-          <a:prstGeom prst="rect">
-            <a:avLst/>
-          </a:prstGeom>
-        </p:spPr>
-        <p:txBody>
-          <a:bodyPr anchor="t" rtlCol="false" tIns="0" lIns="0" bIns="0" rIns="0">
-            <a:spAutoFit/>
-          </a:bodyPr>
-          <a:lstStyle/>
-          <a:p>
-            <a:pPr algn="l">
-              <a:lnSpc>
-                <a:spcPts val="9000"/>
-              </a:lnSpc>
-            </a:pPr>
-            <a:r>
-              <a:rPr lang="en-US" sz="7500">
-                <a:solidFill>
-                  <a:srgbClr val="000000"/>
-                </a:solidFill>
-                <a:latin typeface="Lato"/>
-                <a:ea typeface="Lato"/>
-                <a:cs typeface="Lato"/>
-                <a:sym typeface="Lato"/>
-              </a:rPr>
-              <a:t>06</a:t>
-            </a:r>
-          </a:p>
-        </p:txBody>
-      </p:sp>
-      <p:sp>
-        <p:nvSpPr>
-          <p:cNvPr name="TextBox 8" id="8"/>
-          <p:cNvSpPr txBox="true"/>
+        </p:grpSpPr>
+        <p:sp>
+          <p:nvSpPr>
+            <p:cNvPr name="Freeform 18" id="18"/>
+            <p:cNvSpPr/>
+            <p:nvPr/>
+          </p:nvSpPr>
+          <p:spPr>
+            <a:xfrm flipH="false" flipV="false" rot="0">
+              <a:off x="0" y="0"/>
+              <a:ext cx="1944769" cy="1536700"/>
+            </a:xfrm>
+            <a:custGeom>
+              <a:avLst/>
+              <a:gdLst/>
+              <a:ahLst/>
+              <a:cxnLst/>
+              <a:rect r="r" b="b" t="t" l="l"/>
+              <a:pathLst>
+                <a:path h="1536700" w="1944769">
+                  <a:moveTo>
+                    <a:pt x="0" y="0"/>
+                  </a:moveTo>
+                  <a:lnTo>
+                    <a:pt x="1944769" y="0"/>
+                  </a:lnTo>
+                  <a:lnTo>
+                    <a:pt x="1944769" y="1536700"/>
+                  </a:lnTo>
+                  <a:lnTo>
+                    <a:pt x="0" y="1536700"/>
+                  </a:lnTo>
+                  <a:close/>
+                </a:path>
+              </a:pathLst>
+            </a:custGeom>
+            <a:solidFill>
+              <a:srgbClr val="000000">
+                <a:alpha val="0"/>
+              </a:srgbClr>
+            </a:solidFill>
+          </p:spPr>
+        </p:sp>
+        <p:sp>
+          <p:nvSpPr>
+            <p:cNvPr name="TextBox 19" id="19"/>
+            <p:cNvSpPr txBox="true"/>
+            <p:nvPr/>
+          </p:nvSpPr>
+          <p:spPr>
+            <a:xfrm>
+              <a:off x="0" y="-9525"/>
+              <a:ext cx="1944769" cy="1546225"/>
+            </a:xfrm>
+            <a:prstGeom prst="rect">
+              <a:avLst/>
+            </a:prstGeom>
+          </p:spPr>
+          <p:txBody>
+            <a:bodyPr anchor="t" rtlCol="false" tIns="0" lIns="0" bIns="0" rIns="0"/>
+            <a:lstStyle/>
+            <a:p>
+              <a:pPr algn="l">
+                <a:lnSpc>
+                  <a:spcPts val="9000"/>
+                </a:lnSpc>
+              </a:pPr>
+              <a:r>
+                <a:rPr lang="en-US" sz="7500">
+                  <a:solidFill>
+                    <a:srgbClr val="000000"/>
+                  </a:solidFill>
+                  <a:latin typeface="Lato"/>
+                  <a:ea typeface="Lato"/>
+                  <a:cs typeface="Lato"/>
+                  <a:sym typeface="Lato"/>
+                </a:rPr>
+                <a:t>06</a:t>
+              </a:r>
+            </a:p>
+          </p:txBody>
+        </p:sp>
+      </p:grpSp>
+      <p:grpSp>
+        <p:nvGrpSpPr>
+          <p:cNvPr name="Group 20" id="20"/>
+          <p:cNvGrpSpPr/>
           <p:nvPr/>
-        </p:nvSpPr>
-        <p:spPr>
+        </p:nvGrpSpPr>
+        <p:grpSpPr>
           <a:xfrm rot="0">
             <a:off x="8639693" y="5334170"/>
             <a:ext cx="7675407" cy="687705"/>
+            <a:chOff x="0" y="0"/>
+            <a:chExt cx="10233876" cy="916940"/>
           </a:xfrm>
-          <a:prstGeom prst="rect">
-            <a:avLst/>
-          </a:prstGeom>
-        </p:spPr>
-        <p:txBody>
-          <a:bodyPr anchor="t" rtlCol="false" tIns="0" lIns="0" bIns="0" rIns="0">
-            <a:spAutoFit/>
-          </a:bodyPr>
-          <a:lstStyle/>
-          <a:p>
-            <a:pPr algn="l" marL="0" indent="0" lvl="0">
-              <a:lnSpc>
-                <a:spcPts val="2730"/>
-              </a:lnSpc>
-            </a:pPr>
-            <a:r>
-              <a:rPr lang="en-US" sz="2100">
-                <a:solidFill>
-                  <a:srgbClr val="000000"/>
-                </a:solidFill>
-                <a:latin typeface="Lato"/>
-                <a:ea typeface="Lato"/>
-                <a:cs typeface="Lato"/>
-                <a:sym typeface="Lato"/>
-              </a:rPr>
-              <a:t>✔ Automation &amp; Efficiency – Handles large datasets, speeds up research workflows.</a:t>
-            </a:r>
-          </a:p>
-        </p:txBody>
-      </p:sp>
-      <p:sp>
-        <p:nvSpPr>
-          <p:cNvPr name="TextBox 9" id="9"/>
-          <p:cNvSpPr txBox="true"/>
+        </p:grpSpPr>
+        <p:sp>
+          <p:nvSpPr>
+            <p:cNvPr name="Freeform 21" id="21"/>
+            <p:cNvSpPr/>
+            <p:nvPr/>
+          </p:nvSpPr>
+          <p:spPr>
+            <a:xfrm flipH="false" flipV="false" rot="0">
+              <a:off x="0" y="0"/>
+              <a:ext cx="10233876" cy="916940"/>
+            </a:xfrm>
+            <a:custGeom>
+              <a:avLst/>
+              <a:gdLst/>
+              <a:ahLst/>
+              <a:cxnLst/>
+              <a:rect r="r" b="b" t="t" l="l"/>
+              <a:pathLst>
+                <a:path h="916940" w="10233876">
+                  <a:moveTo>
+                    <a:pt x="0" y="0"/>
+                  </a:moveTo>
+                  <a:lnTo>
+                    <a:pt x="10233876" y="0"/>
+                  </a:lnTo>
+                  <a:lnTo>
+                    <a:pt x="10233876" y="916940"/>
+                  </a:lnTo>
+                  <a:lnTo>
+                    <a:pt x="0" y="916940"/>
+                  </a:lnTo>
+                  <a:close/>
+                </a:path>
+              </a:pathLst>
+            </a:custGeom>
+            <a:solidFill>
+              <a:srgbClr val="000000">
+                <a:alpha val="0"/>
+              </a:srgbClr>
+            </a:solidFill>
+          </p:spPr>
+        </p:sp>
+        <p:sp>
+          <p:nvSpPr>
+            <p:cNvPr name="TextBox 22" id="22"/>
+            <p:cNvSpPr txBox="true"/>
+            <p:nvPr/>
+          </p:nvSpPr>
+          <p:spPr>
+            <a:xfrm>
+              <a:off x="0" y="-28575"/>
+              <a:ext cx="10233876" cy="945515"/>
+            </a:xfrm>
+            <a:prstGeom prst="rect">
+              <a:avLst/>
+            </a:prstGeom>
+          </p:spPr>
+          <p:txBody>
+            <a:bodyPr anchor="t" rtlCol="false" tIns="0" lIns="0" bIns="0" rIns="0"/>
+            <a:lstStyle/>
+            <a:p>
+              <a:pPr algn="l">
+                <a:lnSpc>
+                  <a:spcPts val="2730"/>
+                </a:lnSpc>
+              </a:pPr>
+              <a:r>
+                <a:rPr lang="en-US" sz="2100">
+                  <a:solidFill>
+                    <a:srgbClr val="000000"/>
+                  </a:solidFill>
+                  <a:latin typeface="Lato"/>
+                  <a:ea typeface="Lato"/>
+                  <a:cs typeface="Lato"/>
+                  <a:sym typeface="Lato"/>
+                </a:rPr>
+                <a:t>✔ Automation &amp; Efficiency – Handles large datasets, speeds up research workflows.</a:t>
+              </a:r>
+            </a:p>
+          </p:txBody>
+        </p:sp>
+      </p:grpSp>
+      <p:grpSp>
+        <p:nvGrpSpPr>
+          <p:cNvPr name="Group 23" id="23"/>
+          <p:cNvGrpSpPr/>
           <p:nvPr/>
-        </p:nvSpPr>
-        <p:spPr>
+        </p:nvGrpSpPr>
+        <p:grpSpPr>
           <a:xfrm rot="0">
             <a:off x="8639693" y="729025"/>
             <a:ext cx="8239451" cy="687705"/>
+            <a:chOff x="0" y="0"/>
+            <a:chExt cx="10985935" cy="916940"/>
           </a:xfrm>
-          <a:prstGeom prst="rect">
-            <a:avLst/>
-          </a:prstGeom>
-        </p:spPr>
-        <p:txBody>
-          <a:bodyPr anchor="t" rtlCol="false" tIns="0" lIns="0" bIns="0" rIns="0">
-            <a:spAutoFit/>
-          </a:bodyPr>
-          <a:lstStyle/>
-          <a:p>
-            <a:pPr algn="l" marL="0" indent="0" lvl="0">
-              <a:lnSpc>
-                <a:spcPts val="2730"/>
-              </a:lnSpc>
-            </a:pPr>
-            <a:r>
-              <a:rPr lang="en-US" sz="2100">
-                <a:solidFill>
-                  <a:srgbClr val="000000"/>
-                </a:solidFill>
-                <a:latin typeface="Lato"/>
-                <a:ea typeface="Lato"/>
-                <a:cs typeface="Lato"/>
-                <a:sym typeface="Lato"/>
-              </a:rPr>
-              <a:t>✔ Easy to Learn &amp; Use – Simple syntax, readable code, great for collaboration.</a:t>
-            </a:r>
-          </a:p>
-        </p:txBody>
-      </p:sp>
-      <p:sp>
-        <p:nvSpPr>
-          <p:cNvPr name="TextBox 10" id="10"/>
-          <p:cNvSpPr txBox="true"/>
+        </p:grpSpPr>
+        <p:sp>
+          <p:nvSpPr>
+            <p:cNvPr name="Freeform 24" id="24"/>
+            <p:cNvSpPr/>
+            <p:nvPr/>
+          </p:nvSpPr>
+          <p:spPr>
+            <a:xfrm flipH="false" flipV="false" rot="0">
+              <a:off x="0" y="0"/>
+              <a:ext cx="10985935" cy="916940"/>
+            </a:xfrm>
+            <a:custGeom>
+              <a:avLst/>
+              <a:gdLst/>
+              <a:ahLst/>
+              <a:cxnLst/>
+              <a:rect r="r" b="b" t="t" l="l"/>
+              <a:pathLst>
+                <a:path h="916940" w="10985935">
+                  <a:moveTo>
+                    <a:pt x="0" y="0"/>
+                  </a:moveTo>
+                  <a:lnTo>
+                    <a:pt x="10985935" y="0"/>
+                  </a:lnTo>
+                  <a:lnTo>
+                    <a:pt x="10985935" y="916940"/>
+                  </a:lnTo>
+                  <a:lnTo>
+                    <a:pt x="0" y="916940"/>
+                  </a:lnTo>
+                  <a:close/>
+                </a:path>
+              </a:pathLst>
+            </a:custGeom>
+            <a:solidFill>
+              <a:srgbClr val="000000">
+                <a:alpha val="0"/>
+              </a:srgbClr>
+            </a:solidFill>
+          </p:spPr>
+        </p:sp>
+        <p:sp>
+          <p:nvSpPr>
+            <p:cNvPr name="TextBox 25" id="25"/>
+            <p:cNvSpPr txBox="true"/>
+            <p:nvPr/>
+          </p:nvSpPr>
+          <p:spPr>
+            <a:xfrm>
+              <a:off x="0" y="-28575"/>
+              <a:ext cx="10985935" cy="945515"/>
+            </a:xfrm>
+            <a:prstGeom prst="rect">
+              <a:avLst/>
+            </a:prstGeom>
+          </p:spPr>
+          <p:txBody>
+            <a:bodyPr anchor="t" rtlCol="false" tIns="0" lIns="0" bIns="0" rIns="0"/>
+            <a:lstStyle/>
+            <a:p>
+              <a:pPr algn="l">
+                <a:lnSpc>
+                  <a:spcPts val="2730"/>
+                </a:lnSpc>
+              </a:pPr>
+              <a:r>
+                <a:rPr lang="en-US" sz="2100">
+                  <a:solidFill>
+                    <a:srgbClr val="000000"/>
+                  </a:solidFill>
+                  <a:latin typeface="Lato"/>
+                  <a:ea typeface="Lato"/>
+                  <a:cs typeface="Lato"/>
+                  <a:sym typeface="Lato"/>
+                </a:rPr>
+                <a:t>✔ Easy to Learn &amp; Use – Simple syntax, readable code, great for collaboration.</a:t>
+              </a:r>
+            </a:p>
+          </p:txBody>
+        </p:sp>
+      </p:grpSp>
+      <p:grpSp>
+        <p:nvGrpSpPr>
+          <p:cNvPr name="Group 26" id="26"/>
+          <p:cNvGrpSpPr/>
           <p:nvPr/>
-        </p:nvSpPr>
-        <p:spPr>
+        </p:nvGrpSpPr>
+        <p:grpSpPr>
           <a:xfrm rot="0">
             <a:off x="8639693" y="6871335"/>
             <a:ext cx="7675407" cy="687705"/>
+            <a:chOff x="0" y="0"/>
+            <a:chExt cx="10233876" cy="916940"/>
           </a:xfrm>
-          <a:prstGeom prst="rect">
-            <a:avLst/>
-          </a:prstGeom>
-        </p:spPr>
-        <p:txBody>
-          <a:bodyPr anchor="t" rtlCol="false" tIns="0" lIns="0" bIns="0" rIns="0">
-            <a:spAutoFit/>
-          </a:bodyPr>
-          <a:lstStyle/>
-          <a:p>
-            <a:pPr algn="l" marL="0" indent="0" lvl="0">
-              <a:lnSpc>
-                <a:spcPts val="2730"/>
-              </a:lnSpc>
-            </a:pPr>
-            <a:r>
-              <a:rPr lang="en-US" sz="2100">
-                <a:solidFill>
-                  <a:srgbClr val="000000"/>
-                </a:solidFill>
-                <a:latin typeface="Lato"/>
-                <a:ea typeface="Lato"/>
-                <a:cs typeface="Lato"/>
-                <a:sym typeface="Lato"/>
-              </a:rPr>
-              <a:t>✔ Versatile &amp; Widely Used – Applied in various fields: science, finance, social sciences, etc.</a:t>
-            </a:r>
-          </a:p>
-        </p:txBody>
-      </p:sp>
-      <p:sp>
-        <p:nvSpPr>
-          <p:cNvPr name="TextBox 11" id="11"/>
-          <p:cNvSpPr txBox="true"/>
+        </p:grpSpPr>
+        <p:sp>
+          <p:nvSpPr>
+            <p:cNvPr name="Freeform 27" id="27"/>
+            <p:cNvSpPr/>
+            <p:nvPr/>
+          </p:nvSpPr>
+          <p:spPr>
+            <a:xfrm flipH="false" flipV="false" rot="0">
+              <a:off x="0" y="0"/>
+              <a:ext cx="10233876" cy="916940"/>
+            </a:xfrm>
+            <a:custGeom>
+              <a:avLst/>
+              <a:gdLst/>
+              <a:ahLst/>
+              <a:cxnLst/>
+              <a:rect r="r" b="b" t="t" l="l"/>
+              <a:pathLst>
+                <a:path h="916940" w="10233876">
+                  <a:moveTo>
+                    <a:pt x="0" y="0"/>
+                  </a:moveTo>
+                  <a:lnTo>
+                    <a:pt x="10233876" y="0"/>
+                  </a:lnTo>
+                  <a:lnTo>
+                    <a:pt x="10233876" y="916940"/>
+                  </a:lnTo>
+                  <a:lnTo>
+                    <a:pt x="0" y="916940"/>
+                  </a:lnTo>
+                  <a:close/>
+                </a:path>
+              </a:pathLst>
+            </a:custGeom>
+            <a:solidFill>
+              <a:srgbClr val="000000">
+                <a:alpha val="0"/>
+              </a:srgbClr>
+            </a:solidFill>
+          </p:spPr>
+        </p:sp>
+        <p:sp>
+          <p:nvSpPr>
+            <p:cNvPr name="TextBox 28" id="28"/>
+            <p:cNvSpPr txBox="true"/>
+            <p:nvPr/>
+          </p:nvSpPr>
+          <p:spPr>
+            <a:xfrm>
+              <a:off x="0" y="-28575"/>
+              <a:ext cx="10233876" cy="945515"/>
+            </a:xfrm>
+            <a:prstGeom prst="rect">
+              <a:avLst/>
+            </a:prstGeom>
+          </p:spPr>
+          <p:txBody>
+            <a:bodyPr anchor="t" rtlCol="false" tIns="0" lIns="0" bIns="0" rIns="0"/>
+            <a:lstStyle/>
+            <a:p>
+              <a:pPr algn="l">
+                <a:lnSpc>
+                  <a:spcPts val="2730"/>
+                </a:lnSpc>
+              </a:pPr>
+              <a:r>
+                <a:rPr lang="en-US" sz="2100">
+                  <a:solidFill>
+                    <a:srgbClr val="000000"/>
+                  </a:solidFill>
+                  <a:latin typeface="Lato"/>
+                  <a:ea typeface="Lato"/>
+                  <a:cs typeface="Lato"/>
+                  <a:sym typeface="Lato"/>
+                </a:rPr>
+                <a:t>✔ Versatile &amp; Widely Used – Applied in various fields: science, finance, social sciences, etc.</a:t>
+              </a:r>
+            </a:p>
+          </p:txBody>
+        </p:sp>
+      </p:grpSp>
+      <p:grpSp>
+        <p:nvGrpSpPr>
+          <p:cNvPr name="Group 29" id="29"/>
+          <p:cNvGrpSpPr/>
           <p:nvPr/>
-        </p:nvSpPr>
-        <p:spPr>
+        </p:nvGrpSpPr>
+        <p:grpSpPr>
           <a:xfrm rot="0">
             <a:off x="8639693" y="2266190"/>
             <a:ext cx="7981469" cy="687705"/>
+            <a:chOff x="0" y="0"/>
+            <a:chExt cx="10641959" cy="916940"/>
           </a:xfrm>
-          <a:prstGeom prst="rect">
-            <a:avLst/>
-          </a:prstGeom>
-        </p:spPr>
-        <p:txBody>
-          <a:bodyPr anchor="t" rtlCol="false" tIns="0" lIns="0" bIns="0" rIns="0">
-            <a:spAutoFit/>
-          </a:bodyPr>
-          <a:lstStyle/>
-          <a:p>
-            <a:pPr algn="l" marL="0" indent="0" lvl="0">
-              <a:lnSpc>
-                <a:spcPts val="2730"/>
-              </a:lnSpc>
-            </a:pPr>
-            <a:r>
-              <a:rPr lang="en-US" sz="2100">
-                <a:solidFill>
-                  <a:srgbClr val="000000"/>
-                </a:solidFill>
-                <a:latin typeface="Lato"/>
-                <a:ea typeface="Lato"/>
-                <a:cs typeface="Lato"/>
-                <a:sym typeface="Lato"/>
-              </a:rPr>
-              <a:t>✔ Powerful Libraries – NumPy, Pandas, Matplotlib, SciPy, and more for data analysis, visualization, and machine learning.</a:t>
-            </a:r>
-          </a:p>
-        </p:txBody>
-      </p:sp>
-      <p:sp>
-        <p:nvSpPr>
-          <p:cNvPr name="TextBox 12" id="12"/>
-          <p:cNvSpPr txBox="true"/>
+        </p:grpSpPr>
+        <p:sp>
+          <p:nvSpPr>
+            <p:cNvPr name="Freeform 30" id="30"/>
+            <p:cNvSpPr/>
+            <p:nvPr/>
+          </p:nvSpPr>
+          <p:spPr>
+            <a:xfrm flipH="false" flipV="false" rot="0">
+              <a:off x="0" y="0"/>
+              <a:ext cx="10641959" cy="916940"/>
+            </a:xfrm>
+            <a:custGeom>
+              <a:avLst/>
+              <a:gdLst/>
+              <a:ahLst/>
+              <a:cxnLst/>
+              <a:rect r="r" b="b" t="t" l="l"/>
+              <a:pathLst>
+                <a:path h="916940" w="10641959">
+                  <a:moveTo>
+                    <a:pt x="0" y="0"/>
+                  </a:moveTo>
+                  <a:lnTo>
+                    <a:pt x="10641959" y="0"/>
+                  </a:lnTo>
+                  <a:lnTo>
+                    <a:pt x="10641959" y="916940"/>
+                  </a:lnTo>
+                  <a:lnTo>
+                    <a:pt x="0" y="916940"/>
+                  </a:lnTo>
+                  <a:close/>
+                </a:path>
+              </a:pathLst>
+            </a:custGeom>
+            <a:solidFill>
+              <a:srgbClr val="000000">
+                <a:alpha val="0"/>
+              </a:srgbClr>
+            </a:solidFill>
+          </p:spPr>
+        </p:sp>
+        <p:sp>
+          <p:nvSpPr>
+            <p:cNvPr name="TextBox 31" id="31"/>
+            <p:cNvSpPr txBox="true"/>
+            <p:nvPr/>
+          </p:nvSpPr>
+          <p:spPr>
+            <a:xfrm>
+              <a:off x="0" y="-28575"/>
+              <a:ext cx="10641959" cy="945515"/>
+            </a:xfrm>
+            <a:prstGeom prst="rect">
+              <a:avLst/>
+            </a:prstGeom>
+          </p:spPr>
+          <p:txBody>
+            <a:bodyPr anchor="t" rtlCol="false" tIns="0" lIns="0" bIns="0" rIns="0"/>
+            <a:lstStyle/>
+            <a:p>
+              <a:pPr algn="l">
+                <a:lnSpc>
+                  <a:spcPts val="2730"/>
+                </a:lnSpc>
+              </a:pPr>
+              <a:r>
+                <a:rPr lang="en-US" sz="2100">
+                  <a:solidFill>
+                    <a:srgbClr val="000000"/>
+                  </a:solidFill>
+                  <a:latin typeface="Lato"/>
+                  <a:ea typeface="Lato"/>
+                  <a:cs typeface="Lato"/>
+                  <a:sym typeface="Lato"/>
+                </a:rPr>
+                <a:t>✔ Powerful Libraries – NumPy, Pandas, Matplotlib, SciPy, and more for data analysis, visualization, and machine learning.</a:t>
+              </a:r>
+            </a:p>
+          </p:txBody>
+        </p:sp>
+      </p:grpSp>
+      <p:grpSp>
+        <p:nvGrpSpPr>
+          <p:cNvPr name="Group 32" id="32"/>
+          <p:cNvGrpSpPr/>
           <p:nvPr/>
-        </p:nvSpPr>
-        <p:spPr>
+        </p:nvGrpSpPr>
+        <p:grpSpPr>
           <a:xfrm rot="0">
             <a:off x="8639693" y="8405325"/>
             <a:ext cx="8497725" cy="687705"/>
+            <a:chOff x="0" y="0"/>
+            <a:chExt cx="11330300" cy="916940"/>
           </a:xfrm>
-          <a:prstGeom prst="rect">
-            <a:avLst/>
-          </a:prstGeom>
-        </p:spPr>
-        <p:txBody>
-          <a:bodyPr anchor="t" rtlCol="false" tIns="0" lIns="0" bIns="0" rIns="0">
-            <a:spAutoFit/>
-          </a:bodyPr>
-          <a:lstStyle/>
-          <a:p>
-            <a:pPr algn="l" marL="0" indent="0" lvl="0">
-              <a:lnSpc>
-                <a:spcPts val="2730"/>
-              </a:lnSpc>
-            </a:pPr>
-            <a:r>
-              <a:rPr lang="en-US" sz="2100">
-                <a:solidFill>
-                  <a:srgbClr val="000000"/>
-                </a:solidFill>
-                <a:latin typeface="Lato"/>
-                <a:ea typeface="Lato"/>
-                <a:cs typeface="Lato"/>
-                <a:sym typeface="Lato"/>
-              </a:rPr>
-              <a:t>✔ Strong Community Support – Open-source, extensive documentation, and global adoption.</a:t>
-            </a:r>
-          </a:p>
-        </p:txBody>
-      </p:sp>
-      <p:sp>
-        <p:nvSpPr>
-          <p:cNvPr name="TextBox 13" id="13"/>
-          <p:cNvSpPr txBox="true"/>
+        </p:grpSpPr>
+        <p:sp>
+          <p:nvSpPr>
+            <p:cNvPr name="Freeform 33" id="33"/>
+            <p:cNvSpPr/>
+            <p:nvPr/>
+          </p:nvSpPr>
+          <p:spPr>
+            <a:xfrm flipH="false" flipV="false" rot="0">
+              <a:off x="0" y="0"/>
+              <a:ext cx="11330300" cy="916940"/>
+            </a:xfrm>
+            <a:custGeom>
+              <a:avLst/>
+              <a:gdLst/>
+              <a:ahLst/>
+              <a:cxnLst/>
+              <a:rect r="r" b="b" t="t" l="l"/>
+              <a:pathLst>
+                <a:path h="916940" w="11330300">
+                  <a:moveTo>
+                    <a:pt x="0" y="0"/>
+                  </a:moveTo>
+                  <a:lnTo>
+                    <a:pt x="11330300" y="0"/>
+                  </a:lnTo>
+                  <a:lnTo>
+                    <a:pt x="11330300" y="916940"/>
+                  </a:lnTo>
+                  <a:lnTo>
+                    <a:pt x="0" y="916940"/>
+                  </a:lnTo>
+                  <a:close/>
+                </a:path>
+              </a:pathLst>
+            </a:custGeom>
+            <a:solidFill>
+              <a:srgbClr val="000000">
+                <a:alpha val="0"/>
+              </a:srgbClr>
+            </a:solidFill>
+          </p:spPr>
+        </p:sp>
+        <p:sp>
+          <p:nvSpPr>
+            <p:cNvPr name="TextBox 34" id="34"/>
+            <p:cNvSpPr txBox="true"/>
+            <p:nvPr/>
+          </p:nvSpPr>
+          <p:spPr>
+            <a:xfrm>
+              <a:off x="0" y="-28575"/>
+              <a:ext cx="11330300" cy="945515"/>
+            </a:xfrm>
+            <a:prstGeom prst="rect">
+              <a:avLst/>
+            </a:prstGeom>
+          </p:spPr>
+          <p:txBody>
+            <a:bodyPr anchor="t" rtlCol="false" tIns="0" lIns="0" bIns="0" rIns="0"/>
+            <a:lstStyle/>
+            <a:p>
+              <a:pPr algn="l">
+                <a:lnSpc>
+                  <a:spcPts val="2730"/>
+                </a:lnSpc>
+              </a:pPr>
+              <a:r>
+                <a:rPr lang="en-US" sz="2100">
+                  <a:solidFill>
+                    <a:srgbClr val="000000"/>
+                  </a:solidFill>
+                  <a:latin typeface="Lato"/>
+                  <a:ea typeface="Lato"/>
+                  <a:cs typeface="Lato"/>
+                  <a:sym typeface="Lato"/>
+                </a:rPr>
+                <a:t>✔ Strong Community Support – Open-source, extensive documentation, and global adoption.</a:t>
+              </a:r>
+            </a:p>
+          </p:txBody>
+        </p:sp>
+      </p:grpSp>
+      <p:grpSp>
+        <p:nvGrpSpPr>
+          <p:cNvPr name="Group 35" id="35"/>
+          <p:cNvGrpSpPr/>
           <p:nvPr/>
-        </p:nvSpPr>
-        <p:spPr>
+        </p:nvGrpSpPr>
+        <p:grpSpPr>
           <a:xfrm rot="0">
             <a:off x="8639693" y="3800180"/>
             <a:ext cx="7981469" cy="687705"/>
+            <a:chOff x="0" y="0"/>
+            <a:chExt cx="10641959" cy="916940"/>
           </a:xfrm>
-          <a:prstGeom prst="rect">
-            <a:avLst/>
-          </a:prstGeom>
-        </p:spPr>
-        <p:txBody>
-          <a:bodyPr anchor="t" rtlCol="false" tIns="0" lIns="0" bIns="0" rIns="0">
-            <a:spAutoFit/>
-          </a:bodyPr>
-          <a:lstStyle/>
-          <a:p>
-            <a:pPr algn="l" marL="0" indent="0" lvl="0">
-              <a:lnSpc>
-                <a:spcPts val="2730"/>
-              </a:lnSpc>
-            </a:pPr>
-            <a:r>
-              <a:rPr lang="en-US" sz="2100">
-                <a:solidFill>
-                  <a:srgbClr val="000000"/>
-                </a:solidFill>
-                <a:latin typeface="Lato"/>
-                <a:ea typeface="Lato"/>
-                <a:cs typeface="Lato"/>
-                <a:sym typeface="Lato"/>
-              </a:rPr>
-              <a:t>✔ Reproducibility &amp; Open Science – Jupyter Notebooks enable interactive coding and documentation.</a:t>
-            </a:r>
-          </a:p>
-        </p:txBody>
-      </p:sp>
-      <p:sp>
-        <p:nvSpPr>
-          <p:cNvPr name="TextBox 14" id="14"/>
-          <p:cNvSpPr txBox="true"/>
+        </p:grpSpPr>
+        <p:sp>
+          <p:nvSpPr>
+            <p:cNvPr name="Freeform 36" id="36"/>
+            <p:cNvSpPr/>
+            <p:nvPr/>
+          </p:nvSpPr>
+          <p:spPr>
+            <a:xfrm flipH="false" flipV="false" rot="0">
+              <a:off x="0" y="0"/>
+              <a:ext cx="10641959" cy="916940"/>
+            </a:xfrm>
+            <a:custGeom>
+              <a:avLst/>
+              <a:gdLst/>
+              <a:ahLst/>
+              <a:cxnLst/>
+              <a:rect r="r" b="b" t="t" l="l"/>
+              <a:pathLst>
+                <a:path h="916940" w="10641959">
+                  <a:moveTo>
+                    <a:pt x="0" y="0"/>
+                  </a:moveTo>
+                  <a:lnTo>
+                    <a:pt x="10641959" y="0"/>
+                  </a:lnTo>
+                  <a:lnTo>
+                    <a:pt x="10641959" y="916940"/>
+                  </a:lnTo>
+                  <a:lnTo>
+                    <a:pt x="0" y="916940"/>
+                  </a:lnTo>
+                  <a:close/>
+                </a:path>
+              </a:pathLst>
+            </a:custGeom>
+            <a:solidFill>
+              <a:srgbClr val="000000">
+                <a:alpha val="0"/>
+              </a:srgbClr>
+            </a:solidFill>
+          </p:spPr>
+        </p:sp>
+        <p:sp>
+          <p:nvSpPr>
+            <p:cNvPr name="TextBox 37" id="37"/>
+            <p:cNvSpPr txBox="true"/>
+            <p:nvPr/>
+          </p:nvSpPr>
+          <p:spPr>
+            <a:xfrm>
+              <a:off x="0" y="-28575"/>
+              <a:ext cx="10641959" cy="945515"/>
+            </a:xfrm>
+            <a:prstGeom prst="rect">
+              <a:avLst/>
+            </a:prstGeom>
+          </p:spPr>
+          <p:txBody>
+            <a:bodyPr anchor="t" rtlCol="false" tIns="0" lIns="0" bIns="0" rIns="0"/>
+            <a:lstStyle/>
+            <a:p>
+              <a:pPr algn="l">
+                <a:lnSpc>
+                  <a:spcPts val="2730"/>
+                </a:lnSpc>
+              </a:pPr>
+              <a:r>
+                <a:rPr lang="en-US" sz="2100">
+                  <a:solidFill>
+                    <a:srgbClr val="000000"/>
+                  </a:solidFill>
+                  <a:latin typeface="Lato"/>
+                  <a:ea typeface="Lato"/>
+                  <a:cs typeface="Lato"/>
+                  <a:sym typeface="Lato"/>
+                </a:rPr>
+                <a:t>✔ Reproducibility &amp; Open Science – Jupyter Notebooks enable interactive coding and documentation.</a:t>
+              </a:r>
+            </a:p>
+          </p:txBody>
+        </p:sp>
+      </p:grpSp>
+      <p:grpSp>
+        <p:nvGrpSpPr>
+          <p:cNvPr name="Group 38" id="38"/>
+          <p:cNvGrpSpPr/>
           <p:nvPr/>
-        </p:nvSpPr>
-        <p:spPr>
+        </p:nvGrpSpPr>
+        <p:grpSpPr>
           <a:xfrm rot="0">
             <a:off x="763609" y="763609"/>
             <a:ext cx="5076245" cy="3286125"/>
+            <a:chOff x="0" y="0"/>
+            <a:chExt cx="6768327" cy="4381500"/>
           </a:xfrm>
-          <a:prstGeom prst="rect">
-            <a:avLst/>
-          </a:prstGeom>
-        </p:spPr>
-        <p:txBody>
-          <a:bodyPr anchor="t" rtlCol="false" tIns="0" lIns="0" bIns="0" rIns="0">
-            <a:spAutoFit/>
-          </a:bodyPr>
-          <a:lstStyle/>
-          <a:p>
-            <a:pPr algn="l" marL="0" indent="0" lvl="0">
-              <a:lnSpc>
-                <a:spcPts val="8640"/>
-              </a:lnSpc>
-            </a:pPr>
-            <a:r>
-              <a:rPr lang="en-US" sz="7200" u="none">
-                <a:solidFill>
-                  <a:srgbClr val="000000"/>
-                </a:solidFill>
-                <a:latin typeface="Lato"/>
-                <a:ea typeface="Lato"/>
-                <a:cs typeface="Lato"/>
-                <a:sym typeface="Lato"/>
-              </a:rPr>
-              <a:t>Why Python for researchers?</a:t>
-            </a:r>
-          </a:p>
-        </p:txBody>
-      </p:sp>
+        </p:grpSpPr>
+        <p:sp>
+          <p:nvSpPr>
+            <p:cNvPr name="Freeform 39" id="39"/>
+            <p:cNvSpPr/>
+            <p:nvPr/>
+          </p:nvSpPr>
+          <p:spPr>
+            <a:xfrm flipH="false" flipV="false" rot="0">
+              <a:off x="0" y="0"/>
+              <a:ext cx="6768326" cy="4381500"/>
+            </a:xfrm>
+            <a:custGeom>
+              <a:avLst/>
+              <a:gdLst/>
+              <a:ahLst/>
+              <a:cxnLst/>
+              <a:rect r="r" b="b" t="t" l="l"/>
+              <a:pathLst>
+                <a:path h="4381500" w="6768326">
+                  <a:moveTo>
+                    <a:pt x="0" y="0"/>
+                  </a:moveTo>
+                  <a:lnTo>
+                    <a:pt x="6768326" y="0"/>
+                  </a:lnTo>
+                  <a:lnTo>
+                    <a:pt x="6768326" y="4381500"/>
+                  </a:lnTo>
+                  <a:lnTo>
+                    <a:pt x="0" y="4381500"/>
+                  </a:lnTo>
+                  <a:close/>
+                </a:path>
+              </a:pathLst>
+            </a:custGeom>
+            <a:solidFill>
+              <a:srgbClr val="000000">
+                <a:alpha val="0"/>
+              </a:srgbClr>
+            </a:solidFill>
+          </p:spPr>
+        </p:sp>
+        <p:sp>
+          <p:nvSpPr>
+            <p:cNvPr name="TextBox 40" id="40"/>
+            <p:cNvSpPr txBox="true"/>
+            <p:nvPr/>
+          </p:nvSpPr>
+          <p:spPr>
+            <a:xfrm>
+              <a:off x="0" y="0"/>
+              <a:ext cx="6768327" cy="4381500"/>
+            </a:xfrm>
+            <a:prstGeom prst="rect">
+              <a:avLst/>
+            </a:prstGeom>
+          </p:spPr>
+          <p:txBody>
+            <a:bodyPr anchor="t" rtlCol="false" tIns="0" lIns="0" bIns="0" rIns="0"/>
+            <a:lstStyle/>
+            <a:p>
+              <a:pPr algn="l">
+                <a:lnSpc>
+                  <a:spcPts val="8640"/>
+                </a:lnSpc>
+              </a:pPr>
+              <a:r>
+                <a:rPr lang="en-US" sz="7200">
+                  <a:solidFill>
+                    <a:srgbClr val="000000"/>
+                  </a:solidFill>
+                  <a:latin typeface="Lato"/>
+                  <a:ea typeface="Lato"/>
+                  <a:cs typeface="Lato"/>
+                  <a:sym typeface="Lato"/>
+                </a:rPr>
+                <a:t>Why Python for researchers?</a:t>
+              </a:r>
+            </a:p>
+          </p:txBody>
+        </p:sp>
+      </p:grpSp>
     </p:spTree>
   </p:cSld>
   <p:clrMapOvr>
@@ -5426,43 +7972,80 @@
         </p:nvGrpSpPr>
         <p:grpSpPr>
           <a:xfrm rot="0">
-            <a:off x="1302806" y="1145597"/>
-            <a:ext cx="12741423" cy="7995806"/>
+            <a:off x="1028700" y="2947955"/>
+            <a:ext cx="7873442" cy="6929755"/>
             <a:chOff x="0" y="0"/>
-            <a:chExt cx="16988563" cy="10661075"/>
+            <a:chExt cx="10497923" cy="9239673"/>
           </a:xfrm>
         </p:grpSpPr>
         <p:sp>
           <p:nvSpPr>
-            <p:cNvPr name="TextBox 3" id="3"/>
+            <p:cNvPr name="Freeform 3" id="3"/>
+            <p:cNvSpPr/>
+            <p:nvPr/>
+          </p:nvSpPr>
+          <p:spPr>
+            <a:xfrm flipH="false" flipV="false" rot="0">
+              <a:off x="0" y="0"/>
+              <a:ext cx="10497923" cy="9239673"/>
+            </a:xfrm>
+            <a:custGeom>
+              <a:avLst/>
+              <a:gdLst/>
+              <a:ahLst/>
+              <a:cxnLst/>
+              <a:rect r="r" b="b" t="t" l="l"/>
+              <a:pathLst>
+                <a:path h="9239673" w="10497923">
+                  <a:moveTo>
+                    <a:pt x="0" y="0"/>
+                  </a:moveTo>
+                  <a:lnTo>
+                    <a:pt x="10497923" y="0"/>
+                  </a:lnTo>
+                  <a:lnTo>
+                    <a:pt x="10497923" y="9239673"/>
+                  </a:lnTo>
+                  <a:lnTo>
+                    <a:pt x="0" y="9239673"/>
+                  </a:lnTo>
+                  <a:close/>
+                </a:path>
+              </a:pathLst>
+            </a:custGeom>
+            <a:solidFill>
+              <a:srgbClr val="000000">
+                <a:alpha val="0"/>
+              </a:srgbClr>
+            </a:solidFill>
+          </p:spPr>
+        </p:sp>
+        <p:sp>
+          <p:nvSpPr>
+            <p:cNvPr name="TextBox 4" id="4"/>
             <p:cNvSpPr txBox="true"/>
             <p:nvPr/>
           </p:nvSpPr>
           <p:spPr>
-            <a:xfrm rot="0">
-              <a:off x="0" y="3959074"/>
-              <a:ext cx="16988563" cy="6702002"/>
+            <a:xfrm>
+              <a:off x="0" y="-66675"/>
+              <a:ext cx="10497923" cy="9306348"/>
             </a:xfrm>
             <a:prstGeom prst="rect">
               <a:avLst/>
             </a:prstGeom>
           </p:spPr>
           <p:txBody>
-            <a:bodyPr anchor="t" rtlCol="false" tIns="0" lIns="0" bIns="0" rIns="0">
-              <a:spAutoFit/>
-            </a:bodyPr>
+            <a:bodyPr anchor="t" rtlCol="false" tIns="0" lIns="0" bIns="0" rIns="0"/>
             <a:lstStyle/>
             <a:p>
-              <a:pPr algn="l" marL="0" indent="0" lvl="0">
+              <a:pPr algn="l">
                 <a:lnSpc>
-                  <a:spcPts val="4480"/>
+                  <a:spcPts val="3919"/>
                 </a:lnSpc>
-                <a:spcBef>
-                  <a:spcPct val="0"/>
-                </a:spcBef>
               </a:pPr>
               <a:r>
-                <a:rPr lang="en-US" sz="3200">
+                <a:rPr lang="en-US" sz="2799">
                   <a:solidFill>
                     <a:srgbClr val="000000"/>
                   </a:solidFill>
@@ -5471,20 +8054,19 @@
                   <a:cs typeface="Lato"/>
                   <a:sym typeface="Lato"/>
                 </a:rPr>
-                <a:t>1. Install Python</a:t>
+                <a:t>🧮 NumPy</a:t>
               </a:r>
             </a:p>
             <a:p>
-              <a:pPr algn="l" marL="0" indent="0" lvl="0">
+              <a:pPr algn="l" marL="639958" indent="-213319" lvl="2">
                 <a:lnSpc>
-                  <a:spcPts val="4480"/>
+                  <a:spcPts val="3919"/>
                 </a:lnSpc>
-                <a:spcBef>
-                  <a:spcPct val="0"/>
-                </a:spcBef>
+                <a:buFont typeface="Arial"/>
+                <a:buChar char="⚬"/>
               </a:pPr>
               <a:r>
-                <a:rPr lang="en-US" sz="3200">
+                <a:rPr lang="en-US" sz="2799">
                   <a:solidFill>
                     <a:srgbClr val="000000"/>
                   </a:solidFill>
@@ -5493,20 +8075,19 @@
                   <a:cs typeface="Lato"/>
                   <a:sym typeface="Lato"/>
                 </a:rPr>
-                <a:t>✔ Download &amp; install from python.org (Ensure you check “Add Python to PATH”).</a:t>
+                <a:t>Fast array operations</a:t>
               </a:r>
             </a:p>
             <a:p>
-              <a:pPr algn="l" marL="0" indent="0" lvl="0">
+              <a:pPr algn="l" marL="639958" indent="-213319" lvl="2">
                 <a:lnSpc>
-                  <a:spcPts val="4480"/>
+                  <a:spcPts val="3919"/>
                 </a:lnSpc>
-                <a:spcBef>
-                  <a:spcPct val="0"/>
-                </a:spcBef>
+                <a:buFont typeface="Arial"/>
+                <a:buChar char="⚬"/>
               </a:pPr>
               <a:r>
-                <a:rPr lang="en-US" sz="3200">
+                <a:rPr lang="en-US" sz="2799">
                   <a:solidFill>
                     <a:srgbClr val="000000"/>
                   </a:solidFill>
@@ -5515,30 +8096,24 @@
                   <a:cs typeface="Lato"/>
                   <a:sym typeface="Lato"/>
                 </a:rPr>
-                <a:t> ✔ Use Anaconda for an all-in-one scientific package (anaconda.com).</a:t>
+                <a:t>Linear algebra, FFT, random number generation</a:t>
               </a:r>
             </a:p>
             <a:p>
-              <a:pPr algn="l" marL="0" indent="0" lvl="0">
+              <a:pPr algn="l" marL="639958" indent="-213319" lvl="2">
                 <a:lnSpc>
-                  <a:spcPts val="4480"/>
+                  <a:spcPts val="3919"/>
                 </a:lnSpc>
-                <a:spcBef>
-                  <a:spcPct val="0"/>
-                </a:spcBef>
               </a:pPr>
             </a:p>
             <a:p>
-              <a:pPr algn="l" marL="0" indent="0" lvl="0">
+              <a:pPr algn="l" marL="639958" indent="-213319" lvl="2">
                 <a:lnSpc>
-                  <a:spcPts val="4480"/>
+                  <a:spcPts val="3919"/>
                 </a:lnSpc>
-                <a:spcBef>
-                  <a:spcPct val="0"/>
-                </a:spcBef>
               </a:pPr>
               <a:r>
-                <a:rPr lang="en-US" sz="3200">
+                <a:rPr lang="en-US" sz="2799">
                   <a:solidFill>
                     <a:srgbClr val="000000"/>
                   </a:solidFill>
@@ -5547,20 +8122,19 @@
                   <a:cs typeface="Lato"/>
                   <a:sym typeface="Lato"/>
                 </a:rPr>
-                <a:t>2. Install Jupyter Notebook</a:t>
+                <a:t>📊 Pandas</a:t>
               </a:r>
             </a:p>
             <a:p>
-              <a:pPr algn="l" marL="0" indent="0" lvl="0">
+              <a:pPr algn="l" marL="639958" indent="-213319" lvl="2">
                 <a:lnSpc>
-                  <a:spcPts val="4480"/>
+                  <a:spcPts val="3919"/>
                 </a:lnSpc>
-                <a:spcBef>
-                  <a:spcPct val="0"/>
-                </a:spcBef>
+                <a:buFont typeface="Arial"/>
+                <a:buChar char="⚬"/>
               </a:pPr>
               <a:r>
-                <a:rPr lang="en-US" sz="3200">
+                <a:rPr lang="en-US" sz="2799">
                   <a:solidFill>
                     <a:srgbClr val="000000"/>
                   </a:solidFill>
@@ -5569,20 +8143,19 @@
                   <a:cs typeface="Lato"/>
                   <a:sym typeface="Lato"/>
                 </a:rPr>
-                <a:t>✔ Open terminal (Mac/Linux) or command prompt (Windows).</a:t>
+                <a:t>Powerful data structures (Series, DataFrame)</a:t>
               </a:r>
             </a:p>
             <a:p>
-              <a:pPr algn="l" marL="0" indent="0" lvl="0">
+              <a:pPr algn="l" marL="639958" indent="-213319" lvl="2">
                 <a:lnSpc>
-                  <a:spcPts val="4480"/>
+                  <a:spcPts val="3919"/>
                 </a:lnSpc>
-                <a:spcBef>
-                  <a:spcPct val="0"/>
-                </a:spcBef>
+                <a:buFont typeface="Arial"/>
+                <a:buChar char="⚬"/>
               </a:pPr>
               <a:r>
-                <a:rPr lang="en-US" sz="3200">
+                <a:rPr lang="en-US" sz="2799">
                   <a:solidFill>
                     <a:srgbClr val="000000"/>
                   </a:solidFill>
@@ -5591,39 +8164,24 @@
                   <a:cs typeface="Lato"/>
                   <a:sym typeface="Lato"/>
                 </a:rPr>
-                <a:t> ✔ Run: pip install jupyterlab (or use conda install jupyterlab if using Anaconda).</a:t>
+                <a:t>Easy data cleaning, transformation, and analysis</a:t>
               </a:r>
             </a:p>
-          </p:txBody>
-        </p:sp>
-        <p:sp>
-          <p:nvSpPr>
-            <p:cNvPr name="TextBox 4" id="4"/>
-            <p:cNvSpPr txBox="true"/>
-            <p:nvPr/>
-          </p:nvSpPr>
-          <p:spPr>
-            <a:xfrm rot="0">
-              <a:off x="0" y="152400"/>
-              <a:ext cx="16988563" cy="2977485"/>
-            </a:xfrm>
-            <a:prstGeom prst="rect">
-              <a:avLst/>
-            </a:prstGeom>
-          </p:spPr>
-          <p:txBody>
-            <a:bodyPr anchor="t" rtlCol="false" tIns="0" lIns="0" bIns="0" rIns="0">
-              <a:spAutoFit/>
-            </a:bodyPr>
-            <a:lstStyle/>
             <a:p>
-              <a:pPr algn="l" marL="0" indent="0" lvl="0">
+              <a:pPr algn="l" marL="639958" indent="-213319" lvl="2">
                 <a:lnSpc>
-                  <a:spcPts val="8417"/>
+                  <a:spcPts val="3919"/>
+                </a:lnSpc>
+              </a:pPr>
+            </a:p>
+            <a:p>
+              <a:pPr algn="l" marL="639958" indent="-213319" lvl="2">
+                <a:lnSpc>
+                  <a:spcPts val="3919"/>
                 </a:lnSpc>
               </a:pPr>
               <a:r>
-                <a:rPr lang="en-US" sz="8417">
+                <a:rPr lang="en-US" sz="2799">
                   <a:solidFill>
                     <a:srgbClr val="000000"/>
                   </a:solidFill>
@@ -5632,592 +8190,410 @@
                   <a:cs typeface="Lato"/>
                   <a:sym typeface="Lato"/>
                 </a:rPr>
-                <a:t>Installing Python &amp; Jupyter Notebook / IDE Setup</a:t>
+                <a:t>📈 Matplotlib &amp; Seaborn</a:t>
+              </a:r>
+            </a:p>
+            <a:p>
+              <a:pPr algn="l" marL="1143725" indent="-285931" lvl="3">
+                <a:lnSpc>
+                  <a:spcPts val="3919"/>
+                </a:lnSpc>
+                <a:buFont typeface="Arial"/>
+                <a:buChar char="￭"/>
+              </a:pPr>
+              <a:r>
+                <a:rPr lang="en-US" sz="2799">
+                  <a:solidFill>
+                    <a:srgbClr val="000000"/>
+                  </a:solidFill>
+                  <a:latin typeface="Lato"/>
+                  <a:ea typeface="Lato"/>
+                  <a:cs typeface="Lato"/>
+                  <a:sym typeface="Lato"/>
+                </a:rPr>
+                <a:t>Data visualization (plots, charts, graphs)</a:t>
+              </a:r>
+            </a:p>
+            <a:p>
+              <a:pPr algn="l" marL="1143725" indent="-285931" lvl="3">
+                <a:lnSpc>
+                  <a:spcPts val="3919"/>
+                </a:lnSpc>
+                <a:buFont typeface="Arial"/>
+                <a:buChar char="￭"/>
+              </a:pPr>
+              <a:r>
+                <a:rPr lang="en-US" sz="2799">
+                  <a:solidFill>
+                    <a:srgbClr val="000000"/>
+                  </a:solidFill>
+                  <a:latin typeface="Lato"/>
+                  <a:ea typeface="Lato"/>
+                  <a:cs typeface="Lato"/>
+                  <a:sym typeface="Lato"/>
+                </a:rPr>
+                <a:t>Seaborn builds on Matplotlib for better visuals</a:t>
               </a:r>
             </a:p>
           </p:txBody>
         </p:sp>
       </p:grpSp>
-    </p:spTree>
-  </p:cSld>
-  <p:clrMapOvr>
-    <a:masterClrMapping/>
-  </p:clrMapOvr>
-</p:sld>
-</file>
-
-<file path=ppt/slides/slide7.xml><?xml version="1.0" encoding="utf-8"?>
-<p:sld xmlns:p="http://schemas.openxmlformats.org/presentationml/2006/main" xmlns:a="http://schemas.openxmlformats.org/drawingml/2006/main">
-  <p:cSld>
-    <p:spTree>
-      <p:nvGrpSpPr>
-        <p:cNvPr id="1" name=""/>
-        <p:cNvGrpSpPr/>
-        <p:nvPr/>
-      </p:nvGrpSpPr>
-      <p:grpSpPr>
-        <a:xfrm>
-          <a:off x="0" y="0"/>
-          <a:ext cx="0" cy="0"/>
-          <a:chOff x="0" y="0"/>
-          <a:chExt cx="0" cy="0"/>
-        </a:xfrm>
-      </p:grpSpPr>
-      <p:sp>
-        <p:nvSpPr>
-          <p:cNvPr name="TextBox 2" id="2"/>
-          <p:cNvSpPr txBox="true"/>
+      <p:grpSp>
+        <p:nvGrpSpPr>
+          <p:cNvPr name="Group 5" id="5"/>
+          <p:cNvGrpSpPr/>
           <p:nvPr/>
-        </p:nvSpPr>
-        <p:spPr>
-          <a:xfrm rot="0">
-            <a:off x="1028700" y="2947955"/>
-            <a:ext cx="7873442" cy="6929755"/>
-          </a:xfrm>
-          <a:prstGeom prst="rect">
-            <a:avLst/>
-          </a:prstGeom>
-        </p:spPr>
-        <p:txBody>
-          <a:bodyPr anchor="t" rtlCol="false" tIns="0" lIns="0" bIns="0" rIns="0">
-            <a:spAutoFit/>
-          </a:bodyPr>
-          <a:lstStyle/>
-          <a:p>
-            <a:pPr algn="l" marL="0" indent="0" lvl="0">
-              <a:lnSpc>
-                <a:spcPts val="3919"/>
-              </a:lnSpc>
-              <a:spcBef>
-                <a:spcPct val="0"/>
-              </a:spcBef>
-            </a:pPr>
-            <a:r>
-              <a:rPr lang="en-US" sz="2799">
-                <a:solidFill>
-                  <a:srgbClr val="000000"/>
-                </a:solidFill>
-                <a:latin typeface="Lato"/>
-                <a:ea typeface="Lato"/>
-                <a:cs typeface="Lato"/>
-                <a:sym typeface="Lato"/>
-              </a:rPr>
-              <a:t>🧮</a:t>
-            </a:r>
-            <a:r>
-              <a:rPr lang="en-US" sz="2799">
-                <a:solidFill>
-                  <a:srgbClr val="000000"/>
-                </a:solidFill>
-                <a:latin typeface="Lato"/>
-                <a:ea typeface="Lato"/>
-                <a:cs typeface="Lato"/>
-                <a:sym typeface="Lato"/>
-              </a:rPr>
-              <a:t> NumPy</a:t>
-            </a:r>
-          </a:p>
-          <a:p>
-            <a:pPr algn="l" marL="604519" indent="-302260" lvl="1">
-              <a:lnSpc>
-                <a:spcPts val="3919"/>
-              </a:lnSpc>
-              <a:spcBef>
-                <a:spcPct val="0"/>
-              </a:spcBef>
-              <a:buFont typeface="Arial"/>
-              <a:buChar char="•"/>
-            </a:pPr>
-            <a:r>
-              <a:rPr lang="en-US" sz="2799">
-                <a:solidFill>
-                  <a:srgbClr val="000000"/>
-                </a:solidFill>
-                <a:latin typeface="Lato"/>
-                <a:ea typeface="Lato"/>
-                <a:cs typeface="Lato"/>
-                <a:sym typeface="Lato"/>
-              </a:rPr>
-              <a:t>Fast array operations</a:t>
-            </a:r>
-          </a:p>
-          <a:p>
-            <a:pPr algn="l" marL="604519" indent="-302260" lvl="1">
-              <a:lnSpc>
-                <a:spcPts val="3919"/>
-              </a:lnSpc>
-              <a:spcBef>
-                <a:spcPct val="0"/>
-              </a:spcBef>
-              <a:buFont typeface="Arial"/>
-              <a:buChar char="•"/>
-            </a:pPr>
-            <a:r>
-              <a:rPr lang="en-US" sz="2799">
-                <a:solidFill>
-                  <a:srgbClr val="000000"/>
-                </a:solidFill>
-                <a:latin typeface="Lato"/>
-                <a:ea typeface="Lato"/>
-                <a:cs typeface="Lato"/>
-                <a:sym typeface="Lato"/>
-              </a:rPr>
-              <a:t>Linear algebra, FFT, random number generation</a:t>
-            </a:r>
-          </a:p>
-          <a:p>
-            <a:pPr algn="l" marL="0" indent="0" lvl="0">
-              <a:lnSpc>
-                <a:spcPts val="3919"/>
-              </a:lnSpc>
-              <a:spcBef>
-                <a:spcPct val="0"/>
-              </a:spcBef>
-            </a:pPr>
-          </a:p>
-          <a:p>
-            <a:pPr algn="l" marL="0" indent="0" lvl="0">
-              <a:lnSpc>
-                <a:spcPts val="3919"/>
-              </a:lnSpc>
-              <a:spcBef>
-                <a:spcPct val="0"/>
-              </a:spcBef>
-            </a:pPr>
-            <a:r>
-              <a:rPr lang="en-US" sz="2799">
-                <a:solidFill>
-                  <a:srgbClr val="000000"/>
-                </a:solidFill>
-                <a:latin typeface="Lato"/>
-                <a:ea typeface="Lato"/>
-                <a:cs typeface="Lato"/>
-                <a:sym typeface="Lato"/>
-              </a:rPr>
-              <a:t>📊 Pandas</a:t>
-            </a:r>
-          </a:p>
-          <a:p>
-            <a:pPr algn="l" marL="604519" indent="-302260" lvl="1">
-              <a:lnSpc>
-                <a:spcPts val="3919"/>
-              </a:lnSpc>
-              <a:spcBef>
-                <a:spcPct val="0"/>
-              </a:spcBef>
-              <a:buFont typeface="Arial"/>
-              <a:buChar char="•"/>
-            </a:pPr>
-            <a:r>
-              <a:rPr lang="en-US" sz="2799">
-                <a:solidFill>
-                  <a:srgbClr val="000000"/>
-                </a:solidFill>
-                <a:latin typeface="Lato"/>
-                <a:ea typeface="Lato"/>
-                <a:cs typeface="Lato"/>
-                <a:sym typeface="Lato"/>
-              </a:rPr>
-              <a:t>Powerful data structures (Series, DataFrame)</a:t>
-            </a:r>
-          </a:p>
-          <a:p>
-            <a:pPr algn="l" marL="604519" indent="-302260" lvl="1">
-              <a:lnSpc>
-                <a:spcPts val="3919"/>
-              </a:lnSpc>
-              <a:spcBef>
-                <a:spcPct val="0"/>
-              </a:spcBef>
-              <a:buFont typeface="Arial"/>
-              <a:buChar char="•"/>
-            </a:pPr>
-            <a:r>
-              <a:rPr lang="en-US" sz="2799">
-                <a:solidFill>
-                  <a:srgbClr val="000000"/>
-                </a:solidFill>
-                <a:latin typeface="Lato"/>
-                <a:ea typeface="Lato"/>
-                <a:cs typeface="Lato"/>
-                <a:sym typeface="Lato"/>
-              </a:rPr>
-              <a:t>Easy data cleaning, transformation, and analysis</a:t>
-            </a:r>
-          </a:p>
-          <a:p>
-            <a:pPr algn="l" marL="0" indent="0" lvl="0">
-              <a:lnSpc>
-                <a:spcPts val="3919"/>
-              </a:lnSpc>
-              <a:spcBef>
-                <a:spcPct val="0"/>
-              </a:spcBef>
-            </a:pPr>
-          </a:p>
-          <a:p>
-            <a:pPr algn="l">
-              <a:lnSpc>
-                <a:spcPts val="3919"/>
-              </a:lnSpc>
-              <a:spcBef>
-                <a:spcPct val="0"/>
-              </a:spcBef>
-            </a:pPr>
-            <a:r>
-              <a:rPr lang="en-US" sz="2799">
-                <a:solidFill>
-                  <a:srgbClr val="000000"/>
-                </a:solidFill>
-                <a:latin typeface="Lato"/>
-                <a:ea typeface="Lato"/>
-                <a:cs typeface="Lato"/>
-                <a:sym typeface="Lato"/>
-              </a:rPr>
-              <a:t>📈 Matplotlib &amp; Seaborn</a:t>
-            </a:r>
-          </a:p>
-          <a:p>
-            <a:pPr algn="l" marL="1209039" indent="-403013" lvl="2">
-              <a:lnSpc>
-                <a:spcPts val="3919"/>
-              </a:lnSpc>
-              <a:spcBef>
-                <a:spcPct val="0"/>
-              </a:spcBef>
-              <a:buFont typeface="Arial"/>
-              <a:buChar char="⚬"/>
-            </a:pPr>
-            <a:r>
-              <a:rPr lang="en-US" sz="2799">
-                <a:solidFill>
-                  <a:srgbClr val="000000"/>
-                </a:solidFill>
-                <a:latin typeface="Lato"/>
-                <a:ea typeface="Lato"/>
-                <a:cs typeface="Lato"/>
-                <a:sym typeface="Lato"/>
-              </a:rPr>
-              <a:t>Data visualization (plots, charts, graphs)</a:t>
-            </a:r>
-          </a:p>
-          <a:p>
-            <a:pPr algn="l" marL="1209039" indent="-403013" lvl="2">
-              <a:lnSpc>
-                <a:spcPts val="3919"/>
-              </a:lnSpc>
-              <a:spcBef>
-                <a:spcPct val="0"/>
-              </a:spcBef>
-              <a:buFont typeface="Arial"/>
-              <a:buChar char="⚬"/>
-            </a:pPr>
-            <a:r>
-              <a:rPr lang="en-US" sz="2799">
-                <a:solidFill>
-                  <a:srgbClr val="000000"/>
-                </a:solidFill>
-                <a:latin typeface="Lato"/>
-                <a:ea typeface="Lato"/>
-                <a:cs typeface="Lato"/>
-                <a:sym typeface="Lato"/>
-              </a:rPr>
-              <a:t>Seaborn builds on Matplotlib for better visuals</a:t>
-            </a:r>
-          </a:p>
-        </p:txBody>
-      </p:sp>
-      <p:sp>
-        <p:nvSpPr>
-          <p:cNvPr name="TextBox 3" id="3"/>
-          <p:cNvSpPr txBox="true"/>
-          <p:nvPr/>
-        </p:nvSpPr>
-        <p:spPr>
+        </p:nvGrpSpPr>
+        <p:grpSpPr>
           <a:xfrm rot="0">
             <a:off x="885879" y="726851"/>
-            <a:ext cx="16730440" cy="963930"/>
+            <a:ext cx="16730440" cy="1477670"/>
+            <a:chOff x="0" y="0"/>
+            <a:chExt cx="22307253" cy="1970227"/>
           </a:xfrm>
-          <a:prstGeom prst="rect">
-            <a:avLst/>
-          </a:prstGeom>
-        </p:spPr>
-        <p:txBody>
-          <a:bodyPr anchor="t" rtlCol="false" tIns="0" lIns="0" bIns="0" rIns="0">
-            <a:spAutoFit/>
-          </a:bodyPr>
-          <a:lstStyle/>
-          <a:p>
-            <a:pPr algn="l" marL="0" indent="0" lvl="0">
-              <a:lnSpc>
-                <a:spcPts val="7200"/>
-              </a:lnSpc>
-            </a:pPr>
-            <a:r>
-              <a:rPr lang="en-US" sz="7200">
-                <a:solidFill>
-                  <a:srgbClr val="000000"/>
-                </a:solidFill>
-                <a:latin typeface="Lato"/>
-                <a:ea typeface="Lato"/>
-                <a:cs typeface="Lato"/>
-                <a:sym typeface="Lato"/>
-              </a:rPr>
-              <a:t>Overv</a:t>
-            </a:r>
-            <a:r>
-              <a:rPr lang="en-US" sz="7200">
-                <a:solidFill>
-                  <a:srgbClr val="000000"/>
-                </a:solidFill>
-                <a:latin typeface="Lato"/>
-                <a:ea typeface="Lato"/>
-                <a:cs typeface="Lato"/>
-                <a:sym typeface="Lato"/>
-              </a:rPr>
-              <a:t>iew of Python libraries for research</a:t>
-            </a:r>
-          </a:p>
-        </p:txBody>
-      </p:sp>
-      <p:sp>
-        <p:nvSpPr>
-          <p:cNvPr name="TextBox 4" id="4"/>
-          <p:cNvSpPr txBox="true"/>
+        </p:grpSpPr>
+        <p:sp>
+          <p:nvSpPr>
+            <p:cNvPr name="Freeform 6" id="6"/>
+            <p:cNvSpPr/>
+            <p:nvPr/>
+          </p:nvSpPr>
+          <p:spPr>
+            <a:xfrm flipH="false" flipV="false" rot="0">
+              <a:off x="0" y="0"/>
+              <a:ext cx="22307254" cy="1970227"/>
+            </a:xfrm>
+            <a:custGeom>
+              <a:avLst/>
+              <a:gdLst/>
+              <a:ahLst/>
+              <a:cxnLst/>
+              <a:rect r="r" b="b" t="t" l="l"/>
+              <a:pathLst>
+                <a:path h="1970227" w="22307254">
+                  <a:moveTo>
+                    <a:pt x="0" y="0"/>
+                  </a:moveTo>
+                  <a:lnTo>
+                    <a:pt x="22307254" y="0"/>
+                  </a:lnTo>
+                  <a:lnTo>
+                    <a:pt x="22307254" y="1970227"/>
+                  </a:lnTo>
+                  <a:lnTo>
+                    <a:pt x="0" y="1970227"/>
+                  </a:lnTo>
+                  <a:close/>
+                </a:path>
+              </a:pathLst>
+            </a:custGeom>
+            <a:solidFill>
+              <a:srgbClr val="000000">
+                <a:alpha val="0"/>
+              </a:srgbClr>
+            </a:solidFill>
+          </p:spPr>
+        </p:sp>
+        <p:sp>
+          <p:nvSpPr>
+            <p:cNvPr name="TextBox 7" id="7"/>
+            <p:cNvSpPr txBox="true"/>
+            <p:nvPr/>
+          </p:nvSpPr>
+          <p:spPr>
+            <a:xfrm>
+              <a:off x="0" y="133350"/>
+              <a:ext cx="22307253" cy="1836877"/>
+            </a:xfrm>
+            <a:prstGeom prst="rect">
+              <a:avLst/>
+            </a:prstGeom>
+          </p:spPr>
+          <p:txBody>
+            <a:bodyPr anchor="t" rtlCol="false" tIns="0" lIns="0" bIns="0" rIns="0"/>
+            <a:lstStyle/>
+            <a:p>
+              <a:pPr algn="l">
+                <a:lnSpc>
+                  <a:spcPts val="7200"/>
+                </a:lnSpc>
+              </a:pPr>
+              <a:r>
+                <a:rPr lang="en-US" sz="7200">
+                  <a:solidFill>
+                    <a:srgbClr val="000000"/>
+                  </a:solidFill>
+                  <a:latin typeface="Lato"/>
+                  <a:ea typeface="Lato"/>
+                  <a:cs typeface="Lato"/>
+                  <a:sym typeface="Lato"/>
+                </a:rPr>
+                <a:t>Overview of Python libraries for research</a:t>
+              </a:r>
+            </a:p>
+          </p:txBody>
+        </p:sp>
+      </p:grpSp>
+      <p:grpSp>
+        <p:nvGrpSpPr>
+          <p:cNvPr name="Group 8" id="8"/>
+          <p:cNvGrpSpPr/>
           <p:nvPr/>
-        </p:nvSpPr>
-        <p:spPr>
+        </p:nvGrpSpPr>
+        <p:grpSpPr>
           <a:xfrm rot="0">
             <a:off x="9742877" y="2947955"/>
             <a:ext cx="7873442" cy="6929755"/>
+            <a:chOff x="0" y="0"/>
+            <a:chExt cx="10497923" cy="9239673"/>
           </a:xfrm>
-          <a:prstGeom prst="rect">
-            <a:avLst/>
-          </a:prstGeom>
-        </p:spPr>
-        <p:txBody>
-          <a:bodyPr anchor="t" rtlCol="false" tIns="0" lIns="0" bIns="0" rIns="0">
-            <a:spAutoFit/>
-          </a:bodyPr>
-          <a:lstStyle/>
-          <a:p>
-            <a:pPr algn="l">
-              <a:lnSpc>
-                <a:spcPts val="3919"/>
-              </a:lnSpc>
-              <a:spcBef>
-                <a:spcPct val="0"/>
-              </a:spcBef>
-            </a:pPr>
-            <a:r>
-              <a:rPr lang="en-US" sz="2799">
-                <a:solidFill>
-                  <a:srgbClr val="000000"/>
-                </a:solidFill>
-                <a:latin typeface="Lato"/>
-                <a:ea typeface="Lato"/>
-                <a:cs typeface="Lato"/>
-                <a:sym typeface="Lato"/>
-              </a:rPr>
-              <a:t>🧪 SciPy</a:t>
-            </a:r>
-          </a:p>
-          <a:p>
-            <a:pPr algn="l" marL="604519" indent="-302260" lvl="1">
-              <a:lnSpc>
-                <a:spcPts val="3919"/>
-              </a:lnSpc>
-              <a:spcBef>
-                <a:spcPct val="0"/>
-              </a:spcBef>
-              <a:buFont typeface="Arial"/>
-              <a:buChar char="•"/>
-            </a:pPr>
-            <a:r>
-              <a:rPr lang="en-US" sz="2799">
-                <a:solidFill>
-                  <a:srgbClr val="000000"/>
-                </a:solidFill>
-                <a:latin typeface="Lato"/>
-                <a:ea typeface="Lato"/>
-                <a:cs typeface="Lato"/>
-                <a:sym typeface="Lato"/>
-              </a:rPr>
-              <a:t>Scientific computing</a:t>
-            </a:r>
-          </a:p>
-          <a:p>
-            <a:pPr algn="l" marL="604519" indent="-302260" lvl="1">
-              <a:lnSpc>
-                <a:spcPts val="3919"/>
-              </a:lnSpc>
-              <a:spcBef>
-                <a:spcPct val="0"/>
-              </a:spcBef>
-              <a:buFont typeface="Arial"/>
-              <a:buChar char="•"/>
-            </a:pPr>
-            <a:r>
-              <a:rPr lang="en-US" sz="2799">
-                <a:solidFill>
-                  <a:srgbClr val="000000"/>
-                </a:solidFill>
-                <a:latin typeface="Lato"/>
-                <a:ea typeface="Lato"/>
-                <a:cs typeface="Lato"/>
-                <a:sym typeface="Lato"/>
-              </a:rPr>
-              <a:t>Optimization, integration, stats, signal processing</a:t>
-            </a:r>
-          </a:p>
-          <a:p>
-            <a:pPr algn="l">
-              <a:lnSpc>
-                <a:spcPts val="3919"/>
-              </a:lnSpc>
-              <a:spcBef>
-                <a:spcPct val="0"/>
-              </a:spcBef>
-            </a:pPr>
-          </a:p>
-          <a:p>
-            <a:pPr algn="l">
-              <a:lnSpc>
-                <a:spcPts val="3919"/>
-              </a:lnSpc>
-              <a:spcBef>
-                <a:spcPct val="0"/>
-              </a:spcBef>
-            </a:pPr>
-            <a:r>
-              <a:rPr lang="en-US" sz="2799">
-                <a:solidFill>
-                  <a:srgbClr val="000000"/>
-                </a:solidFill>
-                <a:latin typeface="Lato"/>
-                <a:ea typeface="Lato"/>
-                <a:cs typeface="Lato"/>
-                <a:sym typeface="Lato"/>
-              </a:rPr>
-              <a:t>🤖 Scikit-learn</a:t>
-            </a:r>
-          </a:p>
-          <a:p>
-            <a:pPr algn="l" marL="604519" indent="-302260" lvl="1">
-              <a:lnSpc>
-                <a:spcPts val="3919"/>
-              </a:lnSpc>
-              <a:spcBef>
-                <a:spcPct val="0"/>
-              </a:spcBef>
-              <a:buFont typeface="Arial"/>
-              <a:buChar char="•"/>
-            </a:pPr>
-            <a:r>
-              <a:rPr lang="en-US" sz="2799">
-                <a:solidFill>
-                  <a:srgbClr val="000000"/>
-                </a:solidFill>
-                <a:latin typeface="Lato"/>
-                <a:ea typeface="Lato"/>
-                <a:cs typeface="Lato"/>
-                <a:sym typeface="Lato"/>
-              </a:rPr>
-              <a:t>Machine learning (classification, regression, clustering)</a:t>
-            </a:r>
-          </a:p>
-          <a:p>
-            <a:pPr algn="l" marL="604519" indent="-302260" lvl="1">
-              <a:lnSpc>
-                <a:spcPts val="3919"/>
-              </a:lnSpc>
-              <a:spcBef>
-                <a:spcPct val="0"/>
-              </a:spcBef>
-              <a:buFont typeface="Arial"/>
-              <a:buChar char="•"/>
-            </a:pPr>
-            <a:r>
-              <a:rPr lang="en-US" sz="2799">
-                <a:solidFill>
-                  <a:srgbClr val="000000"/>
-                </a:solidFill>
-                <a:latin typeface="Lato"/>
-                <a:ea typeface="Lato"/>
-                <a:cs typeface="Lato"/>
-                <a:sym typeface="Lato"/>
-              </a:rPr>
-              <a:t>Simple API for common ML tasks</a:t>
-            </a:r>
-          </a:p>
-          <a:p>
-            <a:pPr algn="l">
-              <a:lnSpc>
-                <a:spcPts val="3919"/>
-              </a:lnSpc>
-              <a:spcBef>
-                <a:spcPct val="0"/>
-              </a:spcBef>
-            </a:pPr>
-          </a:p>
-          <a:p>
-            <a:pPr algn="l">
-              <a:lnSpc>
-                <a:spcPts val="3919"/>
-              </a:lnSpc>
-              <a:spcBef>
-                <a:spcPct val="0"/>
-              </a:spcBef>
-            </a:pPr>
-            <a:r>
-              <a:rPr lang="en-US" sz="2799">
-                <a:solidFill>
-                  <a:srgbClr val="000000"/>
-                </a:solidFill>
-                <a:latin typeface="Lato"/>
-                <a:ea typeface="Lato"/>
-                <a:cs typeface="Lato"/>
-                <a:sym typeface="Lato"/>
-              </a:rPr>
-              <a:t>📓 Jupyter Notebook</a:t>
-            </a:r>
-          </a:p>
-          <a:p>
-            <a:pPr algn="l" marL="604519" indent="-302260" lvl="1">
-              <a:lnSpc>
-                <a:spcPts val="3919"/>
-              </a:lnSpc>
-              <a:spcBef>
-                <a:spcPct val="0"/>
-              </a:spcBef>
-              <a:buFont typeface="Arial"/>
-              <a:buChar char="•"/>
-            </a:pPr>
-            <a:r>
-              <a:rPr lang="en-US" sz="2799">
-                <a:solidFill>
-                  <a:srgbClr val="000000"/>
-                </a:solidFill>
-                <a:latin typeface="Lato"/>
-                <a:ea typeface="Lato"/>
-                <a:cs typeface="Lato"/>
-                <a:sym typeface="Lato"/>
-              </a:rPr>
-              <a:t>Interactive coding with visuals and documentation in one place</a:t>
-            </a:r>
-          </a:p>
-          <a:p>
-            <a:pPr algn="l">
-              <a:lnSpc>
-                <a:spcPts val="3919"/>
-              </a:lnSpc>
-              <a:spcBef>
-                <a:spcPct val="0"/>
-              </a:spcBef>
-            </a:pPr>
-          </a:p>
-        </p:txBody>
-      </p:sp>
+        </p:grpSpPr>
+        <p:sp>
+          <p:nvSpPr>
+            <p:cNvPr name="Freeform 9" id="9"/>
+            <p:cNvSpPr/>
+            <p:nvPr/>
+          </p:nvSpPr>
+          <p:spPr>
+            <a:xfrm flipH="false" flipV="false" rot="0">
+              <a:off x="0" y="0"/>
+              <a:ext cx="10497923" cy="9239673"/>
+            </a:xfrm>
+            <a:custGeom>
+              <a:avLst/>
+              <a:gdLst/>
+              <a:ahLst/>
+              <a:cxnLst/>
+              <a:rect r="r" b="b" t="t" l="l"/>
+              <a:pathLst>
+                <a:path h="9239673" w="10497923">
+                  <a:moveTo>
+                    <a:pt x="0" y="0"/>
+                  </a:moveTo>
+                  <a:lnTo>
+                    <a:pt x="10497923" y="0"/>
+                  </a:lnTo>
+                  <a:lnTo>
+                    <a:pt x="10497923" y="9239673"/>
+                  </a:lnTo>
+                  <a:lnTo>
+                    <a:pt x="0" y="9239673"/>
+                  </a:lnTo>
+                  <a:close/>
+                </a:path>
+              </a:pathLst>
+            </a:custGeom>
+            <a:solidFill>
+              <a:srgbClr val="000000">
+                <a:alpha val="0"/>
+              </a:srgbClr>
+            </a:solidFill>
+          </p:spPr>
+        </p:sp>
+        <p:sp>
+          <p:nvSpPr>
+            <p:cNvPr name="TextBox 10" id="10"/>
+            <p:cNvSpPr txBox="true"/>
+            <p:nvPr/>
+          </p:nvSpPr>
+          <p:spPr>
+            <a:xfrm>
+              <a:off x="0" y="-66675"/>
+              <a:ext cx="10497923" cy="9306348"/>
+            </a:xfrm>
+            <a:prstGeom prst="rect">
+              <a:avLst/>
+            </a:prstGeom>
+          </p:spPr>
+          <p:txBody>
+            <a:bodyPr anchor="t" rtlCol="false" tIns="0" lIns="0" bIns="0" rIns="0"/>
+            <a:lstStyle/>
+            <a:p>
+              <a:pPr algn="l">
+                <a:lnSpc>
+                  <a:spcPts val="3919"/>
+                </a:lnSpc>
+              </a:pPr>
+              <a:r>
+                <a:rPr lang="en-US" sz="2799">
+                  <a:solidFill>
+                    <a:srgbClr val="000000"/>
+                  </a:solidFill>
+                  <a:latin typeface="Lato"/>
+                  <a:ea typeface="Lato"/>
+                  <a:cs typeface="Lato"/>
+                  <a:sym typeface="Lato"/>
+                </a:rPr>
+                <a:t>🧪 SciPy</a:t>
+              </a:r>
+            </a:p>
+            <a:p>
+              <a:pPr algn="l" marL="639958" indent="-213319" lvl="2">
+                <a:lnSpc>
+                  <a:spcPts val="3919"/>
+                </a:lnSpc>
+                <a:buFont typeface="Arial"/>
+                <a:buChar char="⚬"/>
+              </a:pPr>
+              <a:r>
+                <a:rPr lang="en-US" sz="2799">
+                  <a:solidFill>
+                    <a:srgbClr val="000000"/>
+                  </a:solidFill>
+                  <a:latin typeface="Lato"/>
+                  <a:ea typeface="Lato"/>
+                  <a:cs typeface="Lato"/>
+                  <a:sym typeface="Lato"/>
+                </a:rPr>
+                <a:t>Scientific computing</a:t>
+              </a:r>
+            </a:p>
+            <a:p>
+              <a:pPr algn="l" marL="639958" indent="-213319" lvl="2">
+                <a:lnSpc>
+                  <a:spcPts val="3919"/>
+                </a:lnSpc>
+                <a:buFont typeface="Arial"/>
+                <a:buChar char="⚬"/>
+              </a:pPr>
+              <a:r>
+                <a:rPr lang="en-US" sz="2799">
+                  <a:solidFill>
+                    <a:srgbClr val="000000"/>
+                  </a:solidFill>
+                  <a:latin typeface="Lato"/>
+                  <a:ea typeface="Lato"/>
+                  <a:cs typeface="Lato"/>
+                  <a:sym typeface="Lato"/>
+                </a:rPr>
+                <a:t>Optimization, integration, stats, signal processing</a:t>
+              </a:r>
+            </a:p>
+            <a:p>
+              <a:pPr algn="l" marL="639958" indent="-213319" lvl="2">
+                <a:lnSpc>
+                  <a:spcPts val="3919"/>
+                </a:lnSpc>
+              </a:pPr>
+            </a:p>
+            <a:p>
+              <a:pPr algn="l" marL="639958" indent="-213319" lvl="2">
+                <a:lnSpc>
+                  <a:spcPts val="3919"/>
+                </a:lnSpc>
+              </a:pPr>
+              <a:r>
+                <a:rPr lang="en-US" sz="2799">
+                  <a:solidFill>
+                    <a:srgbClr val="000000"/>
+                  </a:solidFill>
+                  <a:latin typeface="Lato"/>
+                  <a:ea typeface="Lato"/>
+                  <a:cs typeface="Lato"/>
+                  <a:sym typeface="Lato"/>
+                </a:rPr>
+                <a:t>🤖 Scikit-learn</a:t>
+              </a:r>
+            </a:p>
+            <a:p>
+              <a:pPr algn="l" marL="639958" indent="-213319" lvl="2">
+                <a:lnSpc>
+                  <a:spcPts val="3919"/>
+                </a:lnSpc>
+                <a:buFont typeface="Arial"/>
+                <a:buChar char="⚬"/>
+              </a:pPr>
+              <a:r>
+                <a:rPr lang="en-US" sz="2799">
+                  <a:solidFill>
+                    <a:srgbClr val="000000"/>
+                  </a:solidFill>
+                  <a:latin typeface="Lato"/>
+                  <a:ea typeface="Lato"/>
+                  <a:cs typeface="Lato"/>
+                  <a:sym typeface="Lato"/>
+                </a:rPr>
+                <a:t>Machine learning (classification, regression, clustering)</a:t>
+              </a:r>
+            </a:p>
+            <a:p>
+              <a:pPr algn="l" marL="639958" indent="-213319" lvl="2">
+                <a:lnSpc>
+                  <a:spcPts val="3919"/>
+                </a:lnSpc>
+                <a:buFont typeface="Arial"/>
+                <a:buChar char="⚬"/>
+              </a:pPr>
+              <a:r>
+                <a:rPr lang="en-US" sz="2799">
+                  <a:solidFill>
+                    <a:srgbClr val="000000"/>
+                  </a:solidFill>
+                  <a:latin typeface="Lato"/>
+                  <a:ea typeface="Lato"/>
+                  <a:cs typeface="Lato"/>
+                  <a:sym typeface="Lato"/>
+                </a:rPr>
+                <a:t>Simple API for common ML tasks</a:t>
+              </a:r>
+            </a:p>
+            <a:p>
+              <a:pPr algn="l" marL="639958" indent="-213319" lvl="2">
+                <a:lnSpc>
+                  <a:spcPts val="3919"/>
+                </a:lnSpc>
+              </a:pPr>
+            </a:p>
+            <a:p>
+              <a:pPr algn="l" marL="639958" indent="-213319" lvl="2">
+                <a:lnSpc>
+                  <a:spcPts val="3919"/>
+                </a:lnSpc>
+              </a:pPr>
+              <a:r>
+                <a:rPr lang="en-US" sz="2799">
+                  <a:solidFill>
+                    <a:srgbClr val="000000"/>
+                  </a:solidFill>
+                  <a:latin typeface="Lato"/>
+                  <a:ea typeface="Lato"/>
+                  <a:cs typeface="Lato"/>
+                  <a:sym typeface="Lato"/>
+                </a:rPr>
+                <a:t>📓 Jupyter Notebook</a:t>
+              </a:r>
+            </a:p>
+            <a:p>
+              <a:pPr algn="l" marL="639958" indent="-213319" lvl="2">
+                <a:lnSpc>
+                  <a:spcPts val="3919"/>
+                </a:lnSpc>
+                <a:buFont typeface="Arial"/>
+                <a:buChar char="⚬"/>
+              </a:pPr>
+              <a:r>
+                <a:rPr lang="en-US" sz="2799">
+                  <a:solidFill>
+                    <a:srgbClr val="000000"/>
+                  </a:solidFill>
+                  <a:latin typeface="Lato"/>
+                  <a:ea typeface="Lato"/>
+                  <a:cs typeface="Lato"/>
+                  <a:sym typeface="Lato"/>
+                </a:rPr>
+                <a:t>Interactive coding with visuals and documentation in one place</a:t>
+              </a:r>
+            </a:p>
+            <a:p>
+              <a:pPr algn="l" marL="639958" indent="-213319" lvl="2">
+                <a:lnSpc>
+                  <a:spcPts val="3919"/>
+                </a:lnSpc>
+              </a:pPr>
+            </a:p>
+          </p:txBody>
+        </p:sp>
+      </p:grpSp>
     </p:spTree>
   </p:cSld>
   <p:clrMapOvr>
